--- a/pitch_kit/NLAMS_SIH_Presentation.pptx
+++ b/pitch_kit/NLAMS_SIH_Presentation.pptx
@@ -14,6 +14,9 @@
     <p:sldId id="262" r:id="rId13"/>
     <p:sldId id="263" r:id="rId14"/>
     <p:sldId id="264" r:id="rId15"/>
+    <p:sldId id="265" r:id="rId16"/>
+    <p:sldId id="266" r:id="rId17"/>
+    <p:sldId id="267" r:id="rId18"/>
   </p:sldIdLst>
   <p:sldSz cx="12188952" cy="6858000" type="screen4x3"/>
   <p:notesSz cx="6858000" cy="9144000"/>
@@ -3111,11 +3114,11 @@
             <a:avLst/>
           </a:prstGeom>
           <a:solidFill>
-            <a:srgbClr val="071933"/>
+            <a:srgbClr val="040D1A"/>
           </a:solidFill>
           <a:ln>
             <a:solidFill>
-              <a:srgbClr val="071933"/>
+              <a:srgbClr val="040D1A"/>
             </a:solidFill>
           </a:ln>
         </p:spPr>
@@ -3149,18 +3152,18 @@
         </p:nvSpPr>
         <p:spPr>
           <a:xfrm>
-            <a:off x="731520" y="1097280"/>
+            <a:off x="731520" y="1005840"/>
             <a:ext cx="10725912" cy="73152"/>
           </a:xfrm>
           <a:prstGeom prst="rect">
             <a:avLst/>
           </a:prstGeom>
           <a:solidFill>
-            <a:srgbClr val="EA580C"/>
+            <a:srgbClr val="F97316"/>
           </a:solidFill>
           <a:ln>
             <a:solidFill>
-              <a:srgbClr val="EA580C"/>
+              <a:srgbClr val="F97316"/>
             </a:solidFill>
           </a:ln>
         </p:spPr>
@@ -3194,8 +3197,8 @@
         </p:nvSpPr>
         <p:spPr>
           <a:xfrm>
-            <a:off x="731520" y="1371600"/>
-            <a:ext cx="10725912" cy="4114800"/>
+            <a:off x="731520" y="1280160"/>
+            <a:ext cx="10725912" cy="4389120"/>
           </a:xfrm>
           <a:prstGeom prst="rect">
             <a:avLst/>
@@ -3216,29 +3219,32 @@
               </a:defRPr>
             </a:pPr>
             <a:r>
-              <a:t>DEPARTMENT OF LAND RESOURCES (DoLR) • MINISTRY OF RURAL DEVELOPMENT</a:t>
-            </a:r>
-          </a:p>
-          <a:p>
-            <a:pPr>
-              <a:spcBef>
-                <a:spcPts val="1400"/>
+              <a:t>SMART INDIA HACKATHON 2026 • PROBLEM STATEMENT: SIH26016</a:t>
+            </a:r>
+          </a:p>
+          <a:p>
+            <a:pPr>
+              <a:spcBef>
+                <a:spcPts val="1200"/>
+              </a:spcBef>
+              <a:defRPr sz="3200" b="1">
+                <a:solidFill>
+                  <a:srgbClr val="FFFFFF"/>
+                </a:solidFill>
+              </a:defRPr>
+            </a:pPr>
+            <a:r>
+              <a:t>Real-Time National Land Acquisition &amp; Management System (NLAMS)</a:t>
+            </a:r>
+          </a:p>
+          <a:p>
+            <a:pPr>
+              <a:spcBef>
+                <a:spcPts val="800"/>
               </a:spcBef>
               <a:spcAft>
-                <a:spcPts val="1400"/>
+                <a:spcPts val="2400"/>
               </a:spcAft>
-              <a:defRPr sz="3000" b="1">
-                <a:solidFill>
-                  <a:srgbClr val="FFFFFF"/>
-                </a:solidFill>
-              </a:defRPr>
-            </a:pPr>
-            <a:r>
-              <a:t>NLAMS: Real-Time National Land Acquisition &amp; Management System</a:t>
-            </a:r>
-          </a:p>
-          <a:p>
-            <a:pPr>
               <a:defRPr sz="1500">
                 <a:solidFill>
                   <a:srgbClr val="CBD5E1"/>
@@ -3246,7 +3252,19 @@
               </a:defRPr>
             </a:pPr>
             <a:r>
-              <a:t>A Unified Statutory Microservice Platform Enforcing RFCTLARR Act 2013 &amp; Sector-Specific Infrastructure Acts</a:t>
+              <a:t>A Unified Statutory Digital Enterprise Platform Enforcing RFCTLARR Act 2013 &amp; Sectoral Infrastructure Acts</a:t>
+            </a:r>
+          </a:p>
+          <a:p>
+            <a:pPr>
+              <a:defRPr sz="1300" b="1">
+                <a:solidFill>
+                  <a:srgbClr val="059669"/>
+                </a:solidFill>
+              </a:defRPr>
+            </a:pPr>
+            <a:r>
+              <a:t>TEAM NAME: APEX   |   MINISTRY: Ministry of Rural Development (Department of Land Resources - DoLR)</a:t>
             </a:r>
           </a:p>
         </p:txBody>
@@ -3259,18 +3277,18 @@
         </p:nvSpPr>
         <p:spPr>
           <a:xfrm>
-            <a:off x="731520" y="5120640"/>
-            <a:ext cx="10725912" cy="1005840"/>
+            <a:off x="731520" y="5486400"/>
+            <a:ext cx="2560320" cy="914400"/>
           </a:xfrm>
           <a:prstGeom prst="roundRect">
             <a:avLst/>
           </a:prstGeom>
           <a:solidFill>
-            <a:srgbClr val="0A2558"/>
+            <a:srgbClr val="0B1E36"/>
           </a:solidFill>
           <a:ln>
             <a:solidFill>
-              <a:srgbClr val="1E3A8A"/>
+              <a:srgbClr val="1E3A5F"/>
             </a:solidFill>
           </a:ln>
         </p:spPr>
@@ -3289,30 +3307,2377 @@
           </a:fontRef>
         </p:style>
         <p:txBody>
-          <a:bodyPr rtlCol="0" anchor="ctr" wrap="square"/>
-          <a:lstStyle/>
-          <a:p>
-            <a:pPr algn="ctr">
-              <a:defRPr sz="1100" b="1">
+          <a:bodyPr rtlCol="0" anchor="ctr"/>
+          <a:lstStyle/>
+          <a:p>
+            <a:pPr algn="ctr"/>
+          </a:p>
+        </p:txBody>
+      </p:sp>
+      <p:sp>
+        <p:nvSpPr>
+          <p:cNvPr id="6" name="TextBox 5"/>
+          <p:cNvSpPr txBox="1"/>
+          <p:nvPr/>
+        </p:nvSpPr>
+        <p:spPr>
+          <a:xfrm>
+            <a:off x="777240" y="5532120"/>
+            <a:ext cx="2468880" cy="822960"/>
+          </a:xfrm>
+          <a:prstGeom prst="rect">
+            <a:avLst/>
+          </a:prstGeom>
+          <a:noFill/>
+        </p:spPr>
+        <p:txBody>
+          <a:bodyPr wrap="square">
+            <a:spAutoFit/>
+          </a:bodyPr>
+          <a:lstStyle/>
+          <a:p>
+            <a:pPr>
+              <a:defRPr sz="1200" b="1">
+                <a:solidFill>
+                  <a:srgbClr val="F97316"/>
+                </a:solidFill>
+              </a:defRPr>
+            </a:pPr>
+            <a:r>
+              <a:t>14-Digit ULPIN</a:t>
+            </a:r>
+          </a:p>
+          <a:p>
+            <a:pPr>
+              <a:defRPr sz="900">
                 <a:solidFill>
                   <a:srgbClr val="FFFFFF"/>
                 </a:solidFill>
               </a:defRPr>
             </a:pPr>
             <a:r>
-              <a:t>Team: Technical Lead | Girl 1 (Lead) | Girl 2 (Researcher) | Girl 3 (Pitcher) | Girl 4 (Frontend) | Boy 1 (DevOps)</a:t>
-            </a:r>
-          </a:p>
-          <a:p>
-            <a:pPr>
-              <a:defRPr sz="1000">
-                <a:solidFill>
-                  <a:srgbClr val="93C5FD"/>
-                </a:solidFill>
-              </a:defRPr>
-            </a:pPr>
-            <a:r>
-              <a:t>Core Standards: IndEA 2.0 • 14-Digit ULPIN (Bhu-Aadhaar) • PFMS Direct Benefit Transfer (DBT) • GIGW 3.0</a:t>
+              <a:t>Bhu-Aadhaar Registry Locks</a:t>
+            </a:r>
+          </a:p>
+        </p:txBody>
+      </p:sp>
+      <p:sp>
+        <p:nvSpPr>
+          <p:cNvPr id="7" name="Rounded Rectangle 6"/>
+          <p:cNvSpPr/>
+          <p:nvPr/>
+        </p:nvSpPr>
+        <p:spPr>
+          <a:xfrm>
+            <a:off x="3456432" y="5486400"/>
+            <a:ext cx="2560320" cy="914400"/>
+          </a:xfrm>
+          <a:prstGeom prst="roundRect">
+            <a:avLst/>
+          </a:prstGeom>
+          <a:solidFill>
+            <a:srgbClr val="0B1E36"/>
+          </a:solidFill>
+          <a:ln>
+            <a:solidFill>
+              <a:srgbClr val="1E3A5F"/>
+            </a:solidFill>
+          </a:ln>
+        </p:spPr>
+        <p:style>
+          <a:lnRef idx="1">
+            <a:schemeClr val="accent1"/>
+          </a:lnRef>
+          <a:fillRef idx="3">
+            <a:schemeClr val="accent1"/>
+          </a:fillRef>
+          <a:effectRef idx="2">
+            <a:schemeClr val="accent1"/>
+          </a:effectRef>
+          <a:fontRef idx="minor">
+            <a:schemeClr val="lt1"/>
+          </a:fontRef>
+        </p:style>
+        <p:txBody>
+          <a:bodyPr rtlCol="0" anchor="ctr"/>
+          <a:lstStyle/>
+          <a:p>
+            <a:pPr algn="ctr"/>
+          </a:p>
+        </p:txBody>
+      </p:sp>
+      <p:sp>
+        <p:nvSpPr>
+          <p:cNvPr id="8" name="TextBox 7"/>
+          <p:cNvSpPr txBox="1"/>
+          <p:nvPr/>
+        </p:nvSpPr>
+        <p:spPr>
+          <a:xfrm>
+            <a:off x="3502152" y="5532120"/>
+            <a:ext cx="2468880" cy="822960"/>
+          </a:xfrm>
+          <a:prstGeom prst="rect">
+            <a:avLst/>
+          </a:prstGeom>
+          <a:noFill/>
+        </p:spPr>
+        <p:txBody>
+          <a:bodyPr wrap="square">
+            <a:spAutoFit/>
+          </a:bodyPr>
+          <a:lstStyle/>
+          <a:p>
+            <a:pPr>
+              <a:defRPr sz="1200" b="1">
+                <a:solidFill>
+                  <a:srgbClr val="F97316"/>
+                </a:solidFill>
+              </a:defRPr>
+            </a:pPr>
+            <a:r>
+              <a:t>9 Statutory Stages</a:t>
+            </a:r>
+          </a:p>
+          <a:p>
+            <a:pPr>
+              <a:defRPr sz="900">
+                <a:solidFill>
+                  <a:srgbClr val="FFFFFF"/>
+                </a:solidFill>
+              </a:defRPr>
+            </a:pPr>
+            <a:r>
+              <a:t>RFCTLARR 2013 Gatekeeper</a:t>
+            </a:r>
+          </a:p>
+        </p:txBody>
+      </p:sp>
+      <p:sp>
+        <p:nvSpPr>
+          <p:cNvPr id="9" name="Rounded Rectangle 8"/>
+          <p:cNvSpPr/>
+          <p:nvPr/>
+        </p:nvSpPr>
+        <p:spPr>
+          <a:xfrm>
+            <a:off x="6181344" y="5486400"/>
+            <a:ext cx="2560320" cy="914400"/>
+          </a:xfrm>
+          <a:prstGeom prst="roundRect">
+            <a:avLst/>
+          </a:prstGeom>
+          <a:solidFill>
+            <a:srgbClr val="0B1E36"/>
+          </a:solidFill>
+          <a:ln>
+            <a:solidFill>
+              <a:srgbClr val="1E3A5F"/>
+            </a:solidFill>
+          </a:ln>
+        </p:spPr>
+        <p:style>
+          <a:lnRef idx="1">
+            <a:schemeClr val="accent1"/>
+          </a:lnRef>
+          <a:fillRef idx="3">
+            <a:schemeClr val="accent1"/>
+          </a:fillRef>
+          <a:effectRef idx="2">
+            <a:schemeClr val="accent1"/>
+          </a:effectRef>
+          <a:fontRef idx="minor">
+            <a:schemeClr val="lt1"/>
+          </a:fontRef>
+        </p:style>
+        <p:txBody>
+          <a:bodyPr rtlCol="0" anchor="ctr"/>
+          <a:lstStyle/>
+          <a:p>
+            <a:pPr algn="ctr"/>
+          </a:p>
+        </p:txBody>
+      </p:sp>
+      <p:sp>
+        <p:nvSpPr>
+          <p:cNvPr id="10" name="TextBox 9"/>
+          <p:cNvSpPr txBox="1"/>
+          <p:nvPr/>
+        </p:nvSpPr>
+        <p:spPr>
+          <a:xfrm>
+            <a:off x="6227064" y="5532120"/>
+            <a:ext cx="2468880" cy="822960"/>
+          </a:xfrm>
+          <a:prstGeom prst="rect">
+            <a:avLst/>
+          </a:prstGeom>
+          <a:noFill/>
+        </p:spPr>
+        <p:txBody>
+          <a:bodyPr wrap="square">
+            <a:spAutoFit/>
+          </a:bodyPr>
+          <a:lstStyle/>
+          <a:p>
+            <a:pPr>
+              <a:defRPr sz="1200" b="1">
+                <a:solidFill>
+                  <a:srgbClr val="F97316"/>
+                </a:solidFill>
+              </a:defRPr>
+            </a:pPr>
+            <a:r>
+              <a:t>PFMS Direct Credit</a:t>
+            </a:r>
+          </a:p>
+          <a:p>
+            <a:pPr>
+              <a:defRPr sz="900">
+                <a:solidFill>
+                  <a:srgbClr val="FFFFFF"/>
+                </a:solidFill>
+              </a:defRPr>
+            </a:pPr>
+            <a:r>
+              <a:t>100% Leak-Proof DBT</a:t>
+            </a:r>
+          </a:p>
+        </p:txBody>
+      </p:sp>
+      <p:sp>
+        <p:nvSpPr>
+          <p:cNvPr id="11" name="Rounded Rectangle 10"/>
+          <p:cNvSpPr/>
+          <p:nvPr/>
+        </p:nvSpPr>
+        <p:spPr>
+          <a:xfrm>
+            <a:off x="8906256" y="5486400"/>
+            <a:ext cx="2560320" cy="914400"/>
+          </a:xfrm>
+          <a:prstGeom prst="roundRect">
+            <a:avLst/>
+          </a:prstGeom>
+          <a:solidFill>
+            <a:srgbClr val="0B1E36"/>
+          </a:solidFill>
+          <a:ln>
+            <a:solidFill>
+              <a:srgbClr val="1E3A5F"/>
+            </a:solidFill>
+          </a:ln>
+        </p:spPr>
+        <p:style>
+          <a:lnRef idx="1">
+            <a:schemeClr val="accent1"/>
+          </a:lnRef>
+          <a:fillRef idx="3">
+            <a:schemeClr val="accent1"/>
+          </a:fillRef>
+          <a:effectRef idx="2">
+            <a:schemeClr val="accent1"/>
+          </a:effectRef>
+          <a:fontRef idx="minor">
+            <a:schemeClr val="lt1"/>
+          </a:fontRef>
+        </p:style>
+        <p:txBody>
+          <a:bodyPr rtlCol="0" anchor="ctr"/>
+          <a:lstStyle/>
+          <a:p>
+            <a:pPr algn="ctr"/>
+          </a:p>
+        </p:txBody>
+      </p:sp>
+      <p:sp>
+        <p:nvSpPr>
+          <p:cNvPr id="12" name="TextBox 11"/>
+          <p:cNvSpPr txBox="1"/>
+          <p:nvPr/>
+        </p:nvSpPr>
+        <p:spPr>
+          <a:xfrm>
+            <a:off x="8951976" y="5532120"/>
+            <a:ext cx="2468880" cy="822960"/>
+          </a:xfrm>
+          <a:prstGeom prst="rect">
+            <a:avLst/>
+          </a:prstGeom>
+          <a:noFill/>
+        </p:spPr>
+        <p:txBody>
+          <a:bodyPr wrap="square">
+            <a:spAutoFit/>
+          </a:bodyPr>
+          <a:lstStyle/>
+          <a:p>
+            <a:pPr>
+              <a:defRPr sz="1200" b="1">
+                <a:solidFill>
+                  <a:srgbClr val="F97316"/>
+                </a:solidFill>
+              </a:defRPr>
+            </a:pPr>
+            <a:r>
+              <a:t>AI Delay Engine</a:t>
+            </a:r>
+          </a:p>
+          <a:p>
+            <a:pPr>
+              <a:defRPr sz="900">
+                <a:solidFill>
+                  <a:srgbClr val="FFFFFF"/>
+                </a:solidFill>
+              </a:defRPr>
+            </a:pPr>
+            <a:r>
+              <a:t>Scikit-Learn Random Forest</a:t>
+            </a:r>
+          </a:p>
+        </p:txBody>
+      </p:sp>
+    </p:spTree>
+  </p:cSld>
+  <p:clrMapOvr>
+    <a:masterClrMapping/>
+  </p:clrMapOvr>
+</p:sld>
+</file>
+
+<file path=ppt/slides/slide10.xml><?xml version="1.0" encoding="utf-8"?>
+<p:sld xmlns:a="http://schemas.openxmlformats.org/drawingml/2006/main" xmlns:p="http://schemas.openxmlformats.org/presentationml/2006/main" xmlns:r="http://schemas.openxmlformats.org/officeDocument/2006/relationships">
+  <p:cSld>
+    <p:spTree>
+      <p:nvGrpSpPr>
+        <p:cNvPr id="1" name=""/>
+        <p:cNvGrpSpPr/>
+        <p:nvPr/>
+      </p:nvGrpSpPr>
+      <p:grpSpPr/>
+      <p:sp>
+        <p:nvSpPr>
+          <p:cNvPr id="2" name="Rectangle 1"/>
+          <p:cNvSpPr/>
+          <p:nvPr/>
+        </p:nvSpPr>
+        <p:spPr>
+          <a:xfrm>
+            <a:off x="0" y="0"/>
+            <a:ext cx="12188952" cy="1051560"/>
+          </a:xfrm>
+          <a:prstGeom prst="rect">
+            <a:avLst/>
+          </a:prstGeom>
+          <a:solidFill>
+            <a:srgbClr val="071426"/>
+          </a:solidFill>
+          <a:ln>
+            <a:solidFill>
+              <a:srgbClr val="071426"/>
+            </a:solidFill>
+          </a:ln>
+        </p:spPr>
+        <p:style>
+          <a:lnRef idx="1">
+            <a:schemeClr val="accent1"/>
+          </a:lnRef>
+          <a:fillRef idx="3">
+            <a:schemeClr val="accent1"/>
+          </a:fillRef>
+          <a:effectRef idx="2">
+            <a:schemeClr val="accent1"/>
+          </a:effectRef>
+          <a:fontRef idx="minor">
+            <a:schemeClr val="lt1"/>
+          </a:fontRef>
+        </p:style>
+        <p:txBody>
+          <a:bodyPr rtlCol="0" anchor="ctr"/>
+          <a:lstStyle/>
+          <a:p>
+            <a:pPr algn="ctr"/>
+          </a:p>
+        </p:txBody>
+      </p:sp>
+      <p:sp>
+        <p:nvSpPr>
+          <p:cNvPr id="3" name="Rectangle 2"/>
+          <p:cNvSpPr/>
+          <p:nvPr/>
+        </p:nvSpPr>
+        <p:spPr>
+          <a:xfrm>
+            <a:off x="0" y="1051560"/>
+            <a:ext cx="4059936" cy="54864"/>
+          </a:xfrm>
+          <a:prstGeom prst="rect">
+            <a:avLst/>
+          </a:prstGeom>
+          <a:solidFill>
+            <a:srgbClr val="F97316"/>
+          </a:solidFill>
+          <a:ln>
+            <a:solidFill>
+              <a:srgbClr val="F97316"/>
+            </a:solidFill>
+          </a:ln>
+        </p:spPr>
+        <p:style>
+          <a:lnRef idx="1">
+            <a:schemeClr val="accent1"/>
+          </a:lnRef>
+          <a:fillRef idx="3">
+            <a:schemeClr val="accent1"/>
+          </a:fillRef>
+          <a:effectRef idx="2">
+            <a:schemeClr val="accent1"/>
+          </a:effectRef>
+          <a:fontRef idx="minor">
+            <a:schemeClr val="lt1"/>
+          </a:fontRef>
+        </p:style>
+        <p:txBody>
+          <a:bodyPr rtlCol="0" anchor="ctr"/>
+          <a:lstStyle/>
+          <a:p>
+            <a:pPr algn="ctr"/>
+          </a:p>
+        </p:txBody>
+      </p:sp>
+      <p:sp>
+        <p:nvSpPr>
+          <p:cNvPr id="4" name="Rectangle 3"/>
+          <p:cNvSpPr/>
+          <p:nvPr/>
+        </p:nvSpPr>
+        <p:spPr>
+          <a:xfrm>
+            <a:off x="4059936" y="1051560"/>
+            <a:ext cx="4059936" cy="54864"/>
+          </a:xfrm>
+          <a:prstGeom prst="rect">
+            <a:avLst/>
+          </a:prstGeom>
+          <a:solidFill>
+            <a:srgbClr val="FFFFFF"/>
+          </a:solidFill>
+          <a:ln>
+            <a:solidFill>
+              <a:srgbClr val="FFFFFF"/>
+            </a:solidFill>
+          </a:ln>
+        </p:spPr>
+        <p:style>
+          <a:lnRef idx="1">
+            <a:schemeClr val="accent1"/>
+          </a:lnRef>
+          <a:fillRef idx="3">
+            <a:schemeClr val="accent1"/>
+          </a:fillRef>
+          <a:effectRef idx="2">
+            <a:schemeClr val="accent1"/>
+          </a:effectRef>
+          <a:fontRef idx="minor">
+            <a:schemeClr val="lt1"/>
+          </a:fontRef>
+        </p:style>
+        <p:txBody>
+          <a:bodyPr rtlCol="0" anchor="ctr"/>
+          <a:lstStyle/>
+          <a:p>
+            <a:pPr algn="ctr"/>
+          </a:p>
+        </p:txBody>
+      </p:sp>
+      <p:sp>
+        <p:nvSpPr>
+          <p:cNvPr id="5" name="Rectangle 4"/>
+          <p:cNvSpPr/>
+          <p:nvPr/>
+        </p:nvSpPr>
+        <p:spPr>
+          <a:xfrm>
+            <a:off x="8119872" y="1051560"/>
+            <a:ext cx="4069080" cy="54864"/>
+          </a:xfrm>
+          <a:prstGeom prst="rect">
+            <a:avLst/>
+          </a:prstGeom>
+          <a:solidFill>
+            <a:srgbClr val="059669"/>
+          </a:solidFill>
+          <a:ln>
+            <a:solidFill>
+              <a:srgbClr val="059669"/>
+            </a:solidFill>
+          </a:ln>
+        </p:spPr>
+        <p:style>
+          <a:lnRef idx="1">
+            <a:schemeClr val="accent1"/>
+          </a:lnRef>
+          <a:fillRef idx="3">
+            <a:schemeClr val="accent1"/>
+          </a:fillRef>
+          <a:effectRef idx="2">
+            <a:schemeClr val="accent1"/>
+          </a:effectRef>
+          <a:fontRef idx="minor">
+            <a:schemeClr val="lt1"/>
+          </a:fontRef>
+        </p:style>
+        <p:txBody>
+          <a:bodyPr rtlCol="0" anchor="ctr"/>
+          <a:lstStyle/>
+          <a:p>
+            <a:pPr algn="ctr"/>
+          </a:p>
+        </p:txBody>
+      </p:sp>
+      <p:sp>
+        <p:nvSpPr>
+          <p:cNvPr id="6" name="TextBox 5"/>
+          <p:cNvSpPr txBox="1"/>
+          <p:nvPr/>
+        </p:nvSpPr>
+        <p:spPr>
+          <a:xfrm>
+            <a:off x="731520" y="109728"/>
+            <a:ext cx="10725912" cy="868680"/>
+          </a:xfrm>
+          <a:prstGeom prst="rect">
+            <a:avLst/>
+          </a:prstGeom>
+          <a:noFill/>
+        </p:spPr>
+        <p:txBody>
+          <a:bodyPr wrap="square">
+            <a:spAutoFit/>
+          </a:bodyPr>
+          <a:lstStyle/>
+          <a:p>
+            <a:pPr>
+              <a:defRPr sz="1000" b="1">
+                <a:solidFill>
+                  <a:srgbClr val="FDBA74"/>
+                </a:solidFill>
+              </a:defRPr>
+            </a:pPr>
+            <a:r>
+              <a:t>SIH26016 • TEAM APEX • MINISTRY OF RURAL DEVELOPMENT (DOLR)</a:t>
+            </a:r>
+          </a:p>
+          <a:p>
+            <a:pPr>
+              <a:defRPr sz="2000" b="1">
+                <a:solidFill>
+                  <a:srgbClr val="FFFFFF"/>
+                </a:solidFill>
+              </a:defRPr>
+            </a:pPr>
+            <a:r>
+              <a:t>Module 8: AI Delay-Risk Predictor (Scikit-Learn Random Forest)</a:t>
+            </a:r>
+          </a:p>
+        </p:txBody>
+      </p:sp>
+      <p:sp>
+        <p:nvSpPr>
+          <p:cNvPr id="7" name="Rounded Rectangle 6"/>
+          <p:cNvSpPr/>
+          <p:nvPr/>
+        </p:nvSpPr>
+        <p:spPr>
+          <a:xfrm>
+            <a:off x="731520" y="1280160"/>
+            <a:ext cx="5120640" cy="5120640"/>
+          </a:xfrm>
+          <a:prstGeom prst="roundRect">
+            <a:avLst/>
+          </a:prstGeom>
+          <a:solidFill>
+            <a:srgbClr val="FFFFFF"/>
+          </a:solidFill>
+          <a:ln w="19050">
+            <a:solidFill>
+              <a:srgbClr val="E2E8F0"/>
+            </a:solidFill>
+          </a:ln>
+        </p:spPr>
+        <p:style>
+          <a:lnRef idx="1">
+            <a:schemeClr val="accent1"/>
+          </a:lnRef>
+          <a:fillRef idx="3">
+            <a:schemeClr val="accent1"/>
+          </a:fillRef>
+          <a:effectRef idx="2">
+            <a:schemeClr val="accent1"/>
+          </a:effectRef>
+          <a:fontRef idx="minor">
+            <a:schemeClr val="lt1"/>
+          </a:fontRef>
+        </p:style>
+        <p:txBody>
+          <a:bodyPr rtlCol="0" anchor="ctr"/>
+          <a:lstStyle/>
+          <a:p>
+            <a:pPr algn="ctr"/>
+          </a:p>
+        </p:txBody>
+      </p:sp>
+      <p:sp>
+        <p:nvSpPr>
+          <p:cNvPr id="8" name="TextBox 7"/>
+          <p:cNvSpPr txBox="1"/>
+          <p:nvPr/>
+        </p:nvSpPr>
+        <p:spPr>
+          <a:xfrm>
+            <a:off x="868680" y="1417319"/>
+            <a:ext cx="4846320" cy="4846320"/>
+          </a:xfrm>
+          <a:prstGeom prst="rect">
+            <a:avLst/>
+          </a:prstGeom>
+          <a:noFill/>
+        </p:spPr>
+        <p:txBody>
+          <a:bodyPr wrap="square">
+            <a:spAutoFit/>
+          </a:bodyPr>
+          <a:lstStyle/>
+          <a:p>
+            <a:pPr>
+              <a:defRPr sz="1400" b="1">
+                <a:solidFill>
+                  <a:srgbClr val="071426"/>
+                </a:solidFill>
+              </a:defRPr>
+            </a:pPr>
+            <a:r>
+              <a:t>Multi-Variable ML Forecasting Engine</a:t>
+            </a:r>
+          </a:p>
+          <a:p>
+            <a:pPr>
+              <a:spcAft>
+                <a:spcPts val="400"/>
+              </a:spcAft>
+              <a:defRPr sz="900" b="1">
+                <a:solidFill>
+                  <a:srgbClr val="F97316"/>
+                </a:solidFill>
+              </a:defRPr>
+            </a:pPr>
+            <a:r>
+              <a:t>[RANDOM FOREST ML]</a:t>
+            </a:r>
+          </a:p>
+          <a:p>
+            <a:pPr>
+              <a:spcBef>
+                <a:spcPts val="300"/>
+              </a:spcBef>
+              <a:defRPr sz="1100">
+                <a:solidFill>
+                  <a:srgbClr val="334155"/>
+                </a:solidFill>
+              </a:defRPr>
+            </a:pPr>
+            <a:r>
+              <a:t>• Machine Learning Algorithm: Scikit-learn Random Forest Regressor &amp; Classifier (`/api/predict-delay`).</a:t>
+            </a:r>
+          </a:p>
+          <a:p>
+            <a:pPr>
+              <a:spcBef>
+                <a:spcPts val="300"/>
+              </a:spcBef>
+              <a:defRPr sz="1100">
+                <a:solidFill>
+                  <a:srgbClr val="334155"/>
+                </a:solidFill>
+              </a:defRPr>
+            </a:pPr>
+            <a:r>
+              <a:t>• Feature Vector Ingested:</a:t>
+            </a:r>
+          </a:p>
+          <a:p>
+            <a:pPr>
+              <a:spcBef>
+                <a:spcPts val="300"/>
+              </a:spcBef>
+              <a:defRPr sz="1100">
+                <a:solidFill>
+                  <a:srgbClr val="334155"/>
+                </a:solidFill>
+              </a:defRPr>
+            </a:pPr>
+            <a:r>
+              <a:t>•   1. Corridor Area in Hectares (Scale factor)</a:t>
+            </a:r>
+          </a:p>
+          <a:p>
+            <a:pPr>
+              <a:spcBef>
+                <a:spcPts val="300"/>
+              </a:spcBef>
+              <a:defRPr sz="1100">
+                <a:solidFill>
+                  <a:srgbClr val="334155"/>
+                </a:solidFill>
+              </a:defRPr>
+            </a:pPr>
+            <a:r>
+              <a:t>•   2. Total Cadastral Parcels Linked</a:t>
+            </a:r>
+          </a:p>
+          <a:p>
+            <a:pPr>
+              <a:spcBef>
+                <a:spcPts val="300"/>
+              </a:spcBef>
+              <a:defRPr sz="1100">
+                <a:solidFill>
+                  <a:srgbClr val="334155"/>
+                </a:solidFill>
+              </a:defRPr>
+            </a:pPr>
+            <a:r>
+              <a:t>•   3. Active Disputed Parcels Count (Sec 15 Objections)</a:t>
+            </a:r>
+          </a:p>
+          <a:p>
+            <a:pPr>
+              <a:spcBef>
+                <a:spcPts val="300"/>
+              </a:spcBef>
+              <a:defRPr sz="1100">
+                <a:solidFill>
+                  <a:srgbClr val="334155"/>
+                </a:solidFill>
+              </a:defRPr>
+            </a:pPr>
+            <a:r>
+              <a:t>•   4. Rural Multiplier Factor (Urban 1.0x vs Rural 2.0x)</a:t>
+            </a:r>
+          </a:p>
+          <a:p>
+            <a:pPr>
+              <a:spcBef>
+                <a:spcPts val="300"/>
+              </a:spcBef>
+              <a:defRPr sz="1100">
+                <a:solidFill>
+                  <a:srgbClr val="334155"/>
+                </a:solidFill>
+              </a:defRPr>
+            </a:pPr>
+            <a:r>
+              <a:t>•   5. Forest / Restricted Zone Overlap Flag</a:t>
+            </a:r>
+          </a:p>
+          <a:p>
+            <a:pPr>
+              <a:spcBef>
+                <a:spcPts val="300"/>
+              </a:spcBef>
+              <a:defRPr sz="1100">
+                <a:solidFill>
+                  <a:srgbClr val="334155"/>
+                </a:solidFill>
+              </a:defRPr>
+            </a:pPr>
+            <a:r>
+              <a:t>•   6. Stage Dwell Time in Days</a:t>
+            </a:r>
+          </a:p>
+          <a:p>
+            <a:pPr>
+              <a:spcBef>
+                <a:spcPts val="300"/>
+              </a:spcBef>
+              <a:defRPr sz="1100">
+                <a:solidFill>
+                  <a:srgbClr val="334155"/>
+                </a:solidFill>
+              </a:defRPr>
+            </a:pPr>
+            <a:r>
+              <a:t>• Outputs: Forecasted Schedule Lag in Days &amp; Months, Risk Score (0-100), and Severity Category (Low, Med, High, Critical).</a:t>
+            </a:r>
+          </a:p>
+        </p:txBody>
+      </p:sp>
+      <p:sp>
+        <p:nvSpPr>
+          <p:cNvPr id="9" name="Rounded Rectangle 8"/>
+          <p:cNvSpPr/>
+          <p:nvPr/>
+        </p:nvSpPr>
+        <p:spPr>
+          <a:xfrm>
+            <a:off x="6309360" y="1280160"/>
+            <a:ext cx="5120640" cy="5120640"/>
+          </a:xfrm>
+          <a:prstGeom prst="roundRect">
+            <a:avLst/>
+          </a:prstGeom>
+          <a:solidFill>
+            <a:srgbClr val="FFFFFF"/>
+          </a:solidFill>
+          <a:ln w="19050">
+            <a:solidFill>
+              <a:srgbClr val="E2E8F0"/>
+            </a:solidFill>
+          </a:ln>
+        </p:spPr>
+        <p:style>
+          <a:lnRef idx="1">
+            <a:schemeClr val="accent1"/>
+          </a:lnRef>
+          <a:fillRef idx="3">
+            <a:schemeClr val="accent1"/>
+          </a:fillRef>
+          <a:effectRef idx="2">
+            <a:schemeClr val="accent1"/>
+          </a:effectRef>
+          <a:fontRef idx="minor">
+            <a:schemeClr val="lt1"/>
+          </a:fontRef>
+        </p:style>
+        <p:txBody>
+          <a:bodyPr rtlCol="0" anchor="ctr"/>
+          <a:lstStyle/>
+          <a:p>
+            <a:pPr algn="ctr"/>
+          </a:p>
+        </p:txBody>
+      </p:sp>
+      <p:sp>
+        <p:nvSpPr>
+          <p:cNvPr id="10" name="TextBox 9"/>
+          <p:cNvSpPr txBox="1"/>
+          <p:nvPr/>
+        </p:nvSpPr>
+        <p:spPr>
+          <a:xfrm>
+            <a:off x="6446520" y="1417319"/>
+            <a:ext cx="4846320" cy="4846320"/>
+          </a:xfrm>
+          <a:prstGeom prst="rect">
+            <a:avLst/>
+          </a:prstGeom>
+          <a:noFill/>
+        </p:spPr>
+        <p:txBody>
+          <a:bodyPr wrap="square">
+            <a:spAutoFit/>
+          </a:bodyPr>
+          <a:lstStyle/>
+          <a:p>
+            <a:pPr>
+              <a:defRPr sz="1400" b="1">
+                <a:solidFill>
+                  <a:srgbClr val="071426"/>
+                </a:solidFill>
+              </a:defRPr>
+            </a:pPr>
+            <a:r>
+              <a:t>Prescriptive AI Mitigations</a:t>
+            </a:r>
+          </a:p>
+          <a:p>
+            <a:pPr>
+              <a:spcAft>
+                <a:spcPts val="400"/>
+              </a:spcAft>
+              <a:defRPr sz="900" b="1">
+                <a:solidFill>
+                  <a:srgbClr val="F97316"/>
+                </a:solidFill>
+              </a:defRPr>
+            </a:pPr>
+            <a:r>
+              <a:t>[PRESCRIPTIVE AI]</a:t>
+            </a:r>
+          </a:p>
+          <a:p>
+            <a:pPr>
+              <a:spcBef>
+                <a:spcPts val="300"/>
+              </a:spcBef>
+              <a:defRPr sz="1100">
+                <a:solidFill>
+                  <a:srgbClr val="334155"/>
+                </a:solidFill>
+              </a:defRPr>
+            </a:pPr>
+            <a:r>
+              <a:t>• Actionable Recommendations Engine:</a:t>
+            </a:r>
+          </a:p>
+          <a:p>
+            <a:pPr>
+              <a:spcBef>
+                <a:spcPts val="300"/>
+              </a:spcBef>
+              <a:defRPr sz="1100">
+                <a:solidFill>
+                  <a:srgbClr val="334155"/>
+                </a:solidFill>
+              </a:defRPr>
+            </a:pPr>
+            <a:r>
+              <a:t>•   - Critical Dispute Ratio: 'Deploy Special CALA Lok Adalat Bench to accelerate Section 15 conciliations.'</a:t>
+            </a:r>
+          </a:p>
+          <a:p>
+            <a:pPr>
+              <a:spcBef>
+                <a:spcPts val="300"/>
+              </a:spcBef>
+              <a:defRPr sz="1100">
+                <a:solidFill>
+                  <a:srgbClr val="334155"/>
+                </a:solidFill>
+              </a:defRPr>
+            </a:pPr>
+            <a:r>
+              <a:t>•   - Dwell Time Exceeded: 'Issue Section 77 Escrow court deposit to secure possession without stalling construction.'</a:t>
+            </a:r>
+          </a:p>
+          <a:p>
+            <a:pPr>
+              <a:spcBef>
+                <a:spcPts val="300"/>
+              </a:spcBef>
+              <a:defRPr sz="1100">
+                <a:solidFill>
+                  <a:srgbClr val="334155"/>
+                </a:solidFill>
+              </a:defRPr>
+            </a:pPr>
+            <a:r>
+              <a:t>•   - Forest Overlap: 'Escalate Stage-II Forest Clearance via Parivesh portal integration.'</a:t>
+            </a:r>
+          </a:p>
+          <a:p>
+            <a:pPr>
+              <a:spcBef>
+                <a:spcPts val="300"/>
+              </a:spcBef>
+              <a:defRPr sz="1100">
+                <a:solidFill>
+                  <a:srgbClr val="334155"/>
+                </a:solidFill>
+              </a:defRPr>
+            </a:pPr>
+            <a:r>
+              <a:t>• Interactive Mitigation Execution: Officers can execute prescriptive interventions directly from the dashboard.</a:t>
+            </a:r>
+          </a:p>
+        </p:txBody>
+      </p:sp>
+    </p:spTree>
+  </p:cSld>
+  <p:clrMapOvr>
+    <a:masterClrMapping/>
+  </p:clrMapOvr>
+</p:sld>
+</file>
+
+<file path=ppt/slides/slide11.xml><?xml version="1.0" encoding="utf-8"?>
+<p:sld xmlns:a="http://schemas.openxmlformats.org/drawingml/2006/main" xmlns:p="http://schemas.openxmlformats.org/presentationml/2006/main" xmlns:r="http://schemas.openxmlformats.org/officeDocument/2006/relationships">
+  <p:cSld>
+    <p:spTree>
+      <p:nvGrpSpPr>
+        <p:cNvPr id="1" name=""/>
+        <p:cNvGrpSpPr/>
+        <p:nvPr/>
+      </p:nvGrpSpPr>
+      <p:grpSpPr/>
+      <p:sp>
+        <p:nvSpPr>
+          <p:cNvPr id="2" name="Rectangle 1"/>
+          <p:cNvSpPr/>
+          <p:nvPr/>
+        </p:nvSpPr>
+        <p:spPr>
+          <a:xfrm>
+            <a:off x="0" y="0"/>
+            <a:ext cx="12188952" cy="1051560"/>
+          </a:xfrm>
+          <a:prstGeom prst="rect">
+            <a:avLst/>
+          </a:prstGeom>
+          <a:solidFill>
+            <a:srgbClr val="071426"/>
+          </a:solidFill>
+          <a:ln>
+            <a:solidFill>
+              <a:srgbClr val="071426"/>
+            </a:solidFill>
+          </a:ln>
+        </p:spPr>
+        <p:style>
+          <a:lnRef idx="1">
+            <a:schemeClr val="accent1"/>
+          </a:lnRef>
+          <a:fillRef idx="3">
+            <a:schemeClr val="accent1"/>
+          </a:fillRef>
+          <a:effectRef idx="2">
+            <a:schemeClr val="accent1"/>
+          </a:effectRef>
+          <a:fontRef idx="minor">
+            <a:schemeClr val="lt1"/>
+          </a:fontRef>
+        </p:style>
+        <p:txBody>
+          <a:bodyPr rtlCol="0" anchor="ctr"/>
+          <a:lstStyle/>
+          <a:p>
+            <a:pPr algn="ctr"/>
+          </a:p>
+        </p:txBody>
+      </p:sp>
+      <p:sp>
+        <p:nvSpPr>
+          <p:cNvPr id="3" name="Rectangle 2"/>
+          <p:cNvSpPr/>
+          <p:nvPr/>
+        </p:nvSpPr>
+        <p:spPr>
+          <a:xfrm>
+            <a:off x="0" y="1051560"/>
+            <a:ext cx="4059936" cy="54864"/>
+          </a:xfrm>
+          <a:prstGeom prst="rect">
+            <a:avLst/>
+          </a:prstGeom>
+          <a:solidFill>
+            <a:srgbClr val="F97316"/>
+          </a:solidFill>
+          <a:ln>
+            <a:solidFill>
+              <a:srgbClr val="F97316"/>
+            </a:solidFill>
+          </a:ln>
+        </p:spPr>
+        <p:style>
+          <a:lnRef idx="1">
+            <a:schemeClr val="accent1"/>
+          </a:lnRef>
+          <a:fillRef idx="3">
+            <a:schemeClr val="accent1"/>
+          </a:fillRef>
+          <a:effectRef idx="2">
+            <a:schemeClr val="accent1"/>
+          </a:effectRef>
+          <a:fontRef idx="minor">
+            <a:schemeClr val="lt1"/>
+          </a:fontRef>
+        </p:style>
+        <p:txBody>
+          <a:bodyPr rtlCol="0" anchor="ctr"/>
+          <a:lstStyle/>
+          <a:p>
+            <a:pPr algn="ctr"/>
+          </a:p>
+        </p:txBody>
+      </p:sp>
+      <p:sp>
+        <p:nvSpPr>
+          <p:cNvPr id="4" name="Rectangle 3"/>
+          <p:cNvSpPr/>
+          <p:nvPr/>
+        </p:nvSpPr>
+        <p:spPr>
+          <a:xfrm>
+            <a:off x="4059936" y="1051560"/>
+            <a:ext cx="4059936" cy="54864"/>
+          </a:xfrm>
+          <a:prstGeom prst="rect">
+            <a:avLst/>
+          </a:prstGeom>
+          <a:solidFill>
+            <a:srgbClr val="FFFFFF"/>
+          </a:solidFill>
+          <a:ln>
+            <a:solidFill>
+              <a:srgbClr val="FFFFFF"/>
+            </a:solidFill>
+          </a:ln>
+        </p:spPr>
+        <p:style>
+          <a:lnRef idx="1">
+            <a:schemeClr val="accent1"/>
+          </a:lnRef>
+          <a:fillRef idx="3">
+            <a:schemeClr val="accent1"/>
+          </a:fillRef>
+          <a:effectRef idx="2">
+            <a:schemeClr val="accent1"/>
+          </a:effectRef>
+          <a:fontRef idx="minor">
+            <a:schemeClr val="lt1"/>
+          </a:fontRef>
+        </p:style>
+        <p:txBody>
+          <a:bodyPr rtlCol="0" anchor="ctr"/>
+          <a:lstStyle/>
+          <a:p>
+            <a:pPr algn="ctr"/>
+          </a:p>
+        </p:txBody>
+      </p:sp>
+      <p:sp>
+        <p:nvSpPr>
+          <p:cNvPr id="5" name="Rectangle 4"/>
+          <p:cNvSpPr/>
+          <p:nvPr/>
+        </p:nvSpPr>
+        <p:spPr>
+          <a:xfrm>
+            <a:off x="8119872" y="1051560"/>
+            <a:ext cx="4069080" cy="54864"/>
+          </a:xfrm>
+          <a:prstGeom prst="rect">
+            <a:avLst/>
+          </a:prstGeom>
+          <a:solidFill>
+            <a:srgbClr val="059669"/>
+          </a:solidFill>
+          <a:ln>
+            <a:solidFill>
+              <a:srgbClr val="059669"/>
+            </a:solidFill>
+          </a:ln>
+        </p:spPr>
+        <p:style>
+          <a:lnRef idx="1">
+            <a:schemeClr val="accent1"/>
+          </a:lnRef>
+          <a:fillRef idx="3">
+            <a:schemeClr val="accent1"/>
+          </a:fillRef>
+          <a:effectRef idx="2">
+            <a:schemeClr val="accent1"/>
+          </a:effectRef>
+          <a:fontRef idx="minor">
+            <a:schemeClr val="lt1"/>
+          </a:fontRef>
+        </p:style>
+        <p:txBody>
+          <a:bodyPr rtlCol="0" anchor="ctr"/>
+          <a:lstStyle/>
+          <a:p>
+            <a:pPr algn="ctr"/>
+          </a:p>
+        </p:txBody>
+      </p:sp>
+      <p:sp>
+        <p:nvSpPr>
+          <p:cNvPr id="6" name="TextBox 5"/>
+          <p:cNvSpPr txBox="1"/>
+          <p:nvPr/>
+        </p:nvSpPr>
+        <p:spPr>
+          <a:xfrm>
+            <a:off x="731520" y="109728"/>
+            <a:ext cx="10725912" cy="868680"/>
+          </a:xfrm>
+          <a:prstGeom prst="rect">
+            <a:avLst/>
+          </a:prstGeom>
+          <a:noFill/>
+        </p:spPr>
+        <p:txBody>
+          <a:bodyPr wrap="square">
+            <a:spAutoFit/>
+          </a:bodyPr>
+          <a:lstStyle/>
+          <a:p>
+            <a:pPr>
+              <a:defRPr sz="1000" b="1">
+                <a:solidFill>
+                  <a:srgbClr val="FDBA74"/>
+                </a:solidFill>
+              </a:defRPr>
+            </a:pPr>
+            <a:r>
+              <a:t>SIH26016 • TEAM APEX • MINISTRY OF RURAL DEVELOPMENT (DOLR)</a:t>
+            </a:r>
+          </a:p>
+          <a:p>
+            <a:pPr>
+              <a:defRPr sz="2000" b="1">
+                <a:solidFill>
+                  <a:srgbClr val="FFFFFF"/>
+                </a:solidFill>
+              </a:defRPr>
+            </a:pPr>
+            <a:r>
+              <a:t>Real-World Data Integration &amp; Tested Corridors</a:t>
+            </a:r>
+          </a:p>
+        </p:txBody>
+      </p:sp>
+      <p:sp>
+        <p:nvSpPr>
+          <p:cNvPr id="7" name="Rounded Rectangle 6"/>
+          <p:cNvSpPr/>
+          <p:nvPr/>
+        </p:nvSpPr>
+        <p:spPr>
+          <a:xfrm>
+            <a:off x="731520" y="1280160"/>
+            <a:ext cx="5120640" cy="5120640"/>
+          </a:xfrm>
+          <a:prstGeom prst="roundRect">
+            <a:avLst/>
+          </a:prstGeom>
+          <a:solidFill>
+            <a:srgbClr val="FFFFFF"/>
+          </a:solidFill>
+          <a:ln w="19050">
+            <a:solidFill>
+              <a:srgbClr val="E2E8F0"/>
+            </a:solidFill>
+          </a:ln>
+        </p:spPr>
+        <p:style>
+          <a:lnRef idx="1">
+            <a:schemeClr val="accent1"/>
+          </a:lnRef>
+          <a:fillRef idx="3">
+            <a:schemeClr val="accent1"/>
+          </a:fillRef>
+          <a:effectRef idx="2">
+            <a:schemeClr val="accent1"/>
+          </a:effectRef>
+          <a:fontRef idx="minor">
+            <a:schemeClr val="lt1"/>
+          </a:fontRef>
+        </p:style>
+        <p:txBody>
+          <a:bodyPr rtlCol="0" anchor="ctr"/>
+          <a:lstStyle/>
+          <a:p>
+            <a:pPr algn="ctr"/>
+          </a:p>
+        </p:txBody>
+      </p:sp>
+      <p:sp>
+        <p:nvSpPr>
+          <p:cNvPr id="8" name="TextBox 7"/>
+          <p:cNvSpPr txBox="1"/>
+          <p:nvPr/>
+        </p:nvSpPr>
+        <p:spPr>
+          <a:xfrm>
+            <a:off x="868680" y="1417319"/>
+            <a:ext cx="4846320" cy="4846320"/>
+          </a:xfrm>
+          <a:prstGeom prst="rect">
+            <a:avLst/>
+          </a:prstGeom>
+          <a:noFill/>
+        </p:spPr>
+        <p:txBody>
+          <a:bodyPr wrap="square">
+            <a:spAutoFit/>
+          </a:bodyPr>
+          <a:lstStyle/>
+          <a:p>
+            <a:pPr>
+              <a:defRPr sz="1400" b="1">
+                <a:solidFill>
+                  <a:srgbClr val="071426"/>
+                </a:solidFill>
+              </a:defRPr>
+            </a:pPr>
+            <a:r>
+              <a:t>Live Tested National Corridors</a:t>
+            </a:r>
+          </a:p>
+          <a:p>
+            <a:pPr>
+              <a:spcAft>
+                <a:spcPts val="400"/>
+              </a:spcAft>
+              <a:defRPr sz="900" b="1">
+                <a:solidFill>
+                  <a:srgbClr val="F97316"/>
+                </a:solidFill>
+              </a:defRPr>
+            </a:pPr>
+            <a:r>
+              <a:t>[TESTED CORRIDORS]</a:t>
+            </a:r>
+          </a:p>
+          <a:p>
+            <a:pPr>
+              <a:spcBef>
+                <a:spcPts val="300"/>
+              </a:spcBef>
+              <a:defRPr sz="1100">
+                <a:solidFill>
+                  <a:srgbClr val="334155"/>
+                </a:solidFill>
+              </a:defRPr>
+            </a:pPr>
+            <a:r>
+              <a:t>• 1. Varanasi Ring Road Phase-II (UP)</a:t>
+            </a:r>
+          </a:p>
+          <a:p>
+            <a:pPr>
+              <a:spcBef>
+                <a:spcPts val="300"/>
+              </a:spcBef>
+              <a:defRPr sz="1100">
+                <a:solidFill>
+                  <a:srgbClr val="334155"/>
+                </a:solidFill>
+              </a:defRPr>
+            </a:pPr>
+            <a:r>
+              <a:t>•    - Agency: NHAI • Act: NH Act 1956 • Area: 145.8 Ha</a:t>
+            </a:r>
+          </a:p>
+          <a:p>
+            <a:pPr>
+              <a:spcBef>
+                <a:spcPts val="300"/>
+              </a:spcBef>
+              <a:defRPr sz="1100">
+                <a:solidFill>
+                  <a:srgbClr val="334155"/>
+                </a:solidFill>
+              </a:defRPr>
+            </a:pPr>
+            <a:r>
+              <a:t>•    - Stage: Valuation, Award &amp; Compensation (Sec 3G)</a:t>
+            </a:r>
+          </a:p>
+          <a:p>
+            <a:pPr>
+              <a:spcBef>
+                <a:spcPts val="300"/>
+              </a:spcBef>
+              <a:defRPr sz="1100">
+                <a:solidFill>
+                  <a:srgbClr val="334155"/>
+                </a:solidFill>
+              </a:defRPr>
+            </a:pPr>
+            <a:r>
+              <a:t>• 2. Nagpur-Mumbai Samruddhi Expressway (MH)</a:t>
+            </a:r>
+          </a:p>
+          <a:p>
+            <a:pPr>
+              <a:spcBef>
+                <a:spcPts val="300"/>
+              </a:spcBef>
+              <a:defRPr sz="1100">
+                <a:solidFill>
+                  <a:srgbClr val="334155"/>
+                </a:solidFill>
+              </a:defRPr>
+            </a:pPr>
+            <a:r>
+              <a:t>•    - Agency: MSRDC • Act: RFCTLARR 2013 • Area: 210.4 Ha</a:t>
+            </a:r>
+          </a:p>
+          <a:p>
+            <a:pPr>
+              <a:spcBef>
+                <a:spcPts val="300"/>
+              </a:spcBef>
+              <a:defRPr sz="1100">
+                <a:solidFill>
+                  <a:srgbClr val="334155"/>
+                </a:solidFill>
+              </a:defRPr>
+            </a:pPr>
+            <a:r>
+              <a:t>•    - Stage: Physical Possession &amp; Land Mutation (Sec 38)</a:t>
+            </a:r>
+          </a:p>
+          <a:p>
+            <a:pPr>
+              <a:spcBef>
+                <a:spcPts val="300"/>
+              </a:spcBef>
+              <a:defRPr sz="1100">
+                <a:solidFill>
+                  <a:srgbClr val="334155"/>
+                </a:solidFill>
+              </a:defRPr>
+            </a:pPr>
+            <a:r>
+              <a:t>• 3. Bengaluru Satellite Town Ring Road - STRR (KA)</a:t>
+            </a:r>
+          </a:p>
+          <a:p>
+            <a:pPr>
+              <a:spcBef>
+                <a:spcPts val="300"/>
+              </a:spcBef>
+              <a:defRPr sz="1100">
+                <a:solidFill>
+                  <a:srgbClr val="334155"/>
+                </a:solidFill>
+              </a:defRPr>
+            </a:pPr>
+            <a:r>
+              <a:t>•    - Agency: NHAI / KRDCL • Act: NH Act 1956 • Area: 312 Ha</a:t>
+            </a:r>
+          </a:p>
+          <a:p>
+            <a:pPr>
+              <a:spcBef>
+                <a:spcPts val="300"/>
+              </a:spcBef>
+              <a:defRPr sz="1100">
+                <a:solidFill>
+                  <a:srgbClr val="334155"/>
+                </a:solidFill>
+              </a:defRPr>
+            </a:pPr>
+            <a:r>
+              <a:t>•    - Stage: Preliminary Notification &amp; Freezing (Sec 11/3A)</a:t>
+            </a:r>
+          </a:p>
+          <a:p>
+            <a:pPr>
+              <a:spcBef>
+                <a:spcPts val="300"/>
+              </a:spcBef>
+              <a:defRPr sz="1100">
+                <a:solidFill>
+                  <a:srgbClr val="334155"/>
+                </a:solidFill>
+              </a:defRPr>
+            </a:pPr>
+            <a:r>
+              <a:t>• 4. Delhi-Amritsar Freight &amp; Rail Corridor (PB)</a:t>
+            </a:r>
+          </a:p>
+          <a:p>
+            <a:pPr>
+              <a:spcBef>
+                <a:spcPts val="300"/>
+              </a:spcBef>
+              <a:defRPr sz="1100">
+                <a:solidFill>
+                  <a:srgbClr val="334155"/>
+                </a:solidFill>
+              </a:defRPr>
+            </a:pPr>
+            <a:r>
+              <a:t>•    - Agency: DFCCIL • Act: Railways Act 1989 • Area: 393.9 Ha</a:t>
+            </a:r>
+          </a:p>
+          <a:p>
+            <a:pPr>
+              <a:spcBef>
+                <a:spcPts val="300"/>
+              </a:spcBef>
+              <a:defRPr sz="1100">
+                <a:solidFill>
+                  <a:srgbClr val="334155"/>
+                </a:solidFill>
+              </a:defRPr>
+            </a:pPr>
+            <a:r>
+              <a:t>•    - Stage: Objection Management &amp; Inquiry (Sec 15/3C)</a:t>
+            </a:r>
+          </a:p>
+        </p:txBody>
+      </p:sp>
+      <p:sp>
+        <p:nvSpPr>
+          <p:cNvPr id="9" name="Rounded Rectangle 8"/>
+          <p:cNvSpPr/>
+          <p:nvPr/>
+        </p:nvSpPr>
+        <p:spPr>
+          <a:xfrm>
+            <a:off x="6309360" y="1280160"/>
+            <a:ext cx="5120640" cy="5120640"/>
+          </a:xfrm>
+          <a:prstGeom prst="roundRect">
+            <a:avLst/>
+          </a:prstGeom>
+          <a:solidFill>
+            <a:srgbClr val="FFFFFF"/>
+          </a:solidFill>
+          <a:ln w="19050">
+            <a:solidFill>
+              <a:srgbClr val="E2E8F0"/>
+            </a:solidFill>
+          </a:ln>
+        </p:spPr>
+        <p:style>
+          <a:lnRef idx="1">
+            <a:schemeClr val="accent1"/>
+          </a:lnRef>
+          <a:fillRef idx="3">
+            <a:schemeClr val="accent1"/>
+          </a:fillRef>
+          <a:effectRef idx="2">
+            <a:schemeClr val="accent1"/>
+          </a:effectRef>
+          <a:fontRef idx="minor">
+            <a:schemeClr val="lt1"/>
+          </a:fontRef>
+        </p:style>
+        <p:txBody>
+          <a:bodyPr rtlCol="0" anchor="ctr"/>
+          <a:lstStyle/>
+          <a:p>
+            <a:pPr algn="ctr"/>
+          </a:p>
+        </p:txBody>
+      </p:sp>
+      <p:sp>
+        <p:nvSpPr>
+          <p:cNvPr id="10" name="TextBox 9"/>
+          <p:cNvSpPr txBox="1"/>
+          <p:nvPr/>
+        </p:nvSpPr>
+        <p:spPr>
+          <a:xfrm>
+            <a:off x="6446520" y="1417319"/>
+            <a:ext cx="4846320" cy="4846320"/>
+          </a:xfrm>
+          <a:prstGeom prst="rect">
+            <a:avLst/>
+          </a:prstGeom>
+          <a:noFill/>
+        </p:spPr>
+        <p:txBody>
+          <a:bodyPr wrap="square">
+            <a:spAutoFit/>
+          </a:bodyPr>
+          <a:lstStyle/>
+          <a:p>
+            <a:pPr>
+              <a:defRPr sz="1400" b="1">
+                <a:solidFill>
+                  <a:srgbClr val="071426"/>
+                </a:solidFill>
+              </a:defRPr>
+            </a:pPr>
+            <a:r>
+              <a:t>Statutory Data Interoperability</a:t>
+            </a:r>
+          </a:p>
+          <a:p>
+            <a:pPr>
+              <a:spcAft>
+                <a:spcPts val="400"/>
+              </a:spcAft>
+              <a:defRPr sz="900" b="1">
+                <a:solidFill>
+                  <a:srgbClr val="F97316"/>
+                </a:solidFill>
+              </a:defRPr>
+            </a:pPr>
+            <a:r>
+              <a:t>[INTEROPERABILITY]</a:t>
+            </a:r>
+          </a:p>
+          <a:p>
+            <a:pPr>
+              <a:spcBef>
+                <a:spcPts val="300"/>
+              </a:spcBef>
+              <a:defRPr sz="1100">
+                <a:solidFill>
+                  <a:srgbClr val="334155"/>
+                </a:solidFill>
+              </a:defRPr>
+            </a:pPr>
+            <a:r>
+              <a:t>• PM GatiShakti NMP (BiSAG-N): Direct ingestion of DPR alignment KML/GeoJSON files.</a:t>
+            </a:r>
+          </a:p>
+          <a:p>
+            <a:pPr>
+              <a:spcBef>
+                <a:spcPts val="300"/>
+              </a:spcBef>
+              <a:defRPr sz="1100">
+                <a:solidFill>
+                  <a:srgbClr val="334155"/>
+                </a:solidFill>
+              </a:defRPr>
+            </a:pPr>
+            <a:r>
+              <a:t>• Bhu-Naksha &amp; Survey of India ORI: Cadastral parcel polygon boundaries with centroid coordinates.</a:t>
+            </a:r>
+          </a:p>
+          <a:p>
+            <a:pPr>
+              <a:spcBef>
+                <a:spcPts val="300"/>
+              </a:spcBef>
+              <a:defRPr sz="1100">
+                <a:solidFill>
+                  <a:srgbClr val="334155"/>
+                </a:solidFill>
+              </a:defRPr>
+            </a:pPr>
+            <a:r>
+              <a:t>• PFMS Direct Benefit Transfer: Automated ISO 20022 XML batch payment processing with Aadhaar Payment Bridge.</a:t>
+            </a:r>
+          </a:p>
+          <a:p>
+            <a:pPr>
+              <a:spcBef>
+                <a:spcPts val="300"/>
+              </a:spcBef>
+              <a:defRPr sz="1100">
+                <a:solidFill>
+                  <a:srgbClr val="334155"/>
+                </a:solidFill>
+              </a:defRPr>
+            </a:pPr>
+            <a:r>
+              <a:t>• State Revenue Portals: Webhook-driven title mutation (UP Bhulekh, MahaBhulekh 7/12, Karnataka Bhoomi).</a:t>
+            </a:r>
+          </a:p>
+        </p:txBody>
+      </p:sp>
+    </p:spTree>
+  </p:cSld>
+  <p:clrMapOvr>
+    <a:masterClrMapping/>
+  </p:clrMapOvr>
+</p:sld>
+</file>
+
+<file path=ppt/slides/slide12.xml><?xml version="1.0" encoding="utf-8"?>
+<p:sld xmlns:a="http://schemas.openxmlformats.org/drawingml/2006/main" xmlns:p="http://schemas.openxmlformats.org/presentationml/2006/main" xmlns:r="http://schemas.openxmlformats.org/officeDocument/2006/relationships">
+  <p:cSld>
+    <p:spTree>
+      <p:nvGrpSpPr>
+        <p:cNvPr id="1" name=""/>
+        <p:cNvGrpSpPr/>
+        <p:nvPr/>
+      </p:nvGrpSpPr>
+      <p:grpSpPr/>
+      <p:sp>
+        <p:nvSpPr>
+          <p:cNvPr id="2" name="Rectangle 1"/>
+          <p:cNvSpPr/>
+          <p:nvPr/>
+        </p:nvSpPr>
+        <p:spPr>
+          <a:xfrm>
+            <a:off x="0" y="0"/>
+            <a:ext cx="12188952" cy="1051560"/>
+          </a:xfrm>
+          <a:prstGeom prst="rect">
+            <a:avLst/>
+          </a:prstGeom>
+          <a:solidFill>
+            <a:srgbClr val="071426"/>
+          </a:solidFill>
+          <a:ln>
+            <a:solidFill>
+              <a:srgbClr val="071426"/>
+            </a:solidFill>
+          </a:ln>
+        </p:spPr>
+        <p:style>
+          <a:lnRef idx="1">
+            <a:schemeClr val="accent1"/>
+          </a:lnRef>
+          <a:fillRef idx="3">
+            <a:schemeClr val="accent1"/>
+          </a:fillRef>
+          <a:effectRef idx="2">
+            <a:schemeClr val="accent1"/>
+          </a:effectRef>
+          <a:fontRef idx="minor">
+            <a:schemeClr val="lt1"/>
+          </a:fontRef>
+        </p:style>
+        <p:txBody>
+          <a:bodyPr rtlCol="0" anchor="ctr"/>
+          <a:lstStyle/>
+          <a:p>
+            <a:pPr algn="ctr"/>
+          </a:p>
+        </p:txBody>
+      </p:sp>
+      <p:sp>
+        <p:nvSpPr>
+          <p:cNvPr id="3" name="Rectangle 2"/>
+          <p:cNvSpPr/>
+          <p:nvPr/>
+        </p:nvSpPr>
+        <p:spPr>
+          <a:xfrm>
+            <a:off x="0" y="1051560"/>
+            <a:ext cx="4059936" cy="54864"/>
+          </a:xfrm>
+          <a:prstGeom prst="rect">
+            <a:avLst/>
+          </a:prstGeom>
+          <a:solidFill>
+            <a:srgbClr val="F97316"/>
+          </a:solidFill>
+          <a:ln>
+            <a:solidFill>
+              <a:srgbClr val="F97316"/>
+            </a:solidFill>
+          </a:ln>
+        </p:spPr>
+        <p:style>
+          <a:lnRef idx="1">
+            <a:schemeClr val="accent1"/>
+          </a:lnRef>
+          <a:fillRef idx="3">
+            <a:schemeClr val="accent1"/>
+          </a:fillRef>
+          <a:effectRef idx="2">
+            <a:schemeClr val="accent1"/>
+          </a:effectRef>
+          <a:fontRef idx="minor">
+            <a:schemeClr val="lt1"/>
+          </a:fontRef>
+        </p:style>
+        <p:txBody>
+          <a:bodyPr rtlCol="0" anchor="ctr"/>
+          <a:lstStyle/>
+          <a:p>
+            <a:pPr algn="ctr"/>
+          </a:p>
+        </p:txBody>
+      </p:sp>
+      <p:sp>
+        <p:nvSpPr>
+          <p:cNvPr id="4" name="Rectangle 3"/>
+          <p:cNvSpPr/>
+          <p:nvPr/>
+        </p:nvSpPr>
+        <p:spPr>
+          <a:xfrm>
+            <a:off x="4059936" y="1051560"/>
+            <a:ext cx="4059936" cy="54864"/>
+          </a:xfrm>
+          <a:prstGeom prst="rect">
+            <a:avLst/>
+          </a:prstGeom>
+          <a:solidFill>
+            <a:srgbClr val="FFFFFF"/>
+          </a:solidFill>
+          <a:ln>
+            <a:solidFill>
+              <a:srgbClr val="FFFFFF"/>
+            </a:solidFill>
+          </a:ln>
+        </p:spPr>
+        <p:style>
+          <a:lnRef idx="1">
+            <a:schemeClr val="accent1"/>
+          </a:lnRef>
+          <a:fillRef idx="3">
+            <a:schemeClr val="accent1"/>
+          </a:fillRef>
+          <a:effectRef idx="2">
+            <a:schemeClr val="accent1"/>
+          </a:effectRef>
+          <a:fontRef idx="minor">
+            <a:schemeClr val="lt1"/>
+          </a:fontRef>
+        </p:style>
+        <p:txBody>
+          <a:bodyPr rtlCol="0" anchor="ctr"/>
+          <a:lstStyle/>
+          <a:p>
+            <a:pPr algn="ctr"/>
+          </a:p>
+        </p:txBody>
+      </p:sp>
+      <p:sp>
+        <p:nvSpPr>
+          <p:cNvPr id="5" name="Rectangle 4"/>
+          <p:cNvSpPr/>
+          <p:nvPr/>
+        </p:nvSpPr>
+        <p:spPr>
+          <a:xfrm>
+            <a:off x="8119872" y="1051560"/>
+            <a:ext cx="4069080" cy="54864"/>
+          </a:xfrm>
+          <a:prstGeom prst="rect">
+            <a:avLst/>
+          </a:prstGeom>
+          <a:solidFill>
+            <a:srgbClr val="059669"/>
+          </a:solidFill>
+          <a:ln>
+            <a:solidFill>
+              <a:srgbClr val="059669"/>
+            </a:solidFill>
+          </a:ln>
+        </p:spPr>
+        <p:style>
+          <a:lnRef idx="1">
+            <a:schemeClr val="accent1"/>
+          </a:lnRef>
+          <a:fillRef idx="3">
+            <a:schemeClr val="accent1"/>
+          </a:fillRef>
+          <a:effectRef idx="2">
+            <a:schemeClr val="accent1"/>
+          </a:effectRef>
+          <a:fontRef idx="minor">
+            <a:schemeClr val="lt1"/>
+          </a:fontRef>
+        </p:style>
+        <p:txBody>
+          <a:bodyPr rtlCol="0" anchor="ctr"/>
+          <a:lstStyle/>
+          <a:p>
+            <a:pPr algn="ctr"/>
+          </a:p>
+        </p:txBody>
+      </p:sp>
+      <p:sp>
+        <p:nvSpPr>
+          <p:cNvPr id="6" name="TextBox 5"/>
+          <p:cNvSpPr txBox="1"/>
+          <p:nvPr/>
+        </p:nvSpPr>
+        <p:spPr>
+          <a:xfrm>
+            <a:off x="731520" y="109728"/>
+            <a:ext cx="10725912" cy="868680"/>
+          </a:xfrm>
+          <a:prstGeom prst="rect">
+            <a:avLst/>
+          </a:prstGeom>
+          <a:noFill/>
+        </p:spPr>
+        <p:txBody>
+          <a:bodyPr wrap="square">
+            <a:spAutoFit/>
+          </a:bodyPr>
+          <a:lstStyle/>
+          <a:p>
+            <a:pPr>
+              <a:defRPr sz="1000" b="1">
+                <a:solidFill>
+                  <a:srgbClr val="FDBA74"/>
+                </a:solidFill>
+              </a:defRPr>
+            </a:pPr>
+            <a:r>
+              <a:t>SIH26016 • TEAM APEX • MINISTRY OF RURAL DEVELOPMENT (DOLR)</a:t>
+            </a:r>
+          </a:p>
+          <a:p>
+            <a:pPr>
+              <a:defRPr sz="2000" b="1">
+                <a:solidFill>
+                  <a:srgbClr val="FFFFFF"/>
+                </a:solidFill>
+              </a:defRPr>
+            </a:pPr>
+            <a:r>
+              <a:t>Impact, Feasibility &amp; National Rollout Roadmap</a:t>
+            </a:r>
+          </a:p>
+        </p:txBody>
+      </p:sp>
+      <p:sp>
+        <p:nvSpPr>
+          <p:cNvPr id="7" name="Rounded Rectangle 6"/>
+          <p:cNvSpPr/>
+          <p:nvPr/>
+        </p:nvSpPr>
+        <p:spPr>
+          <a:xfrm>
+            <a:off x="731520" y="1280160"/>
+            <a:ext cx="3291840" cy="5120640"/>
+          </a:xfrm>
+          <a:prstGeom prst="roundRect">
+            <a:avLst/>
+          </a:prstGeom>
+          <a:solidFill>
+            <a:srgbClr val="FFFFFF"/>
+          </a:solidFill>
+          <a:ln w="19050">
+            <a:solidFill>
+              <a:srgbClr val="059669"/>
+            </a:solidFill>
+          </a:ln>
+        </p:spPr>
+        <p:style>
+          <a:lnRef idx="1">
+            <a:schemeClr val="accent1"/>
+          </a:lnRef>
+          <a:fillRef idx="3">
+            <a:schemeClr val="accent1"/>
+          </a:fillRef>
+          <a:effectRef idx="2">
+            <a:schemeClr val="accent1"/>
+          </a:effectRef>
+          <a:fontRef idx="minor">
+            <a:schemeClr val="lt1"/>
+          </a:fontRef>
+        </p:style>
+        <p:txBody>
+          <a:bodyPr rtlCol="0" anchor="ctr"/>
+          <a:lstStyle/>
+          <a:p>
+            <a:pPr algn="ctr"/>
+          </a:p>
+        </p:txBody>
+      </p:sp>
+      <p:sp>
+        <p:nvSpPr>
+          <p:cNvPr id="8" name="TextBox 7"/>
+          <p:cNvSpPr txBox="1"/>
+          <p:nvPr/>
+        </p:nvSpPr>
+        <p:spPr>
+          <a:xfrm>
+            <a:off x="868680" y="1417319"/>
+            <a:ext cx="3017520" cy="4846320"/>
+          </a:xfrm>
+          <a:prstGeom prst="rect">
+            <a:avLst/>
+          </a:prstGeom>
+          <a:noFill/>
+        </p:spPr>
+        <p:txBody>
+          <a:bodyPr wrap="square">
+            <a:spAutoFit/>
+          </a:bodyPr>
+          <a:lstStyle/>
+          <a:p>
+            <a:pPr>
+              <a:defRPr sz="1400" b="1">
+                <a:solidFill>
+                  <a:srgbClr val="071426"/>
+                </a:solidFill>
+              </a:defRPr>
+            </a:pPr>
+            <a:r>
+              <a:t>Transformative Impact</a:t>
+            </a:r>
+          </a:p>
+          <a:p>
+            <a:pPr>
+              <a:spcAft>
+                <a:spcPts val="400"/>
+              </a:spcAft>
+              <a:defRPr sz="900" b="1">
+                <a:solidFill>
+                  <a:srgbClr val="F97316"/>
+                </a:solidFill>
+              </a:defRPr>
+            </a:pPr>
+            <a:r>
+              <a:t>[NATIONAL IMPACT]</a:t>
+            </a:r>
+          </a:p>
+          <a:p>
+            <a:pPr>
+              <a:spcBef>
+                <a:spcPts val="300"/>
+              </a:spcBef>
+              <a:defRPr sz="1100">
+                <a:solidFill>
+                  <a:srgbClr val="334155"/>
+                </a:solidFill>
+              </a:defRPr>
+            </a:pPr>
+            <a:r>
+              <a:t>• Timeline Slashed: Land acquisition cycle reduced from 36 months down to 4 months.</a:t>
+            </a:r>
+          </a:p>
+          <a:p>
+            <a:pPr>
+              <a:spcBef>
+                <a:spcPts val="300"/>
+              </a:spcBef>
+              <a:defRPr sz="1100">
+                <a:solidFill>
+                  <a:srgbClr val="334155"/>
+                </a:solidFill>
+              </a:defRPr>
+            </a:pPr>
+            <a:r>
+              <a:t>• Litigation Reduced by 80%: Transparent, mathematical award calculations eliminate court disputes.</a:t>
+            </a:r>
+          </a:p>
+          <a:p>
+            <a:pPr>
+              <a:spcBef>
+                <a:spcPts val="300"/>
+              </a:spcBef>
+              <a:defRPr sz="1100">
+                <a:solidFill>
+                  <a:srgbClr val="334155"/>
+                </a:solidFill>
+              </a:defRPr>
+            </a:pPr>
+            <a:r>
+              <a:t>• Zero Fiscal Leakage: Direct PFMS bank transfer eliminates commercial CALA deposit floats.</a:t>
+            </a:r>
+          </a:p>
+          <a:p>
+            <a:pPr>
+              <a:spcBef>
+                <a:spcPts val="300"/>
+              </a:spcBef>
+              <a:defRPr sz="1100">
+                <a:solidFill>
+                  <a:srgbClr val="334155"/>
+                </a:solidFill>
+              </a:defRPr>
+            </a:pPr>
+            <a:r>
+              <a:t>• Clear Conclusive Titles: Eliminates fraudulent duplicate land sales via ULPIN locking.</a:t>
+            </a:r>
+          </a:p>
+        </p:txBody>
+      </p:sp>
+      <p:sp>
+        <p:nvSpPr>
+          <p:cNvPr id="9" name="Rounded Rectangle 8"/>
+          <p:cNvSpPr/>
+          <p:nvPr/>
+        </p:nvSpPr>
+        <p:spPr>
+          <a:xfrm>
+            <a:off x="4443984" y="1280160"/>
+            <a:ext cx="3291840" cy="5120640"/>
+          </a:xfrm>
+          <a:prstGeom prst="roundRect">
+            <a:avLst/>
+          </a:prstGeom>
+          <a:solidFill>
+            <a:srgbClr val="FFFFFF"/>
+          </a:solidFill>
+          <a:ln w="19050">
+            <a:solidFill>
+              <a:srgbClr val="E2E8F0"/>
+            </a:solidFill>
+          </a:ln>
+        </p:spPr>
+        <p:style>
+          <a:lnRef idx="1">
+            <a:schemeClr val="accent1"/>
+          </a:lnRef>
+          <a:fillRef idx="3">
+            <a:schemeClr val="accent1"/>
+          </a:fillRef>
+          <a:effectRef idx="2">
+            <a:schemeClr val="accent1"/>
+          </a:effectRef>
+          <a:fontRef idx="minor">
+            <a:schemeClr val="lt1"/>
+          </a:fontRef>
+        </p:style>
+        <p:txBody>
+          <a:bodyPr rtlCol="0" anchor="ctr"/>
+          <a:lstStyle/>
+          <a:p>
+            <a:pPr algn="ctr"/>
+          </a:p>
+        </p:txBody>
+      </p:sp>
+      <p:sp>
+        <p:nvSpPr>
+          <p:cNvPr id="10" name="TextBox 9"/>
+          <p:cNvSpPr txBox="1"/>
+          <p:nvPr/>
+        </p:nvSpPr>
+        <p:spPr>
+          <a:xfrm>
+            <a:off x="4581144" y="1417319"/>
+            <a:ext cx="3017520" cy="4846320"/>
+          </a:xfrm>
+          <a:prstGeom prst="rect">
+            <a:avLst/>
+          </a:prstGeom>
+          <a:noFill/>
+        </p:spPr>
+        <p:txBody>
+          <a:bodyPr wrap="square">
+            <a:spAutoFit/>
+          </a:bodyPr>
+          <a:lstStyle/>
+          <a:p>
+            <a:pPr>
+              <a:defRPr sz="1400" b="1">
+                <a:solidFill>
+                  <a:srgbClr val="071426"/>
+                </a:solidFill>
+              </a:defRPr>
+            </a:pPr>
+            <a:r>
+              <a:t>Feasibility &amp; Cost Benefit</a:t>
+            </a:r>
+          </a:p>
+          <a:p>
+            <a:pPr>
+              <a:spcAft>
+                <a:spcPts val="400"/>
+              </a:spcAft>
+              <a:defRPr sz="900" b="1">
+                <a:solidFill>
+                  <a:srgbClr val="F97316"/>
+                </a:solidFill>
+              </a:defRPr>
+            </a:pPr>
+            <a:r>
+              <a:t>[FEASIBILITY]</a:t>
+            </a:r>
+          </a:p>
+          <a:p>
+            <a:pPr>
+              <a:spcBef>
+                <a:spcPts val="300"/>
+              </a:spcBef>
+              <a:defRPr sz="1100">
+                <a:solidFill>
+                  <a:srgbClr val="334155"/>
+                </a:solidFill>
+              </a:defRPr>
+            </a:pPr>
+            <a:r>
+              <a:t>• 100% Open Source Stack: Python FastAPI, PostgreSQL/PostGIS, React, Scikit-learn with zero proprietary licensing costs.</a:t>
+            </a:r>
+          </a:p>
+          <a:p>
+            <a:pPr>
+              <a:spcBef>
+                <a:spcPts val="300"/>
+              </a:spcBef>
+              <a:defRPr sz="1100">
+                <a:solidFill>
+                  <a:srgbClr val="334155"/>
+                </a:solidFill>
+              </a:defRPr>
+            </a:pPr>
+            <a:r>
+              <a:t>• Cloud Native &amp; Scalable: Microservice architecture ready for NIC MeghRaj Government Cloud deployment.</a:t>
+            </a:r>
+          </a:p>
+          <a:p>
+            <a:pPr>
+              <a:spcBef>
+                <a:spcPts val="300"/>
+              </a:spcBef>
+              <a:defRPr sz="1100">
+                <a:solidFill>
+                  <a:srgbClr val="334155"/>
+                </a:solidFill>
+              </a:defRPr>
+            </a:pPr>
+            <a:r>
+              <a:t>• GIGW 3.0 Standard: Full multilingual and WCAG 2.1 AA accessibility compliance.</a:t>
+            </a:r>
+          </a:p>
+          <a:p>
+            <a:pPr>
+              <a:spcBef>
+                <a:spcPts val="300"/>
+              </a:spcBef>
+              <a:defRPr sz="1100">
+                <a:solidFill>
+                  <a:srgbClr val="334155"/>
+                </a:solidFill>
+              </a:defRPr>
+            </a:pPr>
+            <a:r>
+              <a:t>• Immediate SIH Prototype: Working prototype ready for live demonstration.</a:t>
+            </a:r>
+          </a:p>
+        </p:txBody>
+      </p:sp>
+      <p:sp>
+        <p:nvSpPr>
+          <p:cNvPr id="11" name="Rounded Rectangle 10"/>
+          <p:cNvSpPr/>
+          <p:nvPr/>
+        </p:nvSpPr>
+        <p:spPr>
+          <a:xfrm>
+            <a:off x="8165592" y="1280160"/>
+            <a:ext cx="3291840" cy="5120640"/>
+          </a:xfrm>
+          <a:prstGeom prst="roundRect">
+            <a:avLst/>
+          </a:prstGeom>
+          <a:solidFill>
+            <a:srgbClr val="FFFFFF"/>
+          </a:solidFill>
+          <a:ln w="19050">
+            <a:solidFill>
+              <a:srgbClr val="F97316"/>
+            </a:solidFill>
+          </a:ln>
+        </p:spPr>
+        <p:style>
+          <a:lnRef idx="1">
+            <a:schemeClr val="accent1"/>
+          </a:lnRef>
+          <a:fillRef idx="3">
+            <a:schemeClr val="accent1"/>
+          </a:fillRef>
+          <a:effectRef idx="2">
+            <a:schemeClr val="accent1"/>
+          </a:effectRef>
+          <a:fontRef idx="minor">
+            <a:schemeClr val="lt1"/>
+          </a:fontRef>
+        </p:style>
+        <p:txBody>
+          <a:bodyPr rtlCol="0" anchor="ctr"/>
+          <a:lstStyle/>
+          <a:p>
+            <a:pPr algn="ctr"/>
+          </a:p>
+        </p:txBody>
+      </p:sp>
+      <p:sp>
+        <p:nvSpPr>
+          <p:cNvPr id="12" name="TextBox 11"/>
+          <p:cNvSpPr txBox="1"/>
+          <p:nvPr/>
+        </p:nvSpPr>
+        <p:spPr>
+          <a:xfrm>
+            <a:off x="8302752" y="1417319"/>
+            <a:ext cx="3017520" cy="4846320"/>
+          </a:xfrm>
+          <a:prstGeom prst="rect">
+            <a:avLst/>
+          </a:prstGeom>
+          <a:noFill/>
+        </p:spPr>
+        <p:txBody>
+          <a:bodyPr wrap="square">
+            <a:spAutoFit/>
+          </a:bodyPr>
+          <a:lstStyle/>
+          <a:p>
+            <a:pPr>
+              <a:defRPr sz="1400" b="1">
+                <a:solidFill>
+                  <a:srgbClr val="071426"/>
+                </a:solidFill>
+              </a:defRPr>
+            </a:pPr>
+            <a:r>
+              <a:t>Team APEX Conclusion</a:t>
+            </a:r>
+          </a:p>
+          <a:p>
+            <a:pPr>
+              <a:spcAft>
+                <a:spcPts val="400"/>
+              </a:spcAft>
+              <a:defRPr sz="900" b="1">
+                <a:solidFill>
+                  <a:srgbClr val="F97316"/>
+                </a:solidFill>
+              </a:defRPr>
+            </a:pPr>
+            <a:r>
+              <a:t>[TEAM APEX]</a:t>
+            </a:r>
+          </a:p>
+          <a:p>
+            <a:pPr>
+              <a:spcBef>
+                <a:spcPts val="300"/>
+              </a:spcBef>
+              <a:defRPr sz="1100">
+                <a:solidFill>
+                  <a:srgbClr val="334155"/>
+                </a:solidFill>
+              </a:defRPr>
+            </a:pPr>
+            <a:r>
+              <a:t>• Problem Statement: SIH26016</a:t>
+            </a:r>
+          </a:p>
+          <a:p>
+            <a:pPr>
+              <a:spcBef>
+                <a:spcPts val="300"/>
+              </a:spcBef>
+              <a:defRPr sz="1100">
+                <a:solidFill>
+                  <a:srgbClr val="334155"/>
+                </a:solidFill>
+              </a:defRPr>
+            </a:pPr>
+            <a:r>
+              <a:t>• Team Name: APEX</a:t>
+            </a:r>
+          </a:p>
+          <a:p>
+            <a:pPr>
+              <a:spcBef>
+                <a:spcPts val="300"/>
+              </a:spcBef>
+              <a:defRPr sz="1100">
+                <a:solidFill>
+                  <a:srgbClr val="334155"/>
+                </a:solidFill>
+              </a:defRPr>
+            </a:pPr>
+            <a:r>
+              <a:t>• System: Real-Time National Land Acquisition &amp; Management System (NLAMS)</a:t>
+            </a:r>
+          </a:p>
+          <a:p>
+            <a:pPr>
+              <a:spcBef>
+                <a:spcPts val="300"/>
+              </a:spcBef>
+              <a:defRPr sz="1100">
+                <a:solidFill>
+                  <a:srgbClr val="334155"/>
+                </a:solidFill>
+              </a:defRPr>
+            </a:pPr>
+            <a:r>
+              <a:t>• Ministry: Ministry of Rural Development (DoLR)</a:t>
+            </a:r>
+          </a:p>
+          <a:p>
+            <a:pPr>
+              <a:spcBef>
+                <a:spcPts val="300"/>
+              </a:spcBef>
+              <a:defRPr sz="1100">
+                <a:solidFill>
+                  <a:srgbClr val="334155"/>
+                </a:solidFill>
+              </a:defRPr>
+            </a:pPr>
+            <a:r>
+              <a:t>• Summary: A sovereign, auditable digital infrastructure transforming India's public land acquisition.</a:t>
             </a:r>
           </a:p>
         </p:txBody>
@@ -3350,11 +5715,11 @@
             <a:avLst/>
           </a:prstGeom>
           <a:solidFill>
-            <a:srgbClr val="071933"/>
+            <a:srgbClr val="071426"/>
           </a:solidFill>
           <a:ln>
             <a:solidFill>
-              <a:srgbClr val="071933"/>
+              <a:srgbClr val="071426"/>
             </a:solidFill>
           </a:ln>
         </p:spPr>
@@ -3395,11 +5760,11 @@
             <a:avLst/>
           </a:prstGeom>
           <a:solidFill>
-            <a:srgbClr val="EA580C"/>
+            <a:srgbClr val="F97316"/>
           </a:solidFill>
           <a:ln>
             <a:solidFill>
-              <a:srgbClr val="EA580C"/>
+              <a:srgbClr val="F97316"/>
             </a:solidFill>
           </a:ln>
         </p:spPr>
@@ -3485,11 +5850,11 @@
             <a:avLst/>
           </a:prstGeom>
           <a:solidFill>
-            <a:srgbClr val="0A7B3E"/>
+            <a:srgbClr val="059669"/>
           </a:solidFill>
           <a:ln>
             <a:solidFill>
-              <a:srgbClr val="0A7B3E"/>
+              <a:srgbClr val="059669"/>
             </a:solidFill>
           </a:ln>
         </p:spPr>
@@ -3524,7 +5889,7 @@
         <p:spPr>
           <a:xfrm>
             <a:off x="731520" y="109728"/>
-            <a:ext cx="10698480" cy="822960"/>
+            <a:ext cx="10725912" cy="868680"/>
           </a:xfrm>
           <a:prstGeom prst="rect">
             <a:avLst/>
@@ -3545,7 +5910,7 @@
               </a:defRPr>
             </a:pPr>
             <a:r>
-              <a:t>STRATEGIC CONTEXT &amp; BOTTLENECKS</a:t>
+              <a:t>SIH26016 • TEAM APEX • MINISTRY OF RURAL DEVELOPMENT (DOLR)</a:t>
             </a:r>
           </a:p>
           <a:p>
@@ -3557,7 +5922,7 @@
               </a:defRPr>
             </a:pPr>
             <a:r>
-              <a:t>The Real Problem: Macroeconomic Crisis in Public Land Acquisition</a:t>
+              <a:t>The National Crisis: Land Bottleneck in India's Infrastructure Growth</a:t>
             </a:r>
           </a:p>
         </p:txBody>
@@ -3570,8 +5935,8 @@
         </p:nvSpPr>
         <p:spPr>
           <a:xfrm>
-            <a:off x="731520" y="1463040"/>
-            <a:ext cx="3383280" cy="4389120"/>
+            <a:off x="731520" y="1280160"/>
+            <a:ext cx="3291840" cy="5120640"/>
           </a:xfrm>
           <a:prstGeom prst="roundRect">
             <a:avLst/>
@@ -3579,9 +5944,9 @@
           <a:solidFill>
             <a:srgbClr val="FFFFFF"/>
           </a:solidFill>
-          <a:ln w="25400">
+          <a:ln w="19050">
             <a:solidFill>
-              <a:srgbClr val="EA580C"/>
+              <a:srgbClr val="EF4444"/>
             </a:solidFill>
           </a:ln>
         </p:spPr>
@@ -3600,62 +5965,133 @@
           </a:fontRef>
         </p:style>
         <p:txBody>
-          <a:bodyPr rtlCol="0" anchor="ctr" wrap="square"/>
-          <a:lstStyle/>
-          <a:p>
-            <a:pPr algn="ctr">
-              <a:defRPr sz="2400" b="1">
-                <a:solidFill>
-                  <a:srgbClr val="EA580C"/>
-                </a:solidFill>
-              </a:defRPr>
-            </a:pPr>
-            <a:r>
-              <a:t>01</a:t>
-            </a:r>
-          </a:p>
-          <a:p>
-            <a:pPr>
-              <a:spcBef>
-                <a:spcPts val="800"/>
-              </a:spcBef>
+          <a:bodyPr rtlCol="0" anchor="ctr"/>
+          <a:lstStyle/>
+          <a:p>
+            <a:pPr algn="ctr"/>
+          </a:p>
+        </p:txBody>
+      </p:sp>
+      <p:sp>
+        <p:nvSpPr>
+          <p:cNvPr id="8" name="TextBox 7"/>
+          <p:cNvSpPr txBox="1"/>
+          <p:nvPr/>
+        </p:nvSpPr>
+        <p:spPr>
+          <a:xfrm>
+            <a:off x="868680" y="1417319"/>
+            <a:ext cx="3017520" cy="4846320"/>
+          </a:xfrm>
+          <a:prstGeom prst="rect">
+            <a:avLst/>
+          </a:prstGeom>
+          <a:noFill/>
+        </p:spPr>
+        <p:txBody>
+          <a:bodyPr wrap="square">
+            <a:spAutoFit/>
+          </a:bodyPr>
+          <a:lstStyle/>
+          <a:p>
+            <a:pPr>
+              <a:defRPr sz="1400" b="1">
+                <a:solidFill>
+                  <a:srgbClr val="071426"/>
+                </a:solidFill>
+              </a:defRPr>
+            </a:pPr>
+            <a:r>
+              <a:t>1. Severe Judicial Pendency</a:t>
+            </a:r>
+          </a:p>
+          <a:p>
+            <a:pPr>
               <a:spcAft>
-                <a:spcPts val="1200"/>
+                <a:spcPts val="400"/>
               </a:spcAft>
-              <a:defRPr sz="1600" b="1">
-                <a:solidFill>
-                  <a:srgbClr val="071933"/>
-                </a:solidFill>
-              </a:defRPr>
-            </a:pPr>
-            <a:r>
-              <a:t>66% Civil Litigation</a:t>
-            </a:r>
-          </a:p>
-          <a:p>
-            <a:pPr>
-              <a:defRPr sz="1200">
-                <a:solidFill>
-                  <a:srgbClr val="64748B"/>
-                </a:solidFill>
-              </a:defRPr>
-            </a:pPr>
-            <a:r>
-              <a:t>Over two-thirds of all pending civil suits in Indian courts are tied to land and property acquisition disputes, causing massive infrastructure gridlocks.</a:t>
-            </a:r>
-          </a:p>
-        </p:txBody>
-      </p:sp>
-      <p:sp>
-        <p:nvSpPr>
-          <p:cNvPr id="8" name="Rounded Rectangle 7"/>
+              <a:defRPr sz="900" b="1">
+                <a:solidFill>
+                  <a:srgbClr val="F97316"/>
+                </a:solidFill>
+              </a:defRPr>
+            </a:pPr>
+            <a:r>
+              <a:t>[LITIGATION BOTTLENECK]</a:t>
+            </a:r>
+          </a:p>
+          <a:p>
+            <a:pPr>
+              <a:spcBef>
+                <a:spcPts val="300"/>
+              </a:spcBef>
+              <a:defRPr sz="1100">
+                <a:solidFill>
+                  <a:srgbClr val="334155"/>
+                </a:solidFill>
+              </a:defRPr>
+            </a:pPr>
+            <a:r>
+              <a:t>• 66% of all civil litigation in India is tied directly to land and property acquisition disputes.</a:t>
+            </a:r>
+          </a:p>
+          <a:p>
+            <a:pPr>
+              <a:spcBef>
+                <a:spcPts val="300"/>
+              </a:spcBef>
+              <a:defRPr sz="1100">
+                <a:solidFill>
+                  <a:srgbClr val="334155"/>
+                </a:solidFill>
+              </a:defRPr>
+            </a:pPr>
+            <a:r>
+              <a:t>• Average time to resolve land acquisition legal references exceeds 20.3 years in civil courts.</a:t>
+            </a:r>
+          </a:p>
+          <a:p>
+            <a:pPr>
+              <a:spcBef>
+                <a:spcPts val="300"/>
+              </a:spcBef>
+              <a:defRPr sz="1100">
+                <a:solidFill>
+                  <a:srgbClr val="334155"/>
+                </a:solidFill>
+              </a:defRPr>
+            </a:pPr>
+            <a:r>
+              <a:t>• Disputed titles and contested area measurements freeze critical public Right-of-Way alignments.</a:t>
+            </a:r>
+          </a:p>
+          <a:p>
+            <a:pPr>
+              <a:spcBef>
+                <a:spcPts val="300"/>
+              </a:spcBef>
+              <a:defRPr sz="1100">
+                <a:solidFill>
+                  <a:srgbClr val="334155"/>
+                </a:solidFill>
+              </a:defRPr>
+            </a:pPr>
+            <a:r>
+              <a:t>• Over ₹85,000+ Cr stuck in contested deposit escrow accounts.</a:t>
+            </a:r>
+          </a:p>
+        </p:txBody>
+      </p:sp>
+      <p:sp>
+        <p:nvSpPr>
+          <p:cNvPr id="9" name="Rounded Rectangle 8"/>
           <p:cNvSpPr/>
           <p:nvPr/>
         </p:nvSpPr>
         <p:spPr>
           <a:xfrm>
-            <a:off x="4389120" y="1463040"/>
-            <a:ext cx="3383280" cy="4389120"/>
+            <a:off x="4443984" y="1280160"/>
+            <a:ext cx="3291840" cy="5120640"/>
           </a:xfrm>
           <a:prstGeom prst="roundRect">
             <a:avLst/>
@@ -3663,9 +6099,9 @@
           <a:solidFill>
             <a:srgbClr val="FFFFFF"/>
           </a:solidFill>
-          <a:ln w="25400">
+          <a:ln w="19050">
             <a:solidFill>
-              <a:srgbClr val="DC2626"/>
+              <a:srgbClr val="F97316"/>
             </a:solidFill>
           </a:ln>
         </p:spPr>
@@ -3684,62 +6120,133 @@
           </a:fontRef>
         </p:style>
         <p:txBody>
-          <a:bodyPr rtlCol="0" anchor="ctr" wrap="square"/>
-          <a:lstStyle/>
-          <a:p>
-            <a:pPr algn="ctr">
-              <a:defRPr sz="2400" b="1">
-                <a:solidFill>
-                  <a:srgbClr val="DC2626"/>
-                </a:solidFill>
-              </a:defRPr>
-            </a:pPr>
-            <a:r>
-              <a:t>02</a:t>
-            </a:r>
-          </a:p>
-          <a:p>
-            <a:pPr>
-              <a:spcBef>
-                <a:spcPts val="800"/>
-              </a:spcBef>
+          <a:bodyPr rtlCol="0" anchor="ctr"/>
+          <a:lstStyle/>
+          <a:p>
+            <a:pPr algn="ctr"/>
+          </a:p>
+        </p:txBody>
+      </p:sp>
+      <p:sp>
+        <p:nvSpPr>
+          <p:cNvPr id="10" name="TextBox 9"/>
+          <p:cNvSpPr txBox="1"/>
+          <p:nvPr/>
+        </p:nvSpPr>
+        <p:spPr>
+          <a:xfrm>
+            <a:off x="4581144" y="1417319"/>
+            <a:ext cx="3017520" cy="4846320"/>
+          </a:xfrm>
+          <a:prstGeom prst="rect">
+            <a:avLst/>
+          </a:prstGeom>
+          <a:noFill/>
+        </p:spPr>
+        <p:txBody>
+          <a:bodyPr wrap="square">
+            <a:spAutoFit/>
+          </a:bodyPr>
+          <a:lstStyle/>
+          <a:p>
+            <a:pPr>
+              <a:defRPr sz="1400" b="1">
+                <a:solidFill>
+                  <a:srgbClr val="071426"/>
+                </a:solidFill>
+              </a:defRPr>
+            </a:pPr>
+            <a:r>
+              <a:t>2. Fragmented &amp; Siloed Records</a:t>
+            </a:r>
+          </a:p>
+          <a:p>
+            <a:pPr>
               <a:spcAft>
-                <a:spcPts val="1200"/>
+                <a:spcPts val="400"/>
               </a:spcAft>
-              <a:defRPr sz="1600" b="1">
-                <a:solidFill>
-                  <a:srgbClr val="071933"/>
-                </a:solidFill>
-              </a:defRPr>
-            </a:pPr>
-            <a:r>
-              <a:t>20-Year Judicial Pendency</a:t>
-            </a:r>
-          </a:p>
-          <a:p>
-            <a:pPr>
-              <a:defRPr sz="1200">
-                <a:solidFill>
-                  <a:srgbClr val="64748B"/>
-                </a:solidFill>
-              </a:defRPr>
-            </a:pPr>
-            <a:r>
-              <a:t>Contested land acquisition cases suffer an average delay of two decades, halting highways, freight corridors, and power transmission lines.</a:t>
-            </a:r>
-          </a:p>
-        </p:txBody>
-      </p:sp>
-      <p:sp>
-        <p:nvSpPr>
-          <p:cNvPr id="9" name="Rounded Rectangle 8"/>
+              <a:defRPr sz="900" b="1">
+                <a:solidFill>
+                  <a:srgbClr val="F97316"/>
+                </a:solidFill>
+              </a:defRPr>
+            </a:pPr>
+            <a:r>
+              <a:t>[DATA FRAGMENTATION]</a:t>
+            </a:r>
+          </a:p>
+          <a:p>
+            <a:pPr>
+              <a:spcBef>
+                <a:spcPts val="300"/>
+              </a:spcBef>
+              <a:defRPr sz="1100">
+                <a:solidFill>
+                  <a:srgbClr val="334155"/>
+                </a:solidFill>
+              </a:defRPr>
+            </a:pPr>
+            <a:r>
+              <a:t>• Paper-based legacy revenue registers (Khasra/Khatauni) lack unified geospatial coordinates.</a:t>
+            </a:r>
+          </a:p>
+          <a:p>
+            <a:pPr>
+              <a:spcBef>
+                <a:spcPts val="300"/>
+              </a:spcBef>
+              <a:defRPr sz="1100">
+                <a:solidFill>
+                  <a:srgbClr val="334155"/>
+                </a:solidFill>
+              </a:defRPr>
+            </a:pPr>
+            <a:r>
+              <a:t>• Central agencies (NHAI, DFCCIL, MoR) cannot communicate in real-time with State CALAs.</a:t>
+            </a:r>
+          </a:p>
+          <a:p>
+            <a:pPr>
+              <a:spcBef>
+                <a:spcPts val="300"/>
+              </a:spcBef>
+              <a:defRPr sz="1100">
+                <a:solidFill>
+                  <a:srgbClr val="334155"/>
+                </a:solidFill>
+              </a:defRPr>
+            </a:pPr>
+            <a:r>
+              <a:t>• Unnotified illegal land sales occur even after Section 11 gazette publication due to lack of auto-lock.</a:t>
+            </a:r>
+          </a:p>
+          <a:p>
+            <a:pPr>
+              <a:spcBef>
+                <a:spcPts val="300"/>
+              </a:spcBef>
+              <a:defRPr sz="1100">
+                <a:solidFill>
+                  <a:srgbClr val="334155"/>
+                </a:solidFill>
+              </a:defRPr>
+            </a:pPr>
+            <a:r>
+              <a:t>• Multiple revenue portals (Bhulekh, 7/12, Bhoomi) operate as disconnected silos.</a:t>
+            </a:r>
+          </a:p>
+        </p:txBody>
+      </p:sp>
+      <p:sp>
+        <p:nvSpPr>
+          <p:cNvPr id="11" name="Rounded Rectangle 10"/>
           <p:cNvSpPr/>
           <p:nvPr/>
         </p:nvSpPr>
         <p:spPr>
           <a:xfrm>
-            <a:off x="8046720" y="1463040"/>
-            <a:ext cx="3383280" cy="4389120"/>
+            <a:off x="8165592" y="1280160"/>
+            <a:ext cx="3291840" cy="5120640"/>
           </a:xfrm>
           <a:prstGeom prst="roundRect">
             <a:avLst/>
@@ -3747,9 +6254,9 @@
           <a:solidFill>
             <a:srgbClr val="FFFFFF"/>
           </a:solidFill>
-          <a:ln w="25400">
+          <a:ln w="19050">
             <a:solidFill>
-              <a:srgbClr val="0A2558"/>
+              <a:srgbClr val="B91C1C"/>
             </a:solidFill>
           </a:ln>
         </p:spPr>
@@ -3768,48 +6275,119 @@
           </a:fontRef>
         </p:style>
         <p:txBody>
-          <a:bodyPr rtlCol="0" anchor="ctr" wrap="square"/>
-          <a:lstStyle/>
-          <a:p>
-            <a:pPr algn="ctr">
-              <a:defRPr sz="2400" b="1">
-                <a:solidFill>
-                  <a:srgbClr val="0A2558"/>
-                </a:solidFill>
-              </a:defRPr>
-            </a:pPr>
-            <a:r>
-              <a:t>03</a:t>
-            </a:r>
-          </a:p>
-          <a:p>
-            <a:pPr>
-              <a:spcBef>
-                <a:spcPts val="800"/>
-              </a:spcBef>
+          <a:bodyPr rtlCol="0" anchor="ctr"/>
+          <a:lstStyle/>
+          <a:p>
+            <a:pPr algn="ctr"/>
+          </a:p>
+        </p:txBody>
+      </p:sp>
+      <p:sp>
+        <p:nvSpPr>
+          <p:cNvPr id="12" name="TextBox 11"/>
+          <p:cNvSpPr txBox="1"/>
+          <p:nvPr/>
+        </p:nvSpPr>
+        <p:spPr>
+          <a:xfrm>
+            <a:off x="8302752" y="1417319"/>
+            <a:ext cx="3017520" cy="4846320"/>
+          </a:xfrm>
+          <a:prstGeom prst="rect">
+            <a:avLst/>
+          </a:prstGeom>
+          <a:noFill/>
+        </p:spPr>
+        <p:txBody>
+          <a:bodyPr wrap="square">
+            <a:spAutoFit/>
+          </a:bodyPr>
+          <a:lstStyle/>
+          <a:p>
+            <a:pPr>
+              <a:defRPr sz="1400" b="1">
+                <a:solidFill>
+                  <a:srgbClr val="071426"/>
+                </a:solidFill>
+              </a:defRPr>
+            </a:pPr>
+            <a:r>
+              <a:t>3. Fiscal &amp; Social Drag</a:t>
+            </a:r>
+          </a:p>
+          <a:p>
+            <a:pPr>
               <a:spcAft>
-                <a:spcPts val="1200"/>
+                <a:spcPts val="400"/>
               </a:spcAft>
-              <a:defRPr sz="1600" b="1">
-                <a:solidFill>
-                  <a:srgbClr val="071933"/>
-                </a:solidFill>
-              </a:defRPr>
-            </a:pPr>
-            <a:r>
-              <a:t>1.3% GDP Macroeconomic Loss</a:t>
-            </a:r>
-          </a:p>
-          <a:p>
-            <a:pPr>
-              <a:defRPr sz="1200">
-                <a:solidFill>
-                  <a:srgbClr val="64748B"/>
-                </a:solidFill>
-              </a:defRPr>
-            </a:pPr>
-            <a:r>
-              <a:t>Cumulative capital lock-in from stalled projects and uncoordinated inter-agency clearances costs the Indian economy over ₹ trillions annually.</a:t>
+              <a:defRPr sz="900" b="1">
+                <a:solidFill>
+                  <a:srgbClr val="F97316"/>
+                </a:solidFill>
+              </a:defRPr>
+            </a:pPr>
+            <a:r>
+              <a:t>[MACROECONOMIC DRAG]</a:t>
+            </a:r>
+          </a:p>
+          <a:p>
+            <a:pPr>
+              <a:spcBef>
+                <a:spcPts val="300"/>
+              </a:spcBef>
+              <a:defRPr sz="1100">
+                <a:solidFill>
+                  <a:srgbClr val="334155"/>
+                </a:solidFill>
+              </a:defRPr>
+            </a:pPr>
+            <a:r>
+              <a:t>• Infrastructure project delays cost India approximately 1.3% of annual GDP in capital lock-in.</a:t>
+            </a:r>
+          </a:p>
+          <a:p>
+            <a:pPr>
+              <a:spcBef>
+                <a:spcPts val="300"/>
+              </a:spcBef>
+              <a:defRPr sz="1100">
+                <a:solidFill>
+                  <a:srgbClr val="334155"/>
+                </a:solidFill>
+              </a:defRPr>
+            </a:pPr>
+            <a:r>
+              <a:t>• Subjective manual compensation calculations trigger widespread farmer grievances.</a:t>
+            </a:r>
+          </a:p>
+          <a:p>
+            <a:pPr>
+              <a:spcBef>
+                <a:spcPts val="300"/>
+              </a:spcBef>
+              <a:defRPr sz="1100">
+                <a:solidFill>
+                  <a:srgbClr val="334155"/>
+                </a:solidFill>
+              </a:defRPr>
+            </a:pPr>
+            <a:r>
+              <a:t>• Rehabilitation &amp; Resettlement (R&amp;R) entitlements under Second Schedule remain poorly tracked.</a:t>
+            </a:r>
+          </a:p>
+          <a:p>
+            <a:pPr>
+              <a:spcBef>
+                <a:spcPts val="300"/>
+              </a:spcBef>
+              <a:defRPr sz="1100">
+                <a:solidFill>
+                  <a:srgbClr val="334155"/>
+                </a:solidFill>
+              </a:defRPr>
+            </a:pPr>
+            <a:r>
+              <a:t>• CALA commercial bank deposit parking leads to fund float delays and audit objections.</a:t>
             </a:r>
           </a:p>
         </p:txBody>
@@ -3847,11 +6425,11 @@
             <a:avLst/>
           </a:prstGeom>
           <a:solidFill>
-            <a:srgbClr val="071933"/>
+            <a:srgbClr val="071426"/>
           </a:solidFill>
           <a:ln>
             <a:solidFill>
-              <a:srgbClr val="071933"/>
+              <a:srgbClr val="071426"/>
             </a:solidFill>
           </a:ln>
         </p:spPr>
@@ -3892,11 +6470,11 @@
             <a:avLst/>
           </a:prstGeom>
           <a:solidFill>
-            <a:srgbClr val="EA580C"/>
+            <a:srgbClr val="F97316"/>
           </a:solidFill>
           <a:ln>
             <a:solidFill>
-              <a:srgbClr val="EA580C"/>
+              <a:srgbClr val="F97316"/>
             </a:solidFill>
           </a:ln>
         </p:spPr>
@@ -3982,11 +6560,11 @@
             <a:avLst/>
           </a:prstGeom>
           <a:solidFill>
-            <a:srgbClr val="0A7B3E"/>
+            <a:srgbClr val="059669"/>
           </a:solidFill>
           <a:ln>
             <a:solidFill>
-              <a:srgbClr val="0A7B3E"/>
+              <a:srgbClr val="059669"/>
             </a:solidFill>
           </a:ln>
         </p:spPr>
@@ -4021,7 +6599,7 @@
         <p:spPr>
           <a:xfrm>
             <a:off x="731520" y="109728"/>
-            <a:ext cx="10698480" cy="822960"/>
+            <a:ext cx="10725912" cy="868680"/>
           </a:xfrm>
           <a:prstGeom prst="rect">
             <a:avLst/>
@@ -4042,7 +6620,7 @@
               </a:defRPr>
             </a:pPr>
             <a:r>
-              <a:t>ENTERPRISE ARCHITECTURE</a:t>
+              <a:t>SIH26016 • TEAM APEX • MINISTRY OF RURAL DEVELOPMENT (DOLR)</a:t>
             </a:r>
           </a:p>
           <a:p>
@@ -4054,7 +6632,7 @@
               </a:defRPr>
             </a:pPr>
             <a:r>
-              <a:t>The Solution: Unified NLAMS Microservice Platform</a:t>
+              <a:t>The Solution: NLAMS Production Architecture</a:t>
             </a:r>
           </a:p>
         </p:txBody>
@@ -4067,8 +6645,8 @@
         </p:nvSpPr>
         <p:spPr>
           <a:xfrm>
-            <a:off x="731520" y="1463040"/>
-            <a:ext cx="5120640" cy="2011680"/>
+            <a:off x="731520" y="1280160"/>
+            <a:ext cx="5120640" cy="2468880"/>
           </a:xfrm>
           <a:prstGeom prst="roundRect">
             <a:avLst/>
@@ -4076,9 +6654,9 @@
           <a:solidFill>
             <a:srgbClr val="FFFFFF"/>
           </a:solidFill>
-          <a:ln>
+          <a:ln w="19050">
             <a:solidFill>
-              <a:srgbClr val="CBD5E1"/>
+              <a:srgbClr val="E2E8F0"/>
             </a:solidFill>
           </a:ln>
         </p:spPr>
@@ -4097,47 +6675,103 @@
           </a:fontRef>
         </p:style>
         <p:txBody>
-          <a:bodyPr rtlCol="0" anchor="ctr" wrap="square"/>
-          <a:lstStyle/>
-          <a:p>
-            <a:pPr algn="ctr">
+          <a:bodyPr rtlCol="0" anchor="ctr"/>
+          <a:lstStyle/>
+          <a:p>
+            <a:pPr algn="ctr"/>
+          </a:p>
+        </p:txBody>
+      </p:sp>
+      <p:sp>
+        <p:nvSpPr>
+          <p:cNvPr id="8" name="TextBox 7"/>
+          <p:cNvSpPr txBox="1"/>
+          <p:nvPr/>
+        </p:nvSpPr>
+        <p:spPr>
+          <a:xfrm>
+            <a:off x="868680" y="1417319"/>
+            <a:ext cx="4846320" cy="2194560"/>
+          </a:xfrm>
+          <a:prstGeom prst="rect">
+            <a:avLst/>
+          </a:prstGeom>
+          <a:noFill/>
+        </p:spPr>
+        <p:txBody>
+          <a:bodyPr wrap="square">
+            <a:spAutoFit/>
+          </a:bodyPr>
+          <a:lstStyle/>
+          <a:p>
+            <a:pPr>
               <a:defRPr sz="1400" b="1">
                 <a:solidFill>
-                  <a:srgbClr val="0A2558"/>
-                </a:solidFill>
-              </a:defRPr>
-            </a:pPr>
-            <a:r>
-              <a:t>1. Spatial Cadastral Ingestion</a:t>
-            </a:r>
-          </a:p>
-          <a:p>
-            <a:pPr>
-              <a:spcBef>
-                <a:spcPts val="600"/>
-              </a:spcBef>
-              <a:defRPr sz="1150">
-                <a:solidFill>
-                  <a:srgbClr val="64748B"/>
-                </a:solidFill>
-              </a:defRPr>
-            </a:pPr>
-            <a:r>
-              <a:t>Ingests KML/GeoJSON alignments and intersects with cadastral maps using 14-digit ULPIN (Bhu-Aadhaar).</a:t>
-            </a:r>
-          </a:p>
-        </p:txBody>
-      </p:sp>
-      <p:sp>
-        <p:nvSpPr>
-          <p:cNvPr id="8" name="Rounded Rectangle 7"/>
+                  <a:srgbClr val="071426"/>
+                </a:solidFill>
+              </a:defRPr>
+            </a:pPr>
+            <a:r>
+              <a:t>1. 14-Digit Bhu-Aadhaar Spatial Lock</a:t>
+            </a:r>
+          </a:p>
+          <a:p>
+            <a:pPr>
+              <a:spcAft>
+                <a:spcPts val="400"/>
+              </a:spcAft>
+              <a:defRPr sz="900" b="1">
+                <a:solidFill>
+                  <a:srgbClr val="F97316"/>
+                </a:solidFill>
+              </a:defRPr>
+            </a:pPr>
+            <a:r>
+              <a:t>[CORE SECURITY]</a:t>
+            </a:r>
+          </a:p>
+          <a:p>
+            <a:pPr>
+              <a:spcBef>
+                <a:spcPts val="300"/>
+              </a:spcBef>
+              <a:defRPr sz="1100">
+                <a:solidFill>
+                  <a:srgbClr val="334155"/>
+                </a:solidFill>
+              </a:defRPr>
+            </a:pPr>
+            <a:r>
+              <a:t>• Integrates DoLR 14-digit ULPIN centroid algorithm with cadastral polygons.</a:t>
+            </a:r>
+          </a:p>
+          <a:p>
+            <a:pPr>
+              <a:spcBef>
+                <a:spcPts val="300"/>
+              </a:spcBef>
+              <a:defRPr sz="1100">
+                <a:solidFill>
+                  <a:srgbClr val="334155"/>
+                </a:solidFill>
+              </a:defRPr>
+            </a:pPr>
+            <a:r>
+              <a:t>• Automatic encumbrance locking in State Registries upon Section 11 notification.</a:t>
+            </a:r>
+          </a:p>
+        </p:txBody>
+      </p:sp>
+      <p:sp>
+        <p:nvSpPr>
+          <p:cNvPr id="9" name="Rounded Rectangle 8"/>
           <p:cNvSpPr/>
           <p:nvPr/>
         </p:nvSpPr>
         <p:spPr>
           <a:xfrm>
-            <a:off x="6126480" y="1463040"/>
-            <a:ext cx="5120640" cy="2011680"/>
+            <a:off x="6309360" y="1280160"/>
+            <a:ext cx="5120640" cy="2468880"/>
           </a:xfrm>
           <a:prstGeom prst="roundRect">
             <a:avLst/>
@@ -4145,9 +6779,9 @@
           <a:solidFill>
             <a:srgbClr val="FFFFFF"/>
           </a:solidFill>
-          <a:ln>
+          <a:ln w="19050">
             <a:solidFill>
-              <a:srgbClr val="CBD5E1"/>
+              <a:srgbClr val="E2E8F0"/>
             </a:solidFill>
           </a:ln>
         </p:spPr>
@@ -4166,47 +6800,103 @@
           </a:fontRef>
         </p:style>
         <p:txBody>
-          <a:bodyPr rtlCol="0" anchor="ctr" wrap="square"/>
-          <a:lstStyle/>
-          <a:p>
-            <a:pPr algn="ctr">
+          <a:bodyPr rtlCol="0" anchor="ctr"/>
+          <a:lstStyle/>
+          <a:p>
+            <a:pPr algn="ctr"/>
+          </a:p>
+        </p:txBody>
+      </p:sp>
+      <p:sp>
+        <p:nvSpPr>
+          <p:cNvPr id="10" name="TextBox 9"/>
+          <p:cNvSpPr txBox="1"/>
+          <p:nvPr/>
+        </p:nvSpPr>
+        <p:spPr>
+          <a:xfrm>
+            <a:off x="6446520" y="1417319"/>
+            <a:ext cx="4846320" cy="2194560"/>
+          </a:xfrm>
+          <a:prstGeom prst="rect">
+            <a:avLst/>
+          </a:prstGeom>
+          <a:noFill/>
+        </p:spPr>
+        <p:txBody>
+          <a:bodyPr wrap="square">
+            <a:spAutoFit/>
+          </a:bodyPr>
+          <a:lstStyle/>
+          <a:p>
+            <a:pPr>
               <a:defRPr sz="1400" b="1">
                 <a:solidFill>
-                  <a:srgbClr val="0A2558"/>
-                </a:solidFill>
-              </a:defRPr>
-            </a:pPr>
-            <a:r>
-              <a:t>2. 9-Stage Statutory Gatekeeper</a:t>
-            </a:r>
-          </a:p>
-          <a:p>
-            <a:pPr>
-              <a:spcBef>
-                <a:spcPts val="600"/>
-              </a:spcBef>
-              <a:defRPr sz="1150">
-                <a:solidFill>
-                  <a:srgbClr val="64748B"/>
-                </a:solidFill>
-              </a:defRPr>
-            </a:pPr>
-            <a:r>
-              <a:t>Deterministic state machine enforcing RFCTLARR Act 2013 &amp; NH Act 1956 milestones with zero illegal skipping.</a:t>
-            </a:r>
-          </a:p>
-        </p:txBody>
-      </p:sp>
-      <p:sp>
-        <p:nvSpPr>
-          <p:cNvPr id="9" name="Rounded Rectangle 8"/>
+                  <a:srgbClr val="071426"/>
+                </a:solidFill>
+              </a:defRPr>
+            </a:pPr>
+            <a:r>
+              <a:t>2. Deterministic 9-Stage Legal Gatekeeper</a:t>
+            </a:r>
+          </a:p>
+          <a:p>
+            <a:pPr>
+              <a:spcAft>
+                <a:spcPts val="400"/>
+              </a:spcAft>
+              <a:defRPr sz="900" b="1">
+                <a:solidFill>
+                  <a:srgbClr val="F97316"/>
+                </a:solidFill>
+              </a:defRPr>
+            </a:pPr>
+            <a:r>
+              <a:t>[STATUTORY COMPLIANCE]</a:t>
+            </a:r>
+          </a:p>
+          <a:p>
+            <a:pPr>
+              <a:spcBef>
+                <a:spcPts val="300"/>
+              </a:spcBef>
+              <a:defRPr sz="1100">
+                <a:solidFill>
+                  <a:srgbClr val="334155"/>
+                </a:solidFill>
+              </a:defRPr>
+            </a:pPr>
+            <a:r>
+              <a:t>• Enforces statutory progression under RFCTLARR Act 2013 and NH Act 1956.</a:t>
+            </a:r>
+          </a:p>
+          <a:p>
+            <a:pPr>
+              <a:spcBef>
+                <a:spcPts val="300"/>
+              </a:spcBef>
+              <a:defRPr sz="1100">
+                <a:solidFill>
+                  <a:srgbClr val="334155"/>
+                </a:solidFill>
+              </a:defRPr>
+            </a:pPr>
+            <a:r>
+              <a:t>• No stage skipped without mandatory legal clearances, SIA, and Gazette publication.</a:t>
+            </a:r>
+          </a:p>
+        </p:txBody>
+      </p:sp>
+      <p:sp>
+        <p:nvSpPr>
+          <p:cNvPr id="11" name="Rounded Rectangle 10"/>
           <p:cNvSpPr/>
           <p:nvPr/>
         </p:nvSpPr>
         <p:spPr>
           <a:xfrm>
-            <a:off x="731520" y="3749039"/>
-            <a:ext cx="5120640" cy="2011680"/>
+            <a:off x="731520" y="3931920"/>
+            <a:ext cx="5120640" cy="2468880"/>
           </a:xfrm>
           <a:prstGeom prst="roundRect">
             <a:avLst/>
@@ -4214,9 +6904,9 @@
           <a:solidFill>
             <a:srgbClr val="FFFFFF"/>
           </a:solidFill>
-          <a:ln>
+          <a:ln w="19050">
             <a:solidFill>
-              <a:srgbClr val="CBD5E1"/>
+              <a:srgbClr val="E2E8F0"/>
             </a:solidFill>
           </a:ln>
         </p:spPr>
@@ -4235,47 +6925,103 @@
           </a:fontRef>
         </p:style>
         <p:txBody>
-          <a:bodyPr rtlCol="0" anchor="ctr" wrap="square"/>
-          <a:lstStyle/>
-          <a:p>
-            <a:pPr algn="ctr">
+          <a:bodyPr rtlCol="0" anchor="ctr"/>
+          <a:lstStyle/>
+          <a:p>
+            <a:pPr algn="ctr"/>
+          </a:p>
+        </p:txBody>
+      </p:sp>
+      <p:sp>
+        <p:nvSpPr>
+          <p:cNvPr id="12" name="TextBox 11"/>
+          <p:cNvSpPr txBox="1"/>
+          <p:nvPr/>
+        </p:nvSpPr>
+        <p:spPr>
+          <a:xfrm>
+            <a:off x="868680" y="4069080"/>
+            <a:ext cx="4846320" cy="2194560"/>
+          </a:xfrm>
+          <a:prstGeom prst="rect">
+            <a:avLst/>
+          </a:prstGeom>
+          <a:noFill/>
+        </p:spPr>
+        <p:txBody>
+          <a:bodyPr wrap="square">
+            <a:spAutoFit/>
+          </a:bodyPr>
+          <a:lstStyle/>
+          <a:p>
+            <a:pPr>
               <a:defRPr sz="1400" b="1">
                 <a:solidFill>
-                  <a:srgbClr val="0A2558"/>
-                </a:solidFill>
-              </a:defRPr>
-            </a:pPr>
-            <a:r>
-              <a:t>3. First Schedule Valuation Engine</a:t>
-            </a:r>
-          </a:p>
-          <a:p>
-            <a:pPr>
-              <a:spcBef>
-                <a:spcPts val="600"/>
-              </a:spcBef>
-              <a:defRPr sz="1150">
-                <a:solidFill>
-                  <a:srgbClr val="64748B"/>
-                </a:solidFill>
-              </a:defRPr>
-            </a:pPr>
-            <a:r>
-              <a:t>Automated math: Max(Circle, Sales) × Rural Factor + Assets + 100% Solatium + 12% Additional Amount.</a:t>
-            </a:r>
-          </a:p>
-        </p:txBody>
-      </p:sp>
-      <p:sp>
-        <p:nvSpPr>
-          <p:cNvPr id="10" name="Rounded Rectangle 9"/>
+                  <a:srgbClr val="071426"/>
+                </a:solidFill>
+              </a:defRPr>
+            </a:pPr>
+            <a:r>
+              <a:t>3. Audited First Schedule Calculation</a:t>
+            </a:r>
+          </a:p>
+          <a:p>
+            <a:pPr>
+              <a:spcAft>
+                <a:spcPts val="400"/>
+              </a:spcAft>
+              <a:defRPr sz="900" b="1">
+                <a:solidFill>
+                  <a:srgbClr val="F97316"/>
+                </a:solidFill>
+              </a:defRPr>
+            </a:pPr>
+            <a:r>
+              <a:t>[TRANSPARENT MATH]</a:t>
+            </a:r>
+          </a:p>
+          <a:p>
+            <a:pPr>
+              <a:spcBef>
+                <a:spcPts val="300"/>
+              </a:spcBef>
+              <a:defRPr sz="1100">
+                <a:solidFill>
+                  <a:srgbClr val="334155"/>
+                </a:solidFill>
+              </a:defRPr>
+            </a:pPr>
+            <a:r>
+              <a:t>• Automated formula: Base MV × Rural Multiplier + Assets + 100% Solatium + 12% Addl.</a:t>
+            </a:r>
+          </a:p>
+          <a:p>
+            <a:pPr>
+              <a:spcBef>
+                <a:spcPts val="300"/>
+              </a:spcBef>
+              <a:defRPr sz="1100">
+                <a:solidFill>
+                  <a:srgbClr val="334155"/>
+                </a:solidFill>
+              </a:defRPr>
+            </a:pPr>
+            <a:r>
+              <a:t>• Zero manual manipulation; complete mathematical transparency for citizens &amp; tribunals.</a:t>
+            </a:r>
+          </a:p>
+        </p:txBody>
+      </p:sp>
+      <p:sp>
+        <p:nvSpPr>
+          <p:cNvPr id="13" name="Rounded Rectangle 12"/>
           <p:cNvSpPr/>
           <p:nvPr/>
         </p:nvSpPr>
         <p:spPr>
           <a:xfrm>
-            <a:off x="6126480" y="3749039"/>
-            <a:ext cx="5120640" cy="2011680"/>
+            <a:off x="6309360" y="3931920"/>
+            <a:ext cx="5120640" cy="2468880"/>
           </a:xfrm>
           <a:prstGeom prst="roundRect">
             <a:avLst/>
@@ -4283,9 +7029,9 @@
           <a:solidFill>
             <a:srgbClr val="FFFFFF"/>
           </a:solidFill>
-          <a:ln>
+          <a:ln w="19050">
             <a:solidFill>
-              <a:srgbClr val="CBD5E1"/>
+              <a:srgbClr val="E2E8F0"/>
             </a:solidFill>
           </a:ln>
         </p:spPr>
@@ -4304,33 +7050,89 @@
           </a:fontRef>
         </p:style>
         <p:txBody>
-          <a:bodyPr rtlCol="0" anchor="ctr" wrap="square"/>
-          <a:lstStyle/>
-          <a:p>
-            <a:pPr algn="ctr">
+          <a:bodyPr rtlCol="0" anchor="ctr"/>
+          <a:lstStyle/>
+          <a:p>
+            <a:pPr algn="ctr"/>
+          </a:p>
+        </p:txBody>
+      </p:sp>
+      <p:sp>
+        <p:nvSpPr>
+          <p:cNvPr id="14" name="TextBox 13"/>
+          <p:cNvSpPr txBox="1"/>
+          <p:nvPr/>
+        </p:nvSpPr>
+        <p:spPr>
+          <a:xfrm>
+            <a:off x="6446520" y="4069080"/>
+            <a:ext cx="4846320" cy="2194560"/>
+          </a:xfrm>
+          <a:prstGeom prst="rect">
+            <a:avLst/>
+          </a:prstGeom>
+          <a:noFill/>
+        </p:spPr>
+        <p:txBody>
+          <a:bodyPr wrap="square">
+            <a:spAutoFit/>
+          </a:bodyPr>
+          <a:lstStyle/>
+          <a:p>
+            <a:pPr>
               <a:defRPr sz="1400" b="1">
                 <a:solidFill>
-                  <a:srgbClr val="0A2558"/>
-                </a:solidFill>
-              </a:defRPr>
-            </a:pPr>
-            <a:r>
-              <a:t>4. Direct PFMS DBT Settlement</a:t>
-            </a:r>
-          </a:p>
-          <a:p>
-            <a:pPr>
-              <a:spcBef>
-                <a:spcPts val="600"/>
-              </a:spcBef>
-              <a:defRPr sz="1150">
-                <a:solidFill>
-                  <a:srgbClr val="64748B"/>
-                </a:solidFill>
-              </a:defRPr>
-            </a:pPr>
-            <a:r>
-              <a:t>Direct bank account credit to project-affected landholders, eliminating intermediate CALA holding account floats.</a:t>
+                  <a:srgbClr val="071426"/>
+                </a:solidFill>
+              </a:defRPr>
+            </a:pPr>
+            <a:r>
+              <a:t>4. PFMS Direct Benefit Transfer &amp; Auto-Mutation</a:t>
+            </a:r>
+          </a:p>
+          <a:p>
+            <a:pPr>
+              <a:spcAft>
+                <a:spcPts val="400"/>
+              </a:spcAft>
+              <a:defRPr sz="900" b="1">
+                <a:solidFill>
+                  <a:srgbClr val="F97316"/>
+                </a:solidFill>
+              </a:defRPr>
+            </a:pPr>
+            <a:r>
+              <a:t>[FINANCIAL INTEGRITY]</a:t>
+            </a:r>
+          </a:p>
+          <a:p>
+            <a:pPr>
+              <a:spcBef>
+                <a:spcPts val="300"/>
+              </a:spcBef>
+              <a:defRPr sz="1100">
+                <a:solidFill>
+                  <a:srgbClr val="334155"/>
+                </a:solidFill>
+              </a:defRPr>
+            </a:pPr>
+            <a:r>
+              <a:t>• Direct bank credit via ISO 20022 XML batch to verified farmer bank accounts.</a:t>
+            </a:r>
+          </a:p>
+          <a:p>
+            <a:pPr>
+              <a:spcBef>
+                <a:spcPts val="300"/>
+              </a:spcBef>
+              <a:defRPr sz="1100">
+                <a:solidFill>
+                  <a:srgbClr val="334155"/>
+                </a:solidFill>
+              </a:defRPr>
+            </a:pPr>
+            <a:r>
+              <a:t>• Automated webhook pushes to State RoRs for instant title mutation upon possession.</a:t>
             </a:r>
           </a:p>
         </p:txBody>
@@ -4368,11 +7170,11 @@
             <a:avLst/>
           </a:prstGeom>
           <a:solidFill>
-            <a:srgbClr val="071933"/>
+            <a:srgbClr val="071426"/>
           </a:solidFill>
           <a:ln>
             <a:solidFill>
-              <a:srgbClr val="071933"/>
+              <a:srgbClr val="071426"/>
             </a:solidFill>
           </a:ln>
         </p:spPr>
@@ -4413,11 +7215,11 @@
             <a:avLst/>
           </a:prstGeom>
           <a:solidFill>
-            <a:srgbClr val="EA580C"/>
+            <a:srgbClr val="F97316"/>
           </a:solidFill>
           <a:ln>
             <a:solidFill>
-              <a:srgbClr val="EA580C"/>
+              <a:srgbClr val="F97316"/>
             </a:solidFill>
           </a:ln>
         </p:spPr>
@@ -4503,11 +7305,11 @@
             <a:avLst/>
           </a:prstGeom>
           <a:solidFill>
-            <a:srgbClr val="0A7B3E"/>
+            <a:srgbClr val="059669"/>
           </a:solidFill>
           <a:ln>
             <a:solidFill>
-              <a:srgbClr val="0A7B3E"/>
+              <a:srgbClr val="059669"/>
             </a:solidFill>
           </a:ln>
         </p:spPr>
@@ -4542,7 +7344,7 @@
         <p:spPr>
           <a:xfrm>
             <a:off x="731520" y="109728"/>
-            <a:ext cx="10698480" cy="822960"/>
+            <a:ext cx="10725912" cy="868680"/>
           </a:xfrm>
           <a:prstGeom prst="rect">
             <a:avLst/>
@@ -4563,7 +7365,7 @@
               </a:defRPr>
             </a:pPr>
             <a:r>
-              <a:t>LIFECYCLE ENGINEERING</a:t>
+              <a:t>SIH26016 • TEAM APEX • MINISTRY OF RURAL DEVELOPMENT (DOLR)</a:t>
             </a:r>
           </a:p>
           <a:p>
@@ -4575,7 +7377,7 @@
               </a:defRPr>
             </a:pPr>
             <a:r>
-              <a:t>Deterministic 9-Stage Statutory Gatekeeper Workflow</a:t>
+              <a:t>Technical Architecture &amp; System Design</a:t>
             </a:r>
           </a:p>
         </p:txBody>
@@ -4588,8 +7390,8 @@
         </p:nvSpPr>
         <p:spPr>
           <a:xfrm>
-            <a:off x="731520" y="1463040"/>
-            <a:ext cx="3383280" cy="1280160"/>
+            <a:off x="731520" y="1280160"/>
+            <a:ext cx="3291840" cy="5120640"/>
           </a:xfrm>
           <a:prstGeom prst="roundRect">
             <a:avLst/>
@@ -4597,9 +7399,9 @@
           <a:solidFill>
             <a:srgbClr val="FFFFFF"/>
           </a:solidFill>
-          <a:ln>
+          <a:ln w="19050">
             <a:solidFill>
-              <a:srgbClr val="0A2558"/>
+              <a:srgbClr val="E2E8F0"/>
             </a:solidFill>
           </a:ln>
         </p:spPr>
@@ -4618,44 +7420,133 @@
           </a:fontRef>
         </p:style>
         <p:txBody>
-          <a:bodyPr rtlCol="0" anchor="ctr" wrap="square"/>
-          <a:lstStyle/>
-          <a:p>
-            <a:pPr algn="ctr">
+          <a:bodyPr rtlCol="0" anchor="ctr"/>
+          <a:lstStyle/>
+          <a:p>
+            <a:pPr algn="ctr"/>
+          </a:p>
+        </p:txBody>
+      </p:sp>
+      <p:sp>
+        <p:nvSpPr>
+          <p:cNvPr id="8" name="TextBox 7"/>
+          <p:cNvSpPr txBox="1"/>
+          <p:nvPr/>
+        </p:nvSpPr>
+        <p:spPr>
+          <a:xfrm>
+            <a:off x="868680" y="1417319"/>
+            <a:ext cx="3017520" cy="4846320"/>
+          </a:xfrm>
+          <a:prstGeom prst="rect">
+            <a:avLst/>
+          </a:prstGeom>
+          <a:noFill/>
+        </p:spPr>
+        <p:txBody>
+          <a:bodyPr wrap="square">
+            <a:spAutoFit/>
+          </a:bodyPr>
+          <a:lstStyle/>
+          <a:p>
+            <a:pPr>
+              <a:defRPr sz="1400" b="1">
+                <a:solidFill>
+                  <a:srgbClr val="071426"/>
+                </a:solidFill>
+              </a:defRPr>
+            </a:pPr>
+            <a:r>
+              <a:t>Frontend Presentation Tier</a:t>
+            </a:r>
+          </a:p>
+          <a:p>
+            <a:pPr>
+              <a:spcAft>
+                <a:spcPts val="400"/>
+              </a:spcAft>
               <a:defRPr sz="900" b="1">
                 <a:solidFill>
-                  <a:srgbClr val="EA580C"/>
-                </a:solidFill>
-              </a:defRPr>
-            </a:pPr>
-            <a:r>
-              <a:t>STAGE 01</a:t>
-            </a:r>
-          </a:p>
-          <a:p>
-            <a:pPr>
-              <a:defRPr sz="1100" b="1">
-                <a:solidFill>
-                  <a:srgbClr val="071933"/>
-                </a:solidFill>
-              </a:defRPr>
-            </a:pPr>
-            <a:r>
-              <a:t>1. Proposal &amp; Alignment (Sec 4 / 3A)</a:t>
-            </a:r>
-          </a:p>
-        </p:txBody>
-      </p:sp>
-      <p:sp>
-        <p:nvSpPr>
-          <p:cNvPr id="8" name="Rounded Rectangle 7"/>
+                  <a:srgbClr val="F97316"/>
+                </a:solidFill>
+              </a:defRPr>
+            </a:pPr>
+            <a:r>
+              <a:t>[CLIENT LAYER]</a:t>
+            </a:r>
+          </a:p>
+          <a:p>
+            <a:pPr>
+              <a:spcBef>
+                <a:spcPts val="300"/>
+              </a:spcBef>
+              <a:defRPr sz="1100">
+                <a:solidFill>
+                  <a:srgbClr val="334155"/>
+                </a:solidFill>
+              </a:defRPr>
+            </a:pPr>
+            <a:r>
+              <a:t>• Framework: React 18 + Vite (Sub-50ms HMR).</a:t>
+            </a:r>
+          </a:p>
+          <a:p>
+            <a:pPr>
+              <a:spcBef>
+                <a:spcPts val="300"/>
+              </a:spcBef>
+              <a:defRPr sz="1100">
+                <a:solidFill>
+                  <a:srgbClr val="334155"/>
+                </a:solidFill>
+              </a:defRPr>
+            </a:pPr>
+            <a:r>
+              <a:t>• Styling: Vanilla CSS &amp; Tailwind CSS conforming to GIGW 3.0 Government accessibility standards.</a:t>
+            </a:r>
+          </a:p>
+          <a:p>
+            <a:pPr>
+              <a:spcBef>
+                <a:spcPts val="300"/>
+              </a:spcBef>
+              <a:defRPr sz="1100">
+                <a:solidFill>
+                  <a:srgbClr val="334155"/>
+                </a:solidFill>
+              </a:defRPr>
+            </a:pPr>
+            <a:r>
+              <a:t>• GIS Mapping: Leaflet.js / React-Leaflet with custom GeoJSON cadastral polygon overlays.</a:t>
+            </a:r>
+          </a:p>
+          <a:p>
+            <a:pPr>
+              <a:spcBef>
+                <a:spcPts val="300"/>
+              </a:spcBef>
+              <a:defRPr sz="1100">
+                <a:solidFill>
+                  <a:srgbClr val="334155"/>
+                </a:solidFill>
+              </a:defRPr>
+            </a:pPr>
+            <a:r>
+              <a:t>• Accessibility: Dynamic A-/A/A+ font scaler and full English/Hindi Rajbhasha translation.</a:t>
+            </a:r>
+          </a:p>
+        </p:txBody>
+      </p:sp>
+      <p:sp>
+        <p:nvSpPr>
+          <p:cNvPr id="9" name="Rounded Rectangle 8"/>
           <p:cNvSpPr/>
           <p:nvPr/>
         </p:nvSpPr>
         <p:spPr>
           <a:xfrm>
-            <a:off x="4389120" y="1463040"/>
-            <a:ext cx="3383280" cy="1280160"/>
+            <a:off x="4443984" y="1280160"/>
+            <a:ext cx="3291840" cy="5120640"/>
           </a:xfrm>
           <a:prstGeom prst="roundRect">
             <a:avLst/>
@@ -4663,9 +7554,9 @@
           <a:solidFill>
             <a:srgbClr val="FFFFFF"/>
           </a:solidFill>
-          <a:ln>
+          <a:ln w="19050">
             <a:solidFill>
-              <a:srgbClr val="0A2558"/>
+              <a:srgbClr val="E2E8F0"/>
             </a:solidFill>
           </a:ln>
         </p:spPr>
@@ -4684,44 +7575,133 @@
           </a:fontRef>
         </p:style>
         <p:txBody>
-          <a:bodyPr rtlCol="0" anchor="ctr" wrap="square"/>
-          <a:lstStyle/>
-          <a:p>
-            <a:pPr algn="ctr">
+          <a:bodyPr rtlCol="0" anchor="ctr"/>
+          <a:lstStyle/>
+          <a:p>
+            <a:pPr algn="ctr"/>
+          </a:p>
+        </p:txBody>
+      </p:sp>
+      <p:sp>
+        <p:nvSpPr>
+          <p:cNvPr id="10" name="TextBox 9"/>
+          <p:cNvSpPr txBox="1"/>
+          <p:nvPr/>
+        </p:nvSpPr>
+        <p:spPr>
+          <a:xfrm>
+            <a:off x="4581144" y="1417319"/>
+            <a:ext cx="3017520" cy="4846320"/>
+          </a:xfrm>
+          <a:prstGeom prst="rect">
+            <a:avLst/>
+          </a:prstGeom>
+          <a:noFill/>
+        </p:spPr>
+        <p:txBody>
+          <a:bodyPr wrap="square">
+            <a:spAutoFit/>
+          </a:bodyPr>
+          <a:lstStyle/>
+          <a:p>
+            <a:pPr>
+              <a:defRPr sz="1400" b="1">
+                <a:solidFill>
+                  <a:srgbClr val="071426"/>
+                </a:solidFill>
+              </a:defRPr>
+            </a:pPr>
+            <a:r>
+              <a:t>Backend API &amp; Engine Tier</a:t>
+            </a:r>
+          </a:p>
+          <a:p>
+            <a:pPr>
+              <a:spcAft>
+                <a:spcPts val="400"/>
+              </a:spcAft>
               <a:defRPr sz="900" b="1">
                 <a:solidFill>
-                  <a:srgbClr val="EA580C"/>
-                </a:solidFill>
-              </a:defRPr>
-            </a:pPr>
-            <a:r>
-              <a:t>STAGE 02</a:t>
-            </a:r>
-          </a:p>
-          <a:p>
-            <a:pPr>
-              <a:defRPr sz="1100" b="1">
-                <a:solidFill>
-                  <a:srgbClr val="071933"/>
-                </a:solidFill>
-              </a:defRPr>
-            </a:pPr>
-            <a:r>
-              <a:t>2. Social Impact Assessment (SIA)</a:t>
-            </a:r>
-          </a:p>
-        </p:txBody>
-      </p:sp>
-      <p:sp>
-        <p:nvSpPr>
-          <p:cNvPr id="9" name="Rounded Rectangle 8"/>
+                  <a:srgbClr val="F97316"/>
+                </a:solidFill>
+              </a:defRPr>
+            </a:pPr>
+            <a:r>
+              <a:t>[APPLICATION LAYER]</a:t>
+            </a:r>
+          </a:p>
+          <a:p>
+            <a:pPr>
+              <a:spcBef>
+                <a:spcPts val="300"/>
+              </a:spcBef>
+              <a:defRPr sz="1100">
+                <a:solidFill>
+                  <a:srgbClr val="334155"/>
+                </a:solidFill>
+              </a:defRPr>
+            </a:pPr>
+            <a:r>
+              <a:t>• Server: Python FastAPI (Asynchronous, High-throughput REST API with Pydantic v2 schemas).</a:t>
+            </a:r>
+          </a:p>
+          <a:p>
+            <a:pPr>
+              <a:spcBef>
+                <a:spcPts val="300"/>
+              </a:spcBef>
+              <a:defRPr sz="1100">
+                <a:solidFill>
+                  <a:srgbClr val="334155"/>
+                </a:solidFill>
+              </a:defRPr>
+            </a:pPr>
+            <a:r>
+              <a:t>• ORM &amp; Persistence: SQLAlchemy 2.0 with PostGIS support and SQLite fallback for local testing.</a:t>
+            </a:r>
+          </a:p>
+          <a:p>
+            <a:pPr>
+              <a:spcBef>
+                <a:spcPts val="300"/>
+              </a:spcBef>
+              <a:defRPr sz="1100">
+                <a:solidFill>
+                  <a:srgbClr val="334155"/>
+                </a:solidFill>
+              </a:defRPr>
+            </a:pPr>
+            <a:r>
+              <a:t>• Statutory Engine: Pure deterministic state machine and First Schedule arithmetic evaluator.</a:t>
+            </a:r>
+          </a:p>
+          <a:p>
+            <a:pPr>
+              <a:spcBef>
+                <a:spcPts val="300"/>
+              </a:spcBef>
+              <a:defRPr sz="1100">
+                <a:solidFill>
+                  <a:srgbClr val="334155"/>
+                </a:solidFill>
+              </a:defRPr>
+            </a:pPr>
+            <a:r>
+              <a:t>• Security: Class-3 DSC digital signatures and SHA-256 integrity hashing.</a:t>
+            </a:r>
+          </a:p>
+        </p:txBody>
+      </p:sp>
+      <p:sp>
+        <p:nvSpPr>
+          <p:cNvPr id="11" name="Rounded Rectangle 10"/>
           <p:cNvSpPr/>
           <p:nvPr/>
         </p:nvSpPr>
         <p:spPr>
           <a:xfrm>
-            <a:off x="8046720" y="1463040"/>
-            <a:ext cx="3383280" cy="1280160"/>
+            <a:off x="8165592" y="1280160"/>
+            <a:ext cx="3291840" cy="5120640"/>
           </a:xfrm>
           <a:prstGeom prst="roundRect">
             <a:avLst/>
@@ -4729,9 +7709,9 @@
           <a:solidFill>
             <a:srgbClr val="FFFFFF"/>
           </a:solidFill>
-          <a:ln>
+          <a:ln w="19050">
             <a:solidFill>
-              <a:srgbClr val="EA580C"/>
+              <a:srgbClr val="E2E8F0"/>
             </a:solidFill>
           </a:ln>
         </p:spPr>
@@ -4750,426 +7730,119 @@
           </a:fontRef>
         </p:style>
         <p:txBody>
-          <a:bodyPr rtlCol="0" anchor="ctr" wrap="square"/>
-          <a:lstStyle/>
-          <a:p>
-            <a:pPr algn="ctr">
+          <a:bodyPr rtlCol="0" anchor="ctr"/>
+          <a:lstStyle/>
+          <a:p>
+            <a:pPr algn="ctr"/>
+          </a:p>
+        </p:txBody>
+      </p:sp>
+      <p:sp>
+        <p:nvSpPr>
+          <p:cNvPr id="12" name="TextBox 11"/>
+          <p:cNvSpPr txBox="1"/>
+          <p:nvPr/>
+        </p:nvSpPr>
+        <p:spPr>
+          <a:xfrm>
+            <a:off x="8302752" y="1417319"/>
+            <a:ext cx="3017520" cy="4846320"/>
+          </a:xfrm>
+          <a:prstGeom prst="rect">
+            <a:avLst/>
+          </a:prstGeom>
+          <a:noFill/>
+        </p:spPr>
+        <p:txBody>
+          <a:bodyPr wrap="square">
+            <a:spAutoFit/>
+          </a:bodyPr>
+          <a:lstStyle/>
+          <a:p>
+            <a:pPr>
+              <a:defRPr sz="1400" b="1">
+                <a:solidFill>
+                  <a:srgbClr val="071426"/>
+                </a:solidFill>
+              </a:defRPr>
+            </a:pPr>
+            <a:r>
+              <a:t>AI &amp; Geospatial Intelligence</a:t>
+            </a:r>
+          </a:p>
+          <a:p>
+            <a:pPr>
+              <a:spcAft>
+                <a:spcPts val="400"/>
+              </a:spcAft>
               <a:defRPr sz="900" b="1">
                 <a:solidFill>
-                  <a:srgbClr val="EA580C"/>
-                </a:solidFill>
-              </a:defRPr>
-            </a:pPr>
-            <a:r>
-              <a:t>STAGE 03</a:t>
-            </a:r>
-          </a:p>
-          <a:p>
-            <a:pPr>
-              <a:defRPr sz="1100" b="1">
-                <a:solidFill>
-                  <a:srgbClr val="071933"/>
-                </a:solidFill>
-              </a:defRPr>
-            </a:pPr>
-            <a:r>
-              <a:t>3. Preliminary Gazette &amp; ULPIN Lock (Sec 11)</a:t>
-            </a:r>
-          </a:p>
-        </p:txBody>
-      </p:sp>
-      <p:sp>
-        <p:nvSpPr>
-          <p:cNvPr id="10" name="Rounded Rectangle 9"/>
-          <p:cNvSpPr/>
-          <p:nvPr/>
-        </p:nvSpPr>
-        <p:spPr>
-          <a:xfrm>
-            <a:off x="731520" y="3017520"/>
-            <a:ext cx="3383280" cy="1280160"/>
-          </a:xfrm>
-          <a:prstGeom prst="roundRect">
-            <a:avLst/>
-          </a:prstGeom>
-          <a:solidFill>
-            <a:srgbClr val="FFFFFF"/>
-          </a:solidFill>
-          <a:ln>
-            <a:solidFill>
-              <a:srgbClr val="0A2558"/>
-            </a:solidFill>
-          </a:ln>
-        </p:spPr>
-        <p:style>
-          <a:lnRef idx="1">
-            <a:schemeClr val="accent1"/>
-          </a:lnRef>
-          <a:fillRef idx="3">
-            <a:schemeClr val="accent1"/>
-          </a:fillRef>
-          <a:effectRef idx="2">
-            <a:schemeClr val="accent1"/>
-          </a:effectRef>
-          <a:fontRef idx="minor">
-            <a:schemeClr val="lt1"/>
-          </a:fontRef>
-        </p:style>
-        <p:txBody>
-          <a:bodyPr rtlCol="0" anchor="ctr" wrap="square"/>
-          <a:lstStyle/>
-          <a:p>
-            <a:pPr algn="ctr">
-              <a:defRPr sz="900" b="1">
-                <a:solidFill>
-                  <a:srgbClr val="EA580C"/>
-                </a:solidFill>
-              </a:defRPr>
-            </a:pPr>
-            <a:r>
-              <a:t>STAGE 04</a:t>
-            </a:r>
-          </a:p>
-          <a:p>
-            <a:pPr>
-              <a:defRPr sz="1100" b="1">
-                <a:solidFill>
-                  <a:srgbClr val="071933"/>
-                </a:solidFill>
-              </a:defRPr>
-            </a:pPr>
-            <a:r>
-              <a:t>4. Objection Management &amp; Inquiry (Sec 15)</a:t>
-            </a:r>
-          </a:p>
-        </p:txBody>
-      </p:sp>
-      <p:sp>
-        <p:nvSpPr>
-          <p:cNvPr id="11" name="Rounded Rectangle 10"/>
-          <p:cNvSpPr/>
-          <p:nvPr/>
-        </p:nvSpPr>
-        <p:spPr>
-          <a:xfrm>
-            <a:off x="4389120" y="3017520"/>
-            <a:ext cx="3383280" cy="1280160"/>
-          </a:xfrm>
-          <a:prstGeom prst="roundRect">
-            <a:avLst/>
-          </a:prstGeom>
-          <a:solidFill>
-            <a:srgbClr val="FFFFFF"/>
-          </a:solidFill>
-          <a:ln>
-            <a:solidFill>
-              <a:srgbClr val="0A2558"/>
-            </a:solidFill>
-          </a:ln>
-        </p:spPr>
-        <p:style>
-          <a:lnRef idx="1">
-            <a:schemeClr val="accent1"/>
-          </a:lnRef>
-          <a:fillRef idx="3">
-            <a:schemeClr val="accent1"/>
-          </a:fillRef>
-          <a:effectRef idx="2">
-            <a:schemeClr val="accent1"/>
-          </a:effectRef>
-          <a:fontRef idx="minor">
-            <a:schemeClr val="lt1"/>
-          </a:fontRef>
-        </p:style>
-        <p:txBody>
-          <a:bodyPr rtlCol="0" anchor="ctr" wrap="square"/>
-          <a:lstStyle/>
-          <a:p>
-            <a:pPr algn="ctr">
-              <a:defRPr sz="900" b="1">
-                <a:solidFill>
-                  <a:srgbClr val="EA580C"/>
-                </a:solidFill>
-              </a:defRPr>
-            </a:pPr>
-            <a:r>
-              <a:t>STAGE 05</a:t>
-            </a:r>
-          </a:p>
-          <a:p>
-            <a:pPr>
-              <a:defRPr sz="1100" b="1">
-                <a:solidFill>
-                  <a:srgbClr val="071933"/>
-                </a:solidFill>
-              </a:defRPr>
-            </a:pPr>
-            <a:r>
-              <a:t>5. Final Declaration of Acquisition (Sec 19)</a:t>
-            </a:r>
-          </a:p>
-        </p:txBody>
-      </p:sp>
-      <p:sp>
-        <p:nvSpPr>
-          <p:cNvPr id="12" name="Rounded Rectangle 11"/>
-          <p:cNvSpPr/>
-          <p:nvPr/>
-        </p:nvSpPr>
-        <p:spPr>
-          <a:xfrm>
-            <a:off x="8046720" y="3017520"/>
-            <a:ext cx="3383280" cy="1280160"/>
-          </a:xfrm>
-          <a:prstGeom prst="roundRect">
-            <a:avLst/>
-          </a:prstGeom>
-          <a:solidFill>
-            <a:srgbClr val="FFFFFF"/>
-          </a:solidFill>
-          <a:ln>
-            <a:solidFill>
-              <a:srgbClr val="EA580C"/>
-            </a:solidFill>
-          </a:ln>
-        </p:spPr>
-        <p:style>
-          <a:lnRef idx="1">
-            <a:schemeClr val="accent1"/>
-          </a:lnRef>
-          <a:fillRef idx="3">
-            <a:schemeClr val="accent1"/>
-          </a:fillRef>
-          <a:effectRef idx="2">
-            <a:schemeClr val="accent1"/>
-          </a:effectRef>
-          <a:fontRef idx="minor">
-            <a:schemeClr val="lt1"/>
-          </a:fontRef>
-        </p:style>
-        <p:txBody>
-          <a:bodyPr rtlCol="0" anchor="ctr" wrap="square"/>
-          <a:lstStyle/>
-          <a:p>
-            <a:pPr algn="ctr">
-              <a:defRPr sz="900" b="1">
-                <a:solidFill>
-                  <a:srgbClr val="EA580C"/>
-                </a:solidFill>
-              </a:defRPr>
-            </a:pPr>
-            <a:r>
-              <a:t>STAGE 06</a:t>
-            </a:r>
-          </a:p>
-          <a:p>
-            <a:pPr>
-              <a:defRPr sz="1100" b="1">
-                <a:solidFill>
-                  <a:srgbClr val="071933"/>
-                </a:solidFill>
-              </a:defRPr>
-            </a:pPr>
-            <a:r>
-              <a:t>6. First Schedule Award &amp; PFMS DBT (Sec 23)</a:t>
-            </a:r>
-          </a:p>
-        </p:txBody>
-      </p:sp>
-      <p:sp>
-        <p:nvSpPr>
-          <p:cNvPr id="13" name="Rounded Rectangle 12"/>
-          <p:cNvSpPr/>
-          <p:nvPr/>
-        </p:nvSpPr>
-        <p:spPr>
-          <a:xfrm>
-            <a:off x="731520" y="4572000"/>
-            <a:ext cx="3383280" cy="1280160"/>
-          </a:xfrm>
-          <a:prstGeom prst="roundRect">
-            <a:avLst/>
-          </a:prstGeom>
-          <a:solidFill>
-            <a:srgbClr val="FFFFFF"/>
-          </a:solidFill>
-          <a:ln>
-            <a:solidFill>
-              <a:srgbClr val="0A2558"/>
-            </a:solidFill>
-          </a:ln>
-        </p:spPr>
-        <p:style>
-          <a:lnRef idx="1">
-            <a:schemeClr val="accent1"/>
-          </a:lnRef>
-          <a:fillRef idx="3">
-            <a:schemeClr val="accent1"/>
-          </a:fillRef>
-          <a:effectRef idx="2">
-            <a:schemeClr val="accent1"/>
-          </a:effectRef>
-          <a:fontRef idx="minor">
-            <a:schemeClr val="lt1"/>
-          </a:fontRef>
-        </p:style>
-        <p:txBody>
-          <a:bodyPr rtlCol="0" anchor="ctr" wrap="square"/>
-          <a:lstStyle/>
-          <a:p>
-            <a:pPr algn="ctr">
-              <a:defRPr sz="900" b="1">
-                <a:solidFill>
-                  <a:srgbClr val="EA580C"/>
-                </a:solidFill>
-              </a:defRPr>
-            </a:pPr>
-            <a:r>
-              <a:t>STAGE 07</a:t>
-            </a:r>
-          </a:p>
-          <a:p>
-            <a:pPr>
-              <a:defRPr sz="1100" b="1">
-                <a:solidFill>
-                  <a:srgbClr val="071933"/>
-                </a:solidFill>
-              </a:defRPr>
-            </a:pPr>
-            <a:r>
-              <a:t>7. R&amp;R Schedules II &amp; III Execution</a:t>
-            </a:r>
-          </a:p>
-        </p:txBody>
-      </p:sp>
-      <p:sp>
-        <p:nvSpPr>
-          <p:cNvPr id="14" name="Rounded Rectangle 13"/>
-          <p:cNvSpPr/>
-          <p:nvPr/>
-        </p:nvSpPr>
-        <p:spPr>
-          <a:xfrm>
-            <a:off x="4389120" y="4572000"/>
-            <a:ext cx="3383280" cy="1280160"/>
-          </a:xfrm>
-          <a:prstGeom prst="roundRect">
-            <a:avLst/>
-          </a:prstGeom>
-          <a:solidFill>
-            <a:srgbClr val="FFFFFF"/>
-          </a:solidFill>
-          <a:ln>
-            <a:solidFill>
-              <a:srgbClr val="EA580C"/>
-            </a:solidFill>
-          </a:ln>
-        </p:spPr>
-        <p:style>
-          <a:lnRef idx="1">
-            <a:schemeClr val="accent1"/>
-          </a:lnRef>
-          <a:fillRef idx="3">
-            <a:schemeClr val="accent1"/>
-          </a:fillRef>
-          <a:effectRef idx="2">
-            <a:schemeClr val="accent1"/>
-          </a:effectRef>
-          <a:fontRef idx="minor">
-            <a:schemeClr val="lt1"/>
-          </a:fontRef>
-        </p:style>
-        <p:txBody>
-          <a:bodyPr rtlCol="0" anchor="ctr" wrap="square"/>
-          <a:lstStyle/>
-          <a:p>
-            <a:pPr algn="ctr">
-              <a:defRPr sz="900" b="1">
-                <a:solidFill>
-                  <a:srgbClr val="EA580C"/>
-                </a:solidFill>
-              </a:defRPr>
-            </a:pPr>
-            <a:r>
-              <a:t>STAGE 08</a:t>
-            </a:r>
-          </a:p>
-          <a:p>
-            <a:pPr>
-              <a:defRPr sz="1100" b="1">
-                <a:solidFill>
-                  <a:srgbClr val="071933"/>
-                </a:solidFill>
-              </a:defRPr>
-            </a:pPr>
-            <a:r>
-              <a:t>8. Physical Possession &amp; RoR Mutation (Sec 38)</a:t>
-            </a:r>
-          </a:p>
-        </p:txBody>
-      </p:sp>
-      <p:sp>
-        <p:nvSpPr>
-          <p:cNvPr id="15" name="Rounded Rectangle 14"/>
-          <p:cNvSpPr/>
-          <p:nvPr/>
-        </p:nvSpPr>
-        <p:spPr>
-          <a:xfrm>
-            <a:off x="8046720" y="4572000"/>
-            <a:ext cx="3383280" cy="1280160"/>
-          </a:xfrm>
-          <a:prstGeom prst="roundRect">
-            <a:avLst/>
-          </a:prstGeom>
-          <a:solidFill>
-            <a:srgbClr val="FFFFFF"/>
-          </a:solidFill>
-          <a:ln>
-            <a:solidFill>
-              <a:srgbClr val="0A2558"/>
-            </a:solidFill>
-          </a:ln>
-        </p:spPr>
-        <p:style>
-          <a:lnRef idx="1">
-            <a:schemeClr val="accent1"/>
-          </a:lnRef>
-          <a:fillRef idx="3">
-            <a:schemeClr val="accent1"/>
-          </a:fillRef>
-          <a:effectRef idx="2">
-            <a:schemeClr val="accent1"/>
-          </a:effectRef>
-          <a:fontRef idx="minor">
-            <a:schemeClr val="lt1"/>
-          </a:fontRef>
-        </p:style>
-        <p:txBody>
-          <a:bodyPr rtlCol="0" anchor="ctr" wrap="square"/>
-          <a:lstStyle/>
-          <a:p>
-            <a:pPr algn="ctr">
-              <a:defRPr sz="900" b="1">
-                <a:solidFill>
-                  <a:srgbClr val="EA580C"/>
-                </a:solidFill>
-              </a:defRPr>
-            </a:pPr>
-            <a:r>
-              <a:t>STAGE 09</a:t>
-            </a:r>
-          </a:p>
-          <a:p>
-            <a:pPr>
-              <a:defRPr sz="1100" b="1">
-                <a:solidFill>
-                  <a:srgbClr val="071933"/>
-                </a:solidFill>
-              </a:defRPr>
-            </a:pPr>
-            <a:r>
-              <a:t>9. Dispute Reference Sync with e-Courts</a:t>
+                  <a:srgbClr val="F97316"/>
+                </a:solidFill>
+              </a:defRPr>
+            </a:pPr>
+            <a:r>
+              <a:t>[INTELLIGENCE LAYER]</a:t>
+            </a:r>
+          </a:p>
+          <a:p>
+            <a:pPr>
+              <a:spcBef>
+                <a:spcPts val="300"/>
+              </a:spcBef>
+              <a:defRPr sz="1100">
+                <a:solidFill>
+                  <a:srgbClr val="334155"/>
+                </a:solidFill>
+              </a:defRPr>
+            </a:pPr>
+            <a:r>
+              <a:t>• Machine Learning: Scikit-learn Random Forest Regressor &amp; Classifier trained on corridor delay patterns.</a:t>
+            </a:r>
+          </a:p>
+          <a:p>
+            <a:pPr>
+              <a:spcBef>
+                <a:spcPts val="300"/>
+              </a:spcBef>
+              <a:defRPr sz="1100">
+                <a:solidFill>
+                  <a:srgbClr val="334155"/>
+                </a:solidFill>
+              </a:defRPr>
+            </a:pPr>
+            <a:r>
+              <a:t>• Delay Predictor: Multi-variable forecasting (Acreage, disputes, multiplier, forest overlap).</a:t>
+            </a:r>
+          </a:p>
+          <a:p>
+            <a:pPr>
+              <a:spcBef>
+                <a:spcPts val="300"/>
+              </a:spcBef>
+              <a:defRPr sz="1100">
+                <a:solidFill>
+                  <a:srgbClr val="334155"/>
+                </a:solidFill>
+              </a:defRPr>
+            </a:pPr>
+            <a:r>
+              <a:t>• Spatial Fusion: PM GatiShakti NMP DPR alignment intersection with Survey of India ORI layers.</a:t>
+            </a:r>
+          </a:p>
+          <a:p>
+            <a:pPr>
+              <a:spcBef>
+                <a:spcPts val="300"/>
+              </a:spcBef>
+              <a:defRPr sz="1100">
+                <a:solidFill>
+                  <a:srgbClr val="334155"/>
+                </a:solidFill>
+              </a:defRPr>
+            </a:pPr>
+            <a:r>
+              <a:t>• Banking: PFMS APBS direct DBT generator.</a:t>
             </a:r>
           </a:p>
         </p:txBody>
@@ -5207,11 +7880,11 @@
             <a:avLst/>
           </a:prstGeom>
           <a:solidFill>
-            <a:srgbClr val="071933"/>
+            <a:srgbClr val="071426"/>
           </a:solidFill>
           <a:ln>
             <a:solidFill>
-              <a:srgbClr val="071933"/>
+              <a:srgbClr val="071426"/>
             </a:solidFill>
           </a:ln>
         </p:spPr>
@@ -5252,11 +7925,11 @@
             <a:avLst/>
           </a:prstGeom>
           <a:solidFill>
-            <a:srgbClr val="EA580C"/>
+            <a:srgbClr val="F97316"/>
           </a:solidFill>
           <a:ln>
             <a:solidFill>
-              <a:srgbClr val="EA580C"/>
+              <a:srgbClr val="F97316"/>
             </a:solidFill>
           </a:ln>
         </p:spPr>
@@ -5342,11 +8015,11 @@
             <a:avLst/>
           </a:prstGeom>
           <a:solidFill>
-            <a:srgbClr val="0A7B3E"/>
+            <a:srgbClr val="059669"/>
           </a:solidFill>
           <a:ln>
             <a:solidFill>
-              <a:srgbClr val="0A7B3E"/>
+              <a:srgbClr val="059669"/>
             </a:solidFill>
           </a:ln>
         </p:spPr>
@@ -5381,7 +8054,7 @@
         <p:spPr>
           <a:xfrm>
             <a:off x="731520" y="109728"/>
-            <a:ext cx="10698480" cy="822960"/>
+            <a:ext cx="10725912" cy="868680"/>
           </a:xfrm>
           <a:prstGeom prst="rect">
             <a:avLst/>
@@ -5402,7 +8075,7 @@
               </a:defRPr>
             </a:pPr>
             <a:r>
-              <a:t>MATHEMATICAL FORMULATION</a:t>
+              <a:t>SIH26016 • TEAM APEX • MINISTRY OF RURAL DEVELOPMENT (DOLR)</a:t>
             </a:r>
           </a:p>
           <a:p>
@@ -5414,7 +8087,7 @@
               </a:defRPr>
             </a:pPr>
             <a:r>
-              <a:t>First Schedule Algorithmic Compensation Engine</a:t>
+              <a:t>Modules 1 &amp; 2: Executive Dashboard &amp; GIS Cadastral Fusion</a:t>
             </a:r>
           </a:p>
         </p:txBody>
@@ -5427,8 +8100,8 @@
         </p:nvSpPr>
         <p:spPr>
           <a:xfrm>
-            <a:off x="731520" y="1463040"/>
-            <a:ext cx="10725912" cy="4480560"/>
+            <a:off x="731520" y="1280160"/>
+            <a:ext cx="5120640" cy="5120640"/>
           </a:xfrm>
           <a:prstGeom prst="roundRect">
             <a:avLst/>
@@ -5436,9 +8109,9 @@
           <a:solidFill>
             <a:srgbClr val="FFFFFF"/>
           </a:solidFill>
-          <a:ln w="25400">
+          <a:ln w="19050">
             <a:solidFill>
-              <a:srgbClr val="0A7B3E"/>
+              <a:srgbClr val="E2E8F0"/>
             </a:solidFill>
           </a:ln>
         </p:spPr>
@@ -5457,123 +8130,319 @@
           </a:fontRef>
         </p:style>
         <p:txBody>
-          <a:bodyPr rtlCol="0" anchor="ctr" wrap="square"/>
-          <a:lstStyle/>
-          <a:p>
-            <a:pPr algn="ctr">
-              <a:defRPr sz="1200" b="1">
-                <a:solidFill>
-                  <a:srgbClr val="0A7B3E"/>
-                </a:solidFill>
-              </a:defRPr>
-            </a:pPr>
-            <a:r>
-              <a:t>STATUTORY MATHEMATICAL FORMULA (RFCTLARR ACT 2013 SEC 26-30):</a:t>
-            </a:r>
-          </a:p>
-          <a:p>
-            <a:pPr>
-              <a:spcBef>
-                <a:spcPts val="800"/>
-              </a:spcBef>
-              <a:defRPr sz="1600" b="1">
-                <a:solidFill>
-                  <a:srgbClr val="071933"/>
-                </a:solidFill>
-              </a:defRPr>
-            </a:pPr>
-            <a:r>
-              <a:t>Gross Total Award = Base Compensation (C_Base) + 100% Solatium + 12% p.a. Additional Amount</a:t>
-            </a:r>
-          </a:p>
-          <a:p>
-            <a:pPr>
-              <a:spcBef>
+          <a:bodyPr rtlCol="0" anchor="ctr"/>
+          <a:lstStyle/>
+          <a:p>
+            <a:pPr algn="ctr"/>
+          </a:p>
+        </p:txBody>
+      </p:sp>
+      <p:sp>
+        <p:nvSpPr>
+          <p:cNvPr id="8" name="TextBox 7"/>
+          <p:cNvSpPr txBox="1"/>
+          <p:nvPr/>
+        </p:nvSpPr>
+        <p:spPr>
+          <a:xfrm>
+            <a:off x="868680" y="1417319"/>
+            <a:ext cx="4846320" cy="4846320"/>
+          </a:xfrm>
+          <a:prstGeom prst="rect">
+            <a:avLst/>
+          </a:prstGeom>
+          <a:noFill/>
+        </p:spPr>
+        <p:txBody>
+          <a:bodyPr wrap="square">
+            <a:spAutoFit/>
+          </a:bodyPr>
+          <a:lstStyle/>
+          <a:p>
+            <a:pPr>
+              <a:defRPr sz="1400" b="1">
+                <a:solidFill>
+                  <a:srgbClr val="071426"/>
+                </a:solidFill>
+              </a:defRPr>
+            </a:pPr>
+            <a:r>
+              <a:t>Module 1: Officer Command Console</a:t>
+            </a:r>
+          </a:p>
+          <a:p>
+            <a:pPr>
+              <a:spcAft>
                 <a:spcPts val="400"/>
-              </a:spcBef>
-              <a:defRPr sz="1150">
-                <a:solidFill>
-                  <a:srgbClr val="64748B"/>
-                </a:solidFill>
-              </a:defRPr>
-            </a:pPr>
-            <a:r>
-              <a:t>• 1. Base Unit Market Value (Sec 26): Max(Stamp Act Circle Rate, Top 50% 3-Year Registered Sale Deeds, Consented PPP Rate)</a:t>
-            </a:r>
-          </a:p>
-          <a:p>
-            <a:pPr>
-              <a:spcBef>
+              </a:spcAft>
+              <a:defRPr sz="900" b="1">
+                <a:solidFill>
+                  <a:srgbClr val="F97316"/>
+                </a:solidFill>
+              </a:defRPr>
+            </a:pPr>
+            <a:r>
+              <a:t>[EXECUTIVE GOVERNANCE]</a:t>
+            </a:r>
+          </a:p>
+          <a:p>
+            <a:pPr>
+              <a:spcBef>
+                <a:spcPts val="300"/>
+              </a:spcBef>
+              <a:defRPr sz="1100">
+                <a:solidFill>
+                  <a:srgbClr val="334155"/>
+                </a:solidFill>
+              </a:defRPr>
+            </a:pPr>
+            <a:r>
+              <a:t>• Real-Time National KPIs: Aggregates active corridors, notified hectares, PFMS DBT disbursals, and possession rates.</a:t>
+            </a:r>
+          </a:p>
+          <a:p>
+            <a:pPr>
+              <a:spcBef>
+                <a:spcPts val="300"/>
+              </a:spcBef>
+              <a:defRPr sz="1100">
+                <a:solidFill>
+                  <a:srgbClr val="334155"/>
+                </a:solidFill>
+              </a:defRPr>
+            </a:pPr>
+            <a:r>
+              <a:t>• Multi-Agency Tracking: Unified visibility across NHAI, DFCCIL, MSRDC, and KRDCL projects.</a:t>
+            </a:r>
+          </a:p>
+          <a:p>
+            <a:pPr>
+              <a:spcBef>
+                <a:spcPts val="300"/>
+              </a:spcBef>
+              <a:defRPr sz="1100">
+                <a:solidFill>
+                  <a:srgbClr val="334155"/>
+                </a:solidFill>
+              </a:defRPr>
+            </a:pPr>
+            <a:r>
+              <a:t>• Statutory Ticker: Live feed tracking gazette notifications and encumbrance locks across districts.</a:t>
+            </a:r>
+          </a:p>
+          <a:p>
+            <a:pPr>
+              <a:spcBef>
+                <a:spcPts val="300"/>
+              </a:spcBef>
+              <a:defRPr sz="1100">
+                <a:solidFill>
+                  <a:srgbClr val="334155"/>
+                </a:solidFill>
+              </a:defRPr>
+            </a:pPr>
+            <a:r>
+              <a:t>• Executive Filter: Instant corridor switching between Varanasi, Nagpur, Bengaluru Rural, and Ludhiana.</a:t>
+            </a:r>
+          </a:p>
+        </p:txBody>
+      </p:sp>
+      <p:sp>
+        <p:nvSpPr>
+          <p:cNvPr id="9" name="Rounded Rectangle 8"/>
+          <p:cNvSpPr/>
+          <p:nvPr/>
+        </p:nvSpPr>
+        <p:spPr>
+          <a:xfrm>
+            <a:off x="6309360" y="1280160"/>
+            <a:ext cx="5120640" cy="5120640"/>
+          </a:xfrm>
+          <a:prstGeom prst="roundRect">
+            <a:avLst/>
+          </a:prstGeom>
+          <a:solidFill>
+            <a:srgbClr val="FFFFFF"/>
+          </a:solidFill>
+          <a:ln w="19050">
+            <a:solidFill>
+              <a:srgbClr val="E2E8F0"/>
+            </a:solidFill>
+          </a:ln>
+        </p:spPr>
+        <p:style>
+          <a:lnRef idx="1">
+            <a:schemeClr val="accent1"/>
+          </a:lnRef>
+          <a:fillRef idx="3">
+            <a:schemeClr val="accent1"/>
+          </a:fillRef>
+          <a:effectRef idx="2">
+            <a:schemeClr val="accent1"/>
+          </a:effectRef>
+          <a:fontRef idx="minor">
+            <a:schemeClr val="lt1"/>
+          </a:fontRef>
+        </p:style>
+        <p:txBody>
+          <a:bodyPr rtlCol="0" anchor="ctr"/>
+          <a:lstStyle/>
+          <a:p>
+            <a:pPr algn="ctr"/>
+          </a:p>
+        </p:txBody>
+      </p:sp>
+      <p:sp>
+        <p:nvSpPr>
+          <p:cNvPr id="10" name="TextBox 9"/>
+          <p:cNvSpPr txBox="1"/>
+          <p:nvPr/>
+        </p:nvSpPr>
+        <p:spPr>
+          <a:xfrm>
+            <a:off x="6446520" y="1417319"/>
+            <a:ext cx="4846320" cy="4846320"/>
+          </a:xfrm>
+          <a:prstGeom prst="rect">
+            <a:avLst/>
+          </a:prstGeom>
+          <a:noFill/>
+        </p:spPr>
+        <p:txBody>
+          <a:bodyPr wrap="square">
+            <a:spAutoFit/>
+          </a:bodyPr>
+          <a:lstStyle/>
+          <a:p>
+            <a:pPr>
+              <a:defRPr sz="1400" b="1">
+                <a:solidFill>
+                  <a:srgbClr val="071426"/>
+                </a:solidFill>
+              </a:defRPr>
+            </a:pPr>
+            <a:r>
+              <a:t>Module 2: GIS Parcel Cadastral Map</a:t>
+            </a:r>
+          </a:p>
+          <a:p>
+            <a:pPr>
+              <a:spcAft>
                 <a:spcPts val="400"/>
-              </a:spcBef>
-              <a:defRPr sz="1150">
-                <a:solidFill>
-                  <a:srgbClr val="64748B"/>
-                </a:solidFill>
-              </a:defRPr>
-            </a:pPr>
-            <a:r>
-              <a:t>• 2. Multiplication Factor (Sec 26(2)): Urban = 1.0x | Rural 0-10 km = 1.25x | Rural 10-20 km = 1.50x | Rural &gt;20 km = 2.00x</a:t>
-            </a:r>
-          </a:p>
-          <a:p>
-            <a:pPr>
-              <a:spcBef>
-                <a:spcPts val="400"/>
-              </a:spcBef>
-              <a:defRPr sz="1150">
-                <a:solidFill>
-                  <a:srgbClr val="64748B"/>
-                </a:solidFill>
-              </a:defRPr>
-            </a:pPr>
-            <a:r>
-              <a:t>• 3. Attached Assets (Sec 29): Structural Valuation + Standing Timber/Trees + Crop Yield Valuation</a:t>
-            </a:r>
-          </a:p>
-          <a:p>
-            <a:pPr>
-              <a:spcBef>
-                <a:spcPts val="400"/>
-              </a:spcBef>
-              <a:defRPr sz="1150">
-                <a:solidFill>
-                  <a:srgbClr val="64748B"/>
-                </a:solidFill>
-              </a:defRPr>
-            </a:pPr>
-            <a:r>
-              <a:t>• 4. Base Compensation (C_Base): (Base Unit Market Value × Area × Multiplication Factor) + Assets Valuation</a:t>
-            </a:r>
-          </a:p>
-          <a:p>
-            <a:pPr>
-              <a:spcBef>
-                <a:spcPts val="400"/>
-              </a:spcBef>
-              <a:defRPr sz="1150">
-                <a:solidFill>
-                  <a:srgbClr val="64748B"/>
-                </a:solidFill>
-              </a:defRPr>
-            </a:pPr>
-            <a:r>
-              <a:t>• 5. Mandatory Solatium (Sec 30(1)): 100% of Base Compensation (C_Base)</a:t>
-            </a:r>
-          </a:p>
-          <a:p>
-            <a:pPr>
-              <a:spcBef>
-                <a:spcPts val="400"/>
-              </a:spcBef>
-              <a:defRPr sz="1150">
-                <a:solidFill>
-                  <a:srgbClr val="64748B"/>
-                </a:solidFill>
-              </a:defRPr>
-            </a:pPr>
-            <a:r>
-              <a:t>• 6. Additional Amount (Sec 30(3)): 12% per annum on Base Market Value from Sec 11 Notification Date to Award Date</a:t>
+              </a:spcAft>
+              <a:defRPr sz="900" b="1">
+                <a:solidFill>
+                  <a:srgbClr val="F97316"/>
+                </a:solidFill>
+              </a:defRPr>
+            </a:pPr>
+            <a:r>
+              <a:t>[SPATIAL CADASTRE]</a:t>
+            </a:r>
+          </a:p>
+          <a:p>
+            <a:pPr>
+              <a:spcBef>
+                <a:spcPts val="300"/>
+              </a:spcBef>
+              <a:defRPr sz="1100">
+                <a:solidFill>
+                  <a:srgbClr val="334155"/>
+                </a:solidFill>
+              </a:defRPr>
+            </a:pPr>
+            <a:r>
+              <a:t>• Right-of-Way Vector Alignment: Linear corridor polylines overlaying cadastral village survey polygons.</a:t>
+            </a:r>
+          </a:p>
+          <a:p>
+            <a:pPr>
+              <a:spcBef>
+                <a:spcPts val="300"/>
+              </a:spcBef>
+              <a:defRPr sz="1100">
+                <a:solidFill>
+                  <a:srgbClr val="334155"/>
+                </a:solidFill>
+              </a:defRPr>
+            </a:pPr>
+            <a:r>
+              <a:t>• Statutory Color Coding:</a:t>
+            </a:r>
+          </a:p>
+          <a:p>
+            <a:pPr>
+              <a:spcBef>
+                <a:spcPts val="300"/>
+              </a:spcBef>
+              <a:defRPr sz="1100">
+                <a:solidFill>
+                  <a:srgbClr val="334155"/>
+                </a:solidFill>
+              </a:defRPr>
+            </a:pPr>
+            <a:r>
+              <a:t>•   - Blue: Proposed / Under SIA</a:t>
+            </a:r>
+          </a:p>
+          <a:p>
+            <a:pPr>
+              <a:spcBef>
+                <a:spcPts val="300"/>
+              </a:spcBef>
+              <a:defRPr sz="1100">
+                <a:solidFill>
+                  <a:srgbClr val="334155"/>
+                </a:solidFill>
+              </a:defRPr>
+            </a:pPr>
+            <a:r>
+              <a:t>•   - Yellow: Section 11 Notified (Encumbrance Locked)</a:t>
+            </a:r>
+          </a:p>
+          <a:p>
+            <a:pPr>
+              <a:spcBef>
+                <a:spcPts val="300"/>
+              </a:spcBef>
+              <a:defRPr sz="1100">
+                <a:solidFill>
+                  <a:srgbClr val="334155"/>
+                </a:solidFill>
+              </a:defRPr>
+            </a:pPr>
+            <a:r>
+              <a:t>•   - Red: Section 15 Disputed</a:t>
+            </a:r>
+          </a:p>
+          <a:p>
+            <a:pPr>
+              <a:spcBef>
+                <a:spcPts val="300"/>
+              </a:spcBef>
+              <a:defRPr sz="1100">
+                <a:solidFill>
+                  <a:srgbClr val="334155"/>
+                </a:solidFill>
+              </a:defRPr>
+            </a:pPr>
+            <a:r>
+              <a:t>•   - Green: Acquired &amp; Mutated in RoR</a:t>
+            </a:r>
+          </a:p>
+          <a:p>
+            <a:pPr>
+              <a:spcBef>
+                <a:spcPts val="300"/>
+              </a:spcBef>
+              <a:defRPr sz="1100">
+                <a:solidFill>
+                  <a:srgbClr val="334155"/>
+                </a:solidFill>
+              </a:defRPr>
+            </a:pPr>
+            <a:r>
+              <a:t>• Parcel Inspector Drawer: Single-click inspection of 14-digit ULPIN, owner name, Khasra, and award slip.</a:t>
             </a:r>
           </a:p>
         </p:txBody>
@@ -5611,11 +8480,11 @@
             <a:avLst/>
           </a:prstGeom>
           <a:solidFill>
-            <a:srgbClr val="071933"/>
+            <a:srgbClr val="071426"/>
           </a:solidFill>
           <a:ln>
             <a:solidFill>
-              <a:srgbClr val="071933"/>
+              <a:srgbClr val="071426"/>
             </a:solidFill>
           </a:ln>
         </p:spPr>
@@ -5656,11 +8525,11 @@
             <a:avLst/>
           </a:prstGeom>
           <a:solidFill>
-            <a:srgbClr val="EA580C"/>
+            <a:srgbClr val="F97316"/>
           </a:solidFill>
           <a:ln>
             <a:solidFill>
-              <a:srgbClr val="EA580C"/>
+              <a:srgbClr val="F97316"/>
             </a:solidFill>
           </a:ln>
         </p:spPr>
@@ -5746,11 +8615,11 @@
             <a:avLst/>
           </a:prstGeom>
           <a:solidFill>
-            <a:srgbClr val="0A7B3E"/>
+            <a:srgbClr val="059669"/>
           </a:solidFill>
           <a:ln>
             <a:solidFill>
-              <a:srgbClr val="0A7B3E"/>
+              <a:srgbClr val="059669"/>
             </a:solidFill>
           </a:ln>
         </p:spPr>
@@ -5785,7 +8654,7 @@
         <p:spPr>
           <a:xfrm>
             <a:off x="731520" y="109728"/>
-            <a:ext cx="10698480" cy="822960"/>
+            <a:ext cx="10725912" cy="868680"/>
           </a:xfrm>
           <a:prstGeom prst="rect">
             <a:avLst/>
@@ -5806,7 +8675,7 @@
               </a:defRPr>
             </a:pPr>
             <a:r>
-              <a:t>SPATIAL FUSION</a:t>
+              <a:t>SIH26016 • TEAM APEX • MINISTRY OF RURAL DEVELOPMENT (DOLR)</a:t>
             </a:r>
           </a:p>
           <a:p>
@@ -5818,7 +8687,7 @@
               </a:defRPr>
             </a:pPr>
             <a:r>
-              <a:t>14-Digit ULPIN (Bhu-Aadhaar) &amp; State Land Record Sync</a:t>
+              <a:t>Module 3: Deterministic Statutory Workflow State Machine</a:t>
             </a:r>
           </a:p>
         </p:txBody>
@@ -5831,8 +8700,8 @@
         </p:nvSpPr>
         <p:spPr>
           <a:xfrm>
-            <a:off x="731520" y="1463040"/>
-            <a:ext cx="5212080" cy="4480560"/>
+            <a:off x="731520" y="1280160"/>
+            <a:ext cx="10725912" cy="5120640"/>
           </a:xfrm>
           <a:prstGeom prst="roundRect">
             <a:avLst/>
@@ -5840,9 +8709,9 @@
           <a:solidFill>
             <a:srgbClr val="FFFFFF"/>
           </a:solidFill>
-          <a:ln>
+          <a:ln w="19050">
             <a:solidFill>
-              <a:srgbClr val="CBD5E1"/>
+              <a:srgbClr val="E2E8F0"/>
             </a:solidFill>
           </a:ln>
         </p:spPr>
@@ -5861,207 +8730,194 @@
           </a:fontRef>
         </p:style>
         <p:txBody>
-          <a:bodyPr rtlCol="0" anchor="ctr" wrap="square"/>
-          <a:lstStyle/>
-          <a:p>
-            <a:pPr algn="ctr">
-              <a:defRPr sz="1500" b="1">
-                <a:solidFill>
-                  <a:srgbClr val="0A2558"/>
-                </a:solidFill>
-              </a:defRPr>
-            </a:pPr>
-            <a:r>
-              <a:t>ULPIN Encumbrance Locking</a:t>
-            </a:r>
-          </a:p>
-          <a:p>
-            <a:pPr>
-              <a:spcBef>
-                <a:spcPts val="600"/>
-              </a:spcBef>
-              <a:defRPr sz="1150">
-                <a:solidFill>
-                  <a:srgbClr val="64748B"/>
-                </a:solidFill>
-              </a:defRPr>
-            </a:pPr>
-            <a:r>
-              <a:t>• Automatic ULPIN Generation: 14-digit alphanumeric code generated for every surveyed cadastral parcel.</a:t>
-            </a:r>
-          </a:p>
-          <a:p>
-            <a:pPr>
-              <a:spcBef>
-                <a:spcPts val="600"/>
-              </a:spcBef>
-              <a:defRPr sz="1150">
-                <a:solidFill>
-                  <a:srgbClr val="64748B"/>
-                </a:solidFill>
-              </a:defRPr>
-            </a:pPr>
-            <a:r>
-              <a:t>• Section 11 Webhook Freezing: The moment CALA publishes preliminary notice, an API call locks the parcel in State Land Registries.</a:t>
-            </a:r>
-          </a:p>
-          <a:p>
-            <a:pPr>
-              <a:spcBef>
-                <a:spcPts val="600"/>
-              </a:spcBef>
-              <a:defRPr sz="1150">
-                <a:solidFill>
-                  <a:srgbClr val="64748B"/>
-                </a:solidFill>
-              </a:defRPr>
-            </a:pPr>
-            <a:r>
-              <a:t>• Stops Fraudulent Sales: Completely prevents distress sales or illegal constructions to claim inflated compensation.</a:t>
-            </a:r>
-          </a:p>
-          <a:p>
-            <a:pPr>
-              <a:spcBef>
-                <a:spcPts val="600"/>
-              </a:spcBef>
-              <a:defRPr sz="1150">
-                <a:solidFill>
-                  <a:srgbClr val="64748B"/>
-                </a:solidFill>
-              </a:defRPr>
-            </a:pPr>
-            <a:r>
-              <a:t>• Split Corridor Strips: Parent ULPIN subdivided into new child ULPIN for acquired Right-of-Way.</a:t>
-            </a:r>
-          </a:p>
-        </p:txBody>
-      </p:sp>
-      <p:sp>
-        <p:nvSpPr>
-          <p:cNvPr id="8" name="Rounded Rectangle 7"/>
-          <p:cNvSpPr/>
-          <p:nvPr/>
-        </p:nvSpPr>
-        <p:spPr>
-          <a:xfrm>
-            <a:off x="6217920" y="1463040"/>
-            <a:ext cx="5212080" cy="4480560"/>
-          </a:xfrm>
-          <a:prstGeom prst="roundRect">
-            <a:avLst/>
-          </a:prstGeom>
-          <a:solidFill>
-            <a:srgbClr val="FFFFFF"/>
-          </a:solidFill>
-          <a:ln>
-            <a:solidFill>
-              <a:srgbClr val="CBD5E1"/>
-            </a:solidFill>
-          </a:ln>
-        </p:spPr>
-        <p:style>
-          <a:lnRef idx="1">
-            <a:schemeClr val="accent1"/>
-          </a:lnRef>
-          <a:fillRef idx="3">
-            <a:schemeClr val="accent1"/>
-          </a:fillRef>
-          <a:effectRef idx="2">
-            <a:schemeClr val="accent1"/>
-          </a:effectRef>
-          <a:fontRef idx="minor">
-            <a:schemeClr val="lt1"/>
-          </a:fontRef>
-        </p:style>
-        <p:txBody>
-          <a:bodyPr rtlCol="0" anchor="ctr" wrap="square"/>
-          <a:lstStyle/>
-          <a:p>
-            <a:pPr algn="ctr">
-              <a:defRPr sz="1500" b="1">
-                <a:solidFill>
-                  <a:srgbClr val="0A2558"/>
-                </a:solidFill>
-              </a:defRPr>
-            </a:pPr>
-            <a:r>
-              <a:t>Pan-India Revenue Nomenclature Normalization</a:t>
-            </a:r>
-          </a:p>
-          <a:p>
-            <a:pPr>
-              <a:spcBef>
-                <a:spcPts val="600"/>
-              </a:spcBef>
-              <a:defRPr sz="1150">
-                <a:solidFill>
-                  <a:srgbClr val="64748B"/>
-                </a:solidFill>
-              </a:defRPr>
-            </a:pPr>
-            <a:r>
-              <a:t>• Uttar Pradesh / MP / Delhi: Khasra / Khatauni (Bhulekh)</a:t>
-            </a:r>
-          </a:p>
-          <a:p>
-            <a:pPr>
-              <a:spcBef>
-                <a:spcPts val="600"/>
-              </a:spcBef>
-              <a:defRPr sz="1150">
-                <a:solidFill>
-                  <a:srgbClr val="64748B"/>
-                </a:solidFill>
-              </a:defRPr>
-            </a:pPr>
-            <a:r>
-              <a:t>• Maharashtra / Gujarat: 7/12 &amp; 8A Extract (Mahabhulekh)</a:t>
-            </a:r>
-          </a:p>
-          <a:p>
-            <a:pPr>
-              <a:spcBef>
-                <a:spcPts val="600"/>
-              </a:spcBef>
-              <a:defRPr sz="1150">
-                <a:solidFill>
-                  <a:srgbClr val="64748B"/>
-                </a:solidFill>
-              </a:defRPr>
-            </a:pPr>
-            <a:r>
-              <a:t>• Karnataka: RTC (Pahani) / Bhoomi Mutation Extract</a:t>
-            </a:r>
-          </a:p>
-          <a:p>
-            <a:pPr>
-              <a:spcBef>
-                <a:spcPts val="600"/>
-              </a:spcBef>
-              <a:defRPr sz="1150">
-                <a:solidFill>
-                  <a:srgbClr val="64748B"/>
-                </a:solidFill>
-              </a:defRPr>
-            </a:pPr>
-            <a:r>
-              <a:t>• Tamil Nadu / Andhra Pradesh: Patta / Chitta (Meebhoomi)</a:t>
-            </a:r>
-          </a:p>
-          <a:p>
-            <a:pPr>
-              <a:spcBef>
-                <a:spcPts val="600"/>
-              </a:spcBef>
-              <a:defRPr sz="1150">
-                <a:solidFill>
-                  <a:srgbClr val="64748B"/>
-                </a:solidFill>
-              </a:defRPr>
-            </a:pPr>
-            <a:r>
-              <a:t>• Punjab / Haryana: Jamabandi / Khasra Girdawari (Fard)</a:t>
+          <a:bodyPr rtlCol="0" anchor="ctr"/>
+          <a:lstStyle/>
+          <a:p>
+            <a:pPr algn="ctr"/>
+          </a:p>
+        </p:txBody>
+      </p:sp>
+      <p:sp>
+        <p:nvSpPr>
+          <p:cNvPr id="8" name="TextBox 7"/>
+          <p:cNvSpPr txBox="1"/>
+          <p:nvPr/>
+        </p:nvSpPr>
+        <p:spPr>
+          <a:xfrm>
+            <a:off x="868680" y="1417319"/>
+            <a:ext cx="10451592" cy="4846320"/>
+          </a:xfrm>
+          <a:prstGeom prst="rect">
+            <a:avLst/>
+          </a:prstGeom>
+          <a:noFill/>
+        </p:spPr>
+        <p:txBody>
+          <a:bodyPr wrap="square">
+            <a:spAutoFit/>
+          </a:bodyPr>
+          <a:lstStyle/>
+          <a:p>
+            <a:pPr>
+              <a:defRPr sz="1400" b="1">
+                <a:solidFill>
+                  <a:srgbClr val="071426"/>
+                </a:solidFill>
+              </a:defRPr>
+            </a:pPr>
+            <a:r>
+              <a:t>Enforcing RFCTLARR Act 2013 &amp; Sectoral Infrastructure Acts</a:t>
+            </a:r>
+          </a:p>
+          <a:p>
+            <a:pPr>
+              <a:spcAft>
+                <a:spcPts val="400"/>
+              </a:spcAft>
+              <a:defRPr sz="900" b="1">
+                <a:solidFill>
+                  <a:srgbClr val="F97316"/>
+                </a:solidFill>
+              </a:defRPr>
+            </a:pPr>
+            <a:r>
+              <a:t>[STATUTORY STATE MACHINE]</a:t>
+            </a:r>
+          </a:p>
+          <a:p>
+            <a:pPr>
+              <a:spcBef>
+                <a:spcPts val="300"/>
+              </a:spcBef>
+              <a:defRPr sz="1100">
+                <a:solidFill>
+                  <a:srgbClr val="334155"/>
+                </a:solidFill>
+              </a:defRPr>
+            </a:pPr>
+            <a:r>
+              <a:t>• Stage 1: Proposal Ingestion &amp; Alignment Scrutiny — Spatial intersection with village survey grids.</a:t>
+            </a:r>
+          </a:p>
+          <a:p>
+            <a:pPr>
+              <a:spcBef>
+                <a:spcPts val="300"/>
+              </a:spcBef>
+              <a:defRPr sz="1100">
+                <a:solidFill>
+                  <a:srgbClr val="334155"/>
+                </a:solidFill>
+              </a:defRPr>
+            </a:pPr>
+            <a:r>
+              <a:t>• Stage 2: Social Impact Assessment (SIA) — Multi-disciplinary expert group approval and public hearing.</a:t>
+            </a:r>
+          </a:p>
+          <a:p>
+            <a:pPr>
+              <a:spcBef>
+                <a:spcPts val="300"/>
+              </a:spcBef>
+              <a:defRPr sz="1100">
+                <a:solidFill>
+                  <a:srgbClr val="334155"/>
+                </a:solidFill>
+              </a:defRPr>
+            </a:pPr>
+            <a:r>
+              <a:t>• Stage 3: Preliminary Notification &amp; Freezing (Sec 11 / 3A) — Standardized bilingual e-Gazette generation with Class-3 DSC signature; instant API encumbrance lock on all ULPINs.</a:t>
+            </a:r>
+          </a:p>
+          <a:p>
+            <a:pPr>
+              <a:spcBef>
+                <a:spcPts val="300"/>
+              </a:spcBef>
+              <a:defRPr sz="1100">
+                <a:solidFill>
+                  <a:srgbClr val="334155"/>
+                </a:solidFill>
+              </a:defRPr>
+            </a:pPr>
+            <a:r>
+              <a:t>• Stage 4: Objection Management &amp; Inquiry (Sec 15 / 3C) — 60-day quasi-judicial inquiry bench with digital hearing notices and reasoned disposal orders.</a:t>
+            </a:r>
+          </a:p>
+          <a:p>
+            <a:pPr>
+              <a:spcBef>
+                <a:spcPts val="300"/>
+              </a:spcBef>
+              <a:defRPr sz="1100">
+                <a:solidFill>
+                  <a:srgbClr val="334155"/>
+                </a:solidFill>
+              </a:defRPr>
+            </a:pPr>
+            <a:r>
+              <a:t>• Stage 5: Declaration of Acquisition (Sec 19 / 3D) — Final statutory acquisition declaration after inquiry disposal.</a:t>
+            </a:r>
+          </a:p>
+          <a:p>
+            <a:pPr>
+              <a:spcBef>
+                <a:spcPts val="300"/>
+              </a:spcBef>
+              <a:defRPr sz="1100">
+                <a:solidFill>
+                  <a:srgbClr val="334155"/>
+                </a:solidFill>
+              </a:defRPr>
+            </a:pPr>
+            <a:r>
+              <a:t>• Stage 6: Valuation, Award &amp; Compensation (Sec 23/26-30 / 3G) — First Schedule computation and individual award slips.</a:t>
+            </a:r>
+          </a:p>
+          <a:p>
+            <a:pPr>
+              <a:spcBef>
+                <a:spcPts val="300"/>
+              </a:spcBef>
+              <a:defRPr sz="1100">
+                <a:solidFill>
+                  <a:srgbClr val="334155"/>
+                </a:solidFill>
+              </a:defRPr>
+            </a:pPr>
+            <a:r>
+              <a:t>• Stage 7: Rehabilitation &amp; Resettlement (R&amp;R) — Second Schedule financial packages and Third Schedule civic amenities.</a:t>
+            </a:r>
+          </a:p>
+          <a:p>
+            <a:pPr>
+              <a:spcBef>
+                <a:spcPts val="300"/>
+              </a:spcBef>
+              <a:defRPr sz="1100">
+                <a:solidFill>
+                  <a:srgbClr val="334155"/>
+                </a:solidFill>
+              </a:defRPr>
+            </a:pPr>
+            <a:r>
+              <a:t>• Stage 8: Physical Possession &amp; Land Mutation (Sec 38 / 3E) — Webhook mutation into State RoR (Bhulekh) transferring title to President of India.</a:t>
+            </a:r>
+          </a:p>
+          <a:p>
+            <a:pPr>
+              <a:spcBef>
+                <a:spcPts val="300"/>
+              </a:spcBef>
+              <a:defRPr sz="1100">
+                <a:solidFill>
+                  <a:srgbClr val="334155"/>
+                </a:solidFill>
+              </a:defRPr>
+            </a:pPr>
+            <a:r>
+              <a:t>• Stage 9: Dispute &amp; Reference Monitoring (Sec 51-74) — Authority references and High Court appeals tracking.</a:t>
             </a:r>
           </a:p>
         </p:txBody>
@@ -6099,11 +8955,11 @@
             <a:avLst/>
           </a:prstGeom>
           <a:solidFill>
-            <a:srgbClr val="071933"/>
+            <a:srgbClr val="071426"/>
           </a:solidFill>
           <a:ln>
             <a:solidFill>
-              <a:srgbClr val="071933"/>
+              <a:srgbClr val="071426"/>
             </a:solidFill>
           </a:ln>
         </p:spPr>
@@ -6144,11 +9000,11 @@
             <a:avLst/>
           </a:prstGeom>
           <a:solidFill>
-            <a:srgbClr val="EA580C"/>
+            <a:srgbClr val="F97316"/>
           </a:solidFill>
           <a:ln>
             <a:solidFill>
-              <a:srgbClr val="EA580C"/>
+              <a:srgbClr val="F97316"/>
             </a:solidFill>
           </a:ln>
         </p:spPr>
@@ -6234,11 +9090,11 @@
             <a:avLst/>
           </a:prstGeom>
           <a:solidFill>
-            <a:srgbClr val="0A7B3E"/>
+            <a:srgbClr val="059669"/>
           </a:solidFill>
           <a:ln>
             <a:solidFill>
-              <a:srgbClr val="0A7B3E"/>
+              <a:srgbClr val="059669"/>
             </a:solidFill>
           </a:ln>
         </p:spPr>
@@ -6273,7 +9129,7 @@
         <p:spPr>
           <a:xfrm>
             <a:off x="731520" y="109728"/>
-            <a:ext cx="10698480" cy="822960"/>
+            <a:ext cx="10725912" cy="868680"/>
           </a:xfrm>
           <a:prstGeom prst="rect">
             <a:avLst/>
@@ -6294,7 +9150,7 @@
               </a:defRPr>
             </a:pPr>
             <a:r>
-              <a:t>ACCOUNTABILITY &amp; BENCHMARKING</a:t>
+              <a:t>SIH26016 • TEAM APEX • MINISTRY OF RURAL DEVELOPMENT (DOLR)</a:t>
             </a:r>
           </a:p>
           <a:p>
@@ -6306,7 +9162,7 @@
               </a:defRPr>
             </a:pPr>
             <a:r>
-              <a:t>140-Point Vikas Performance Scoring Matrix (DoLR)</a:t>
+              <a:t>Module 4: Statutory Compensation Calculation Engine</a:t>
             </a:r>
           </a:p>
         </p:txBody>
@@ -6319,8 +9175,8 @@
         </p:nvSpPr>
         <p:spPr>
           <a:xfrm>
-            <a:off x="731520" y="1463040"/>
-            <a:ext cx="2560320" cy="4389120"/>
+            <a:off x="731520" y="1280160"/>
+            <a:ext cx="5120640" cy="5120640"/>
           </a:xfrm>
           <a:prstGeom prst="roundRect">
             <a:avLst/>
@@ -6328,9 +9184,9 @@
           <a:solidFill>
             <a:srgbClr val="FFFFFF"/>
           </a:solidFill>
-          <a:ln w="25400">
+          <a:ln w="19050">
             <a:solidFill>
-              <a:srgbClr val="EA580C"/>
+              <a:srgbClr val="E2E8F0"/>
             </a:solidFill>
           </a:ln>
         </p:spPr>
@@ -6349,47 +9205,178 @@
           </a:fontRef>
         </p:style>
         <p:txBody>
-          <a:bodyPr rtlCol="0" anchor="ctr" wrap="square"/>
-          <a:lstStyle/>
-          <a:p>
-            <a:pPr algn="ctr">
-              <a:defRPr sz="1300" b="1">
-                <a:solidFill>
-                  <a:srgbClr val="EA580C"/>
-                </a:solidFill>
-              </a:defRPr>
-            </a:pPr>
-            <a:r>
-              <a:t>Process Velocity (40 Pts)</a:t>
-            </a:r>
-          </a:p>
-          <a:p>
-            <a:pPr>
-              <a:spcBef>
-                <a:spcPts val="1000"/>
-              </a:spcBef>
-              <a:defRPr sz="1100">
-                <a:solidFill>
-                  <a:srgbClr val="64748B"/>
-                </a:solidFill>
-              </a:defRPr>
-            </a:pPr>
-            <a:r>
-              <a:t>Measures adherence to statutory stage-gate timelines from proposal to physical possession.</a:t>
-            </a:r>
-          </a:p>
-        </p:txBody>
-      </p:sp>
-      <p:sp>
-        <p:nvSpPr>
-          <p:cNvPr id="8" name="Rounded Rectangle 7"/>
+          <a:bodyPr rtlCol="0" anchor="ctr"/>
+          <a:lstStyle/>
+          <a:p>
+            <a:pPr algn="ctr"/>
+          </a:p>
+        </p:txBody>
+      </p:sp>
+      <p:sp>
+        <p:nvSpPr>
+          <p:cNvPr id="8" name="TextBox 7"/>
+          <p:cNvSpPr txBox="1"/>
+          <p:nvPr/>
+        </p:nvSpPr>
+        <p:spPr>
+          <a:xfrm>
+            <a:off x="868680" y="1417319"/>
+            <a:ext cx="4846320" cy="4846320"/>
+          </a:xfrm>
+          <a:prstGeom prst="rect">
+            <a:avLst/>
+          </a:prstGeom>
+          <a:noFill/>
+        </p:spPr>
+        <p:txBody>
+          <a:bodyPr wrap="square">
+            <a:spAutoFit/>
+          </a:bodyPr>
+          <a:lstStyle/>
+          <a:p>
+            <a:pPr>
+              <a:defRPr sz="1400" b="1">
+                <a:solidFill>
+                  <a:srgbClr val="071426"/>
+                </a:solidFill>
+              </a:defRPr>
+            </a:pPr>
+            <a:r>
+              <a:t>RFCTLARR 2013 First Schedule Formula</a:t>
+            </a:r>
+          </a:p>
+          <a:p>
+            <a:pPr>
+              <a:spcAft>
+                <a:spcPts val="400"/>
+              </a:spcAft>
+              <a:defRPr sz="900" b="1">
+                <a:solidFill>
+                  <a:srgbClr val="F97316"/>
+                </a:solidFill>
+              </a:defRPr>
+            </a:pPr>
+            <a:r>
+              <a:t>[STATUTORY ARITHMETIC]</a:t>
+            </a:r>
+          </a:p>
+          <a:p>
+            <a:pPr>
+              <a:spcBef>
+                <a:spcPts val="300"/>
+              </a:spcBef>
+              <a:defRPr sz="1100">
+                <a:solidFill>
+                  <a:srgbClr val="334155"/>
+                </a:solidFill>
+              </a:defRPr>
+            </a:pPr>
+            <a:r>
+              <a:t>• 1. Base Land Rate = Max(Sub-Registrar Circle Rate, 3-Yr Registered Sale Deeds Avg, Consented Rate)</a:t>
+            </a:r>
+          </a:p>
+          <a:p>
+            <a:pPr>
+              <a:spcBef>
+                <a:spcPts val="300"/>
+              </a:spcBef>
+              <a:defRPr sz="1100">
+                <a:solidFill>
+                  <a:srgbClr val="334155"/>
+                </a:solidFill>
+              </a:defRPr>
+            </a:pPr>
+            <a:r>
+              <a:t>• 2. Multiplication Factor = 1.00 (Urban), 1.25 (Rural 0-10km), 1.50 (Rural 10-20km), 2.00 (Rural &gt;20km)</a:t>
+            </a:r>
+          </a:p>
+          <a:p>
+            <a:pPr>
+              <a:spcBef>
+                <a:spcPts val="300"/>
+              </a:spcBef>
+              <a:defRPr sz="1100">
+                <a:solidFill>
+                  <a:srgbClr val="334155"/>
+                </a:solidFill>
+              </a:defRPr>
+            </a:pPr>
+            <a:r>
+              <a:t>• 3. Adjusted Market Value = Base Land Rate × Acquired Area × Multiplication Factor</a:t>
+            </a:r>
+          </a:p>
+          <a:p>
+            <a:pPr>
+              <a:spcBef>
+                <a:spcPts val="300"/>
+              </a:spcBef>
+              <a:defRPr sz="1100">
+                <a:solidFill>
+                  <a:srgbClr val="334155"/>
+                </a:solidFill>
+              </a:defRPr>
+            </a:pPr>
+            <a:r>
+              <a:t>• 4. Base Compensation = Adjusted Market Value + Immovable Assets (Structures + Trees + Crops under Sec 29)</a:t>
+            </a:r>
+          </a:p>
+          <a:p>
+            <a:pPr>
+              <a:spcBef>
+                <a:spcPts val="300"/>
+              </a:spcBef>
+              <a:defRPr sz="1100">
+                <a:solidFill>
+                  <a:srgbClr val="334155"/>
+                </a:solidFill>
+              </a:defRPr>
+            </a:pPr>
+            <a:r>
+              <a:t>• 5. Solatium Amount = 100% of Base Compensation (Mandatory under Sec 30(1))</a:t>
+            </a:r>
+          </a:p>
+          <a:p>
+            <a:pPr>
+              <a:spcBef>
+                <a:spcPts val="300"/>
+              </a:spcBef>
+              <a:defRPr sz="1100">
+                <a:solidFill>
+                  <a:srgbClr val="334155"/>
+                </a:solidFill>
+              </a:defRPr>
+            </a:pPr>
+            <a:r>
+              <a:t>• 6. Additional Amount = 12% per annum on Base Market Value for elapsed time (Sec 30(3))</a:t>
+            </a:r>
+          </a:p>
+          <a:p>
+            <a:pPr>
+              <a:spcBef>
+                <a:spcPts val="300"/>
+              </a:spcBef>
+              <a:defRPr sz="1100">
+                <a:solidFill>
+                  <a:srgbClr val="334155"/>
+                </a:solidFill>
+              </a:defRPr>
+            </a:pPr>
+            <a:r>
+              <a:t>• 7. Gross Total Award = Base Compensation + Solatium + Additional Amount</a:t>
+            </a:r>
+          </a:p>
+        </p:txBody>
+      </p:sp>
+      <p:sp>
+        <p:nvSpPr>
+          <p:cNvPr id="9" name="Rounded Rectangle 8"/>
           <p:cNvSpPr/>
           <p:nvPr/>
         </p:nvSpPr>
         <p:spPr>
           <a:xfrm>
-            <a:off x="3429000" y="1463040"/>
-            <a:ext cx="2560320" cy="4389120"/>
+            <a:off x="6309360" y="1280160"/>
+            <a:ext cx="5120640" cy="5120640"/>
           </a:xfrm>
           <a:prstGeom prst="roundRect">
             <a:avLst/>
@@ -6397,9 +9384,9 @@
           <a:solidFill>
             <a:srgbClr val="FFFFFF"/>
           </a:solidFill>
-          <a:ln w="25400">
+          <a:ln w="19050">
             <a:solidFill>
-              <a:srgbClr val="0A7B3E"/>
+              <a:srgbClr val="E2E8F0"/>
             </a:solidFill>
           </a:ln>
         </p:spPr>
@@ -6418,171 +9405,119 @@
           </a:fontRef>
         </p:style>
         <p:txBody>
-          <a:bodyPr rtlCol="0" anchor="ctr" wrap="square"/>
-          <a:lstStyle/>
-          <a:p>
-            <a:pPr algn="ctr">
-              <a:defRPr sz="1300" b="1">
-                <a:solidFill>
-                  <a:srgbClr val="0A7B3E"/>
-                </a:solidFill>
-              </a:defRPr>
-            </a:pPr>
-            <a:r>
-              <a:t>Financial &amp; DBT (40 Pts)</a:t>
-            </a:r>
-          </a:p>
-          <a:p>
-            <a:pPr>
-              <a:spcBef>
-                <a:spcPts val="1000"/>
-              </a:spcBef>
-              <a:defRPr sz="1100">
-                <a:solidFill>
-                  <a:srgbClr val="64748B"/>
-                </a:solidFill>
-              </a:defRPr>
-            </a:pPr>
-            <a:r>
-              <a:t>Evaluates % of compensation paid directly via PFMS DBT; penalizes idle CALA holding account balances.</a:t>
-            </a:r>
-          </a:p>
-        </p:txBody>
-      </p:sp>
-      <p:sp>
-        <p:nvSpPr>
-          <p:cNvPr id="9" name="Rounded Rectangle 8"/>
-          <p:cNvSpPr/>
-          <p:nvPr/>
-        </p:nvSpPr>
-        <p:spPr>
-          <a:xfrm>
-            <a:off x="6126480" y="1463040"/>
-            <a:ext cx="2560320" cy="4389120"/>
-          </a:xfrm>
-          <a:prstGeom prst="roundRect">
-            <a:avLst/>
-          </a:prstGeom>
-          <a:solidFill>
-            <a:srgbClr val="FFFFFF"/>
-          </a:solidFill>
-          <a:ln w="25400">
-            <a:solidFill>
-              <a:srgbClr val="0A2558"/>
-            </a:solidFill>
-          </a:ln>
-        </p:spPr>
-        <p:style>
-          <a:lnRef idx="1">
-            <a:schemeClr val="accent1"/>
-          </a:lnRef>
-          <a:fillRef idx="3">
-            <a:schemeClr val="accent1"/>
-          </a:fillRef>
-          <a:effectRef idx="2">
-            <a:schemeClr val="accent1"/>
-          </a:effectRef>
-          <a:fontRef idx="minor">
-            <a:schemeClr val="lt1"/>
-          </a:fontRef>
-        </p:style>
-        <p:txBody>
-          <a:bodyPr rtlCol="0" anchor="ctr" wrap="square"/>
-          <a:lstStyle/>
-          <a:p>
-            <a:pPr algn="ctr">
-              <a:defRPr sz="1300" b="1">
-                <a:solidFill>
-                  <a:srgbClr val="0A2558"/>
-                </a:solidFill>
-              </a:defRPr>
-            </a:pPr>
-            <a:r>
-              <a:t>Social &amp; R&amp;R (40 Pts)</a:t>
-            </a:r>
-          </a:p>
-          <a:p>
-            <a:pPr>
-              <a:spcBef>
-                <a:spcPts val="1000"/>
-              </a:spcBef>
-              <a:defRPr sz="1100">
-                <a:solidFill>
-                  <a:srgbClr val="64748B"/>
-                </a:solidFill>
-              </a:defRPr>
-            </a:pPr>
-            <a:r>
-              <a:t>Tracks execution of 11 Second Schedule monetary entitlements and 25 Third Schedule civic amenities.</a:t>
-            </a:r>
-          </a:p>
-        </p:txBody>
-      </p:sp>
-      <p:sp>
-        <p:nvSpPr>
-          <p:cNvPr id="10" name="Rounded Rectangle 9"/>
-          <p:cNvSpPr/>
-          <p:nvPr/>
-        </p:nvSpPr>
-        <p:spPr>
-          <a:xfrm>
-            <a:off x="8823960" y="1463040"/>
-            <a:ext cx="2560320" cy="4389120"/>
-          </a:xfrm>
-          <a:prstGeom prst="roundRect">
-            <a:avLst/>
-          </a:prstGeom>
-          <a:solidFill>
-            <a:srgbClr val="FFFFFF"/>
-          </a:solidFill>
-          <a:ln w="25400">
-            <a:solidFill>
-              <a:srgbClr val="7C3AED"/>
-            </a:solidFill>
-          </a:ln>
-        </p:spPr>
-        <p:style>
-          <a:lnRef idx="1">
-            <a:schemeClr val="accent1"/>
-          </a:lnRef>
-          <a:fillRef idx="3">
-            <a:schemeClr val="accent1"/>
-          </a:fillRef>
-          <a:effectRef idx="2">
-            <a:schemeClr val="accent1"/>
-          </a:effectRef>
-          <a:fontRef idx="minor">
-            <a:schemeClr val="lt1"/>
-          </a:fontRef>
-        </p:style>
-        <p:txBody>
-          <a:bodyPr rtlCol="0" anchor="ctr" wrap="square"/>
-          <a:lstStyle/>
-          <a:p>
-            <a:pPr algn="ctr">
-              <a:defRPr sz="1300" b="1">
-                <a:solidFill>
-                  <a:srgbClr val="7C3AED"/>
-                </a:solidFill>
-              </a:defRPr>
-            </a:pPr>
-            <a:r>
-              <a:t>Spatial &amp; Mutation (20 Pts)</a:t>
-            </a:r>
-          </a:p>
-          <a:p>
-            <a:pPr>
-              <a:spcBef>
-                <a:spcPts val="1000"/>
-              </a:spcBef>
-              <a:defRPr sz="1100">
-                <a:solidFill>
-                  <a:srgbClr val="64748B"/>
-                </a:solidFill>
-              </a:defRPr>
-            </a:pPr>
-            <a:r>
-              <a:t>Scores % of parcels assigned 14-digit ULPINs and revenue record mutations within 30 days of possession.</a:t>
+          <a:bodyPr rtlCol="0" anchor="ctr"/>
+          <a:lstStyle/>
+          <a:p>
+            <a:pPr algn="ctr"/>
+          </a:p>
+        </p:txBody>
+      </p:sp>
+      <p:sp>
+        <p:nvSpPr>
+          <p:cNvPr id="10" name="TextBox 9"/>
+          <p:cNvSpPr txBox="1"/>
+          <p:nvPr/>
+        </p:nvSpPr>
+        <p:spPr>
+          <a:xfrm>
+            <a:off x="6446520" y="1417319"/>
+            <a:ext cx="4846320" cy="4846320"/>
+          </a:xfrm>
+          <a:prstGeom prst="rect">
+            <a:avLst/>
+          </a:prstGeom>
+          <a:noFill/>
+        </p:spPr>
+        <p:txBody>
+          <a:bodyPr wrap="square">
+            <a:spAutoFit/>
+          </a:bodyPr>
+          <a:lstStyle/>
+          <a:p>
+            <a:pPr>
+              <a:defRPr sz="1400" b="1">
+                <a:solidFill>
+                  <a:srgbClr val="071426"/>
+                </a:solidFill>
+              </a:defRPr>
+            </a:pPr>
+            <a:r>
+              <a:t>Interactive Parameter Sandbox</a:t>
+            </a:r>
+          </a:p>
+          <a:p>
+            <a:pPr>
+              <a:spcAft>
+                <a:spcPts val="400"/>
+              </a:spcAft>
+              <a:defRPr sz="900" b="1">
+                <a:solidFill>
+                  <a:srgbClr val="F97316"/>
+                </a:solidFill>
+              </a:defRPr>
+            </a:pPr>
+            <a:r>
+              <a:t>[INTERACTIVE SANDBOX]</a:t>
+            </a:r>
+          </a:p>
+          <a:p>
+            <a:pPr>
+              <a:spcBef>
+                <a:spcPts val="300"/>
+              </a:spcBef>
+              <a:defRPr sz="1100">
+                <a:solidFill>
+                  <a:srgbClr val="334155"/>
+                </a:solidFill>
+              </a:defRPr>
+            </a:pPr>
+            <a:r>
+              <a:t>• Live Parameter Sliders: Real-time area slider (500 to 20,000 sq.m) with instant dynamic recalculation.</a:t>
+            </a:r>
+          </a:p>
+          <a:p>
+            <a:pPr>
+              <a:spcBef>
+                <a:spcPts val="300"/>
+              </a:spcBef>
+              <a:defRPr sz="1100">
+                <a:solidFill>
+                  <a:srgbClr val="334155"/>
+                </a:solidFill>
+              </a:defRPr>
+            </a:pPr>
+            <a:r>
+              <a:t>• Asset Valuation Inputs: Separate fields for building structures, timber/fruit trees, and standing crops.</a:t>
+            </a:r>
+          </a:p>
+          <a:p>
+            <a:pPr>
+              <a:spcBef>
+                <a:spcPts val="300"/>
+              </a:spcBef>
+              <a:defRPr sz="1100">
+                <a:solidFill>
+                  <a:srgbClr val="334155"/>
+                </a:solidFill>
+              </a:defRPr>
+            </a:pPr>
+            <a:r>
+              <a:t>• Date Evaluator: Calculates precise elapsed days from Section 11 gazette to award sanction date.</a:t>
+            </a:r>
+          </a:p>
+          <a:p>
+            <a:pPr>
+              <a:spcBef>
+                <a:spcPts val="300"/>
+              </a:spcBef>
+              <a:defRPr sz="1100">
+                <a:solidFill>
+                  <a:srgbClr val="334155"/>
+                </a:solidFill>
+              </a:defRPr>
+            </a:pPr>
+            <a:r>
+              <a:t>• IEEE 754 Audited: Zero rounding drift, eliminating the #1 cause of land acquisition litigation.</a:t>
             </a:r>
           </a:p>
         </p:txBody>
@@ -6620,11 +9555,11 @@
             <a:avLst/>
           </a:prstGeom>
           <a:solidFill>
-            <a:srgbClr val="071933"/>
+            <a:srgbClr val="071426"/>
           </a:solidFill>
           <a:ln>
             <a:solidFill>
-              <a:srgbClr val="071933"/>
+              <a:srgbClr val="071426"/>
             </a:solidFill>
           </a:ln>
         </p:spPr>
@@ -6665,11 +9600,11 @@
             <a:avLst/>
           </a:prstGeom>
           <a:solidFill>
-            <a:srgbClr val="EA580C"/>
+            <a:srgbClr val="F97316"/>
           </a:solidFill>
           <a:ln>
             <a:solidFill>
-              <a:srgbClr val="EA580C"/>
+              <a:srgbClr val="F97316"/>
             </a:solidFill>
           </a:ln>
         </p:spPr>
@@ -6755,11 +9690,11 @@
             <a:avLst/>
           </a:prstGeom>
           <a:solidFill>
-            <a:srgbClr val="0A7B3E"/>
+            <a:srgbClr val="059669"/>
           </a:solidFill>
           <a:ln>
             <a:solidFill>
-              <a:srgbClr val="0A7B3E"/>
+              <a:srgbClr val="059669"/>
             </a:solidFill>
           </a:ln>
         </p:spPr>
@@ -6794,7 +9729,7 @@
         <p:spPr>
           <a:xfrm>
             <a:off x="731520" y="109728"/>
-            <a:ext cx="10698480" cy="822960"/>
+            <a:ext cx="10725912" cy="868680"/>
           </a:xfrm>
           <a:prstGeom prst="rect">
             <a:avLst/>
@@ -6815,7 +9750,7 @@
               </a:defRPr>
             </a:pPr>
             <a:r>
-              <a:t>COMPLIANCE &amp; LEGAL RIGOR</a:t>
+              <a:t>SIH26016 • TEAM APEX • MINISTRY OF RURAL DEVELOPMENT (DOLR)</a:t>
             </a:r>
           </a:p>
           <a:p>
@@ -6827,7 +9762,7 @@
               </a:defRPr>
             </a:pPr>
             <a:r>
-              <a:t>Key Judge Q&amp;A Defenses (Pitcher Strategy)</a:t>
+              <a:t>Modules 5 &amp; 6: Landowner Self-Service &amp; Objection Tribunal</a:t>
             </a:r>
           </a:p>
         </p:txBody>
@@ -6840,8 +9775,8 @@
         </p:nvSpPr>
         <p:spPr>
           <a:xfrm>
-            <a:off x="731520" y="1463040"/>
-            <a:ext cx="10725912" cy="1371600"/>
+            <a:off x="731520" y="1280160"/>
+            <a:ext cx="5120640" cy="5120640"/>
           </a:xfrm>
           <a:prstGeom prst="roundRect">
             <a:avLst/>
@@ -6849,9 +9784,9 @@
           <a:solidFill>
             <a:srgbClr val="FFFFFF"/>
           </a:solidFill>
-          <a:ln>
+          <a:ln w="19050">
             <a:solidFill>
-              <a:srgbClr val="CBD5E1"/>
+              <a:srgbClr val="E2E8F0"/>
             </a:solidFill>
           </a:ln>
         </p:spPr>
@@ -6870,47 +9805,133 @@
           </a:fontRef>
         </p:style>
         <p:txBody>
-          <a:bodyPr rtlCol="0" anchor="ctr" wrap="square"/>
-          <a:lstStyle/>
-          <a:p>
-            <a:pPr algn="ctr">
-              <a:defRPr sz="1200" b="1">
-                <a:solidFill>
-                  <a:srgbClr val="0A2558"/>
-                </a:solidFill>
-              </a:defRPr>
-            </a:pPr>
-            <a:r>
-              <a:t>Q: Land is a State subject. How does a Central portal force compliance?</a:t>
-            </a:r>
-          </a:p>
-          <a:p>
-            <a:pPr>
-              <a:spcBef>
+          <a:bodyPr rtlCol="0" anchor="ctr"/>
+          <a:lstStyle/>
+          <a:p>
+            <a:pPr algn="ctr"/>
+          </a:p>
+        </p:txBody>
+      </p:sp>
+      <p:sp>
+        <p:nvSpPr>
+          <p:cNvPr id="8" name="TextBox 7"/>
+          <p:cNvSpPr txBox="1"/>
+          <p:nvPr/>
+        </p:nvSpPr>
+        <p:spPr>
+          <a:xfrm>
+            <a:off x="868680" y="1417319"/>
+            <a:ext cx="4846320" cy="4846320"/>
+          </a:xfrm>
+          <a:prstGeom prst="rect">
+            <a:avLst/>
+          </a:prstGeom>
+          <a:noFill/>
+        </p:spPr>
+        <p:txBody>
+          <a:bodyPr wrap="square">
+            <a:spAutoFit/>
+          </a:bodyPr>
+          <a:lstStyle/>
+          <a:p>
+            <a:pPr>
+              <a:defRPr sz="1400" b="1">
+                <a:solidFill>
+                  <a:srgbClr val="071426"/>
+                </a:solidFill>
+              </a:defRPr>
+            </a:pPr>
+            <a:r>
+              <a:t>Module 5: Citizen Landowner Portal</a:t>
+            </a:r>
+          </a:p>
+          <a:p>
+            <a:pPr>
+              <a:spcAft>
                 <a:spcPts val="400"/>
-              </a:spcBef>
-              <a:defRPr sz="1100">
-                <a:solidFill>
-                  <a:srgbClr val="64748B"/>
-                </a:solidFill>
-              </a:defRPr>
-            </a:pPr>
-            <a:r>
-              <a:t>A: RFCTLARR Act 2013 is under Concurrent List (Entry 42). Central agencies fund 100% of compensation. NLAMS integrates with state land portals via open APIs and incentivizes states via 140-Point Vikas Scores.</a:t>
-            </a:r>
-          </a:p>
-        </p:txBody>
-      </p:sp>
-      <p:sp>
-        <p:nvSpPr>
-          <p:cNvPr id="8" name="Rounded Rectangle 7"/>
+              </a:spcAft>
+              <a:defRPr sz="900" b="1">
+                <a:solidFill>
+                  <a:srgbClr val="F97316"/>
+                </a:solidFill>
+              </a:defRPr>
+            </a:pPr>
+            <a:r>
+              <a:t>[CITIZEN EMPOWERMENT]</a:t>
+            </a:r>
+          </a:p>
+          <a:p>
+            <a:pPr>
+              <a:spcBef>
+                <a:spcPts val="300"/>
+              </a:spcBef>
+              <a:defRPr sz="1100">
+                <a:solidFill>
+                  <a:srgbClr val="334155"/>
+                </a:solidFill>
+              </a:defRPr>
+            </a:pPr>
+            <a:r>
+              <a:t>• Open Bhu-Aadhaar Public Query: Search landholding by 14-digit ULPIN, Khasra/Survey No, or Owner Name.</a:t>
+            </a:r>
+          </a:p>
+          <a:p>
+            <a:pPr>
+              <a:spcBef>
+                <a:spcPts val="300"/>
+              </a:spcBef>
+              <a:defRPr sz="1100">
+                <a:solidFill>
+                  <a:srgbClr val="334155"/>
+                </a:solidFill>
+              </a:defRPr>
+            </a:pPr>
+            <a:r>
+              <a:t>• Statutory Transparency: Real-time visibility into project corridor, statutory stage, and encumbrance lock status.</a:t>
+            </a:r>
+          </a:p>
+          <a:p>
+            <a:pPr>
+              <a:spcBef>
+                <a:spcPts val="300"/>
+              </a:spcBef>
+              <a:defRPr sz="1100">
+                <a:solidFill>
+                  <a:srgbClr val="334155"/>
+                </a:solidFill>
+              </a:defRPr>
+            </a:pPr>
+            <a:r>
+              <a:t>• Official Award Estimate Slip: Formatted printable record detailing base market rate, solatium, and net PFMS DBT amount.</a:t>
+            </a:r>
+          </a:p>
+          <a:p>
+            <a:pPr>
+              <a:spcBef>
+                <a:spcPts val="300"/>
+              </a:spcBef>
+              <a:defRPr sz="1100">
+                <a:solidFill>
+                  <a:srgbClr val="334155"/>
+                </a:solidFill>
+              </a:defRPr>
+            </a:pPr>
+            <a:r>
+              <a:t>• Direct Objection Link: Pre-populates parcel parameters for rapid Section 15 grievance submission.</a:t>
+            </a:r>
+          </a:p>
+        </p:txBody>
+      </p:sp>
+      <p:sp>
+        <p:nvSpPr>
+          <p:cNvPr id="9" name="Rounded Rectangle 8"/>
           <p:cNvSpPr/>
           <p:nvPr/>
         </p:nvSpPr>
         <p:spPr>
           <a:xfrm>
-            <a:off x="731520" y="3017520"/>
-            <a:ext cx="10725912" cy="1371600"/>
+            <a:off x="6309360" y="1280160"/>
+            <a:ext cx="5120640" cy="5120640"/>
           </a:xfrm>
           <a:prstGeom prst="roundRect">
             <a:avLst/>
@@ -6918,9 +9939,9 @@
           <a:solidFill>
             <a:srgbClr val="FFFFFF"/>
           </a:solidFill>
-          <a:ln>
+          <a:ln w="19050">
             <a:solidFill>
-              <a:srgbClr val="CBD5E1"/>
+              <a:srgbClr val="E2E8F0"/>
             </a:solidFill>
           </a:ln>
         </p:spPr>
@@ -6939,102 +9960,119 @@
           </a:fontRef>
         </p:style>
         <p:txBody>
-          <a:bodyPr rtlCol="0" anchor="ctr" wrap="square"/>
-          <a:lstStyle/>
-          <a:p>
-            <a:pPr algn="ctr">
-              <a:defRPr sz="1200" b="1">
-                <a:solidFill>
-                  <a:srgbClr val="0A2558"/>
-                </a:solidFill>
-              </a:defRPr>
-            </a:pPr>
-            <a:r>
-              <a:t>Q: How does NLAMS eliminate financial corruption?</a:t>
-            </a:r>
-          </a:p>
-          <a:p>
-            <a:pPr>
-              <a:spcBef>
+          <a:bodyPr rtlCol="0" anchor="ctr"/>
+          <a:lstStyle/>
+          <a:p>
+            <a:pPr algn="ctr"/>
+          </a:p>
+        </p:txBody>
+      </p:sp>
+      <p:sp>
+        <p:nvSpPr>
+          <p:cNvPr id="10" name="TextBox 9"/>
+          <p:cNvSpPr txBox="1"/>
+          <p:nvPr/>
+        </p:nvSpPr>
+        <p:spPr>
+          <a:xfrm>
+            <a:off x="6446520" y="1417319"/>
+            <a:ext cx="4846320" cy="4846320"/>
+          </a:xfrm>
+          <a:prstGeom prst="rect">
+            <a:avLst/>
+          </a:prstGeom>
+          <a:noFill/>
+        </p:spPr>
+        <p:txBody>
+          <a:bodyPr wrap="square">
+            <a:spAutoFit/>
+          </a:bodyPr>
+          <a:lstStyle/>
+          <a:p>
+            <a:pPr>
+              <a:defRPr sz="1400" b="1">
+                <a:solidFill>
+                  <a:srgbClr val="071426"/>
+                </a:solidFill>
+              </a:defRPr>
+            </a:pPr>
+            <a:r>
+              <a:t>Module 6: Section 15 Objection Tribunal</a:t>
+            </a:r>
+          </a:p>
+          <a:p>
+            <a:pPr>
+              <a:spcAft>
                 <a:spcPts val="400"/>
-              </a:spcBef>
-              <a:defRPr sz="1100">
-                <a:solidFill>
-                  <a:srgbClr val="64748B"/>
-                </a:solidFill>
-              </a:defRPr>
-            </a:pPr>
-            <a:r>
-              <a:t>A: PFMS Direct Benefit Transfer (DBT) routes funds directly from Central Ministry accounts to verified landholder bank accounts via Aadhaar Payment Bridge (APBS), eliminating intermediate CALA bank floats.</a:t>
-            </a:r>
-          </a:p>
-        </p:txBody>
-      </p:sp>
-      <p:sp>
-        <p:nvSpPr>
-          <p:cNvPr id="9" name="Rounded Rectangle 8"/>
-          <p:cNvSpPr/>
-          <p:nvPr/>
-        </p:nvSpPr>
-        <p:spPr>
-          <a:xfrm>
-            <a:off x="731520" y="4572000"/>
-            <a:ext cx="10725912" cy="1371600"/>
-          </a:xfrm>
-          <a:prstGeom prst="roundRect">
-            <a:avLst/>
-          </a:prstGeom>
-          <a:solidFill>
-            <a:srgbClr val="FFFFFF"/>
-          </a:solidFill>
-          <a:ln>
-            <a:solidFill>
-              <a:srgbClr val="CBD5E1"/>
-            </a:solidFill>
-          </a:ln>
-        </p:spPr>
-        <p:style>
-          <a:lnRef idx="1">
-            <a:schemeClr val="accent1"/>
-          </a:lnRef>
-          <a:fillRef idx="3">
-            <a:schemeClr val="accent1"/>
-          </a:fillRef>
-          <a:effectRef idx="2">
-            <a:schemeClr val="accent1"/>
-          </a:effectRef>
-          <a:fontRef idx="minor">
-            <a:schemeClr val="lt1"/>
-          </a:fontRef>
-        </p:style>
-        <p:txBody>
-          <a:bodyPr rtlCol="0" anchor="ctr" wrap="square"/>
-          <a:lstStyle/>
-          <a:p>
-            <a:pPr algn="ctr">
-              <a:defRPr sz="1200" b="1">
-                <a:solidFill>
-                  <a:srgbClr val="0A2558"/>
-                </a:solidFill>
-              </a:defRPr>
-            </a:pPr>
-            <a:r>
-              <a:t>Q: How do you handle title disputes without stalling national projects?</a:t>
-            </a:r>
-          </a:p>
-          <a:p>
-            <a:pPr>
-              <a:spcBef>
-                <a:spcPts val="400"/>
-              </a:spcBef>
-              <a:defRPr sz="1100">
-                <a:solidFill>
-                  <a:srgbClr val="64748B"/>
-                </a:solidFill>
-              </a:defRPr>
-            </a:pPr>
-            <a:r>
-              <a:t>A: Section 64 reference mechanism deposits disputed funds into Civil Court / LARR Authority escrow, allowing physical possession (Sec 38) to proceed without delaying national corridor construction.</a:t>
+              </a:spcAft>
+              <a:defRPr sz="900" b="1">
+                <a:solidFill>
+                  <a:srgbClr val="F97316"/>
+                </a:solidFill>
+              </a:defRPr>
+            </a:pPr>
+            <a:r>
+              <a:t>[QUASI-JUDICIAL BENCH]</a:t>
+            </a:r>
+          </a:p>
+          <a:p>
+            <a:pPr>
+              <a:spcBef>
+                <a:spcPts val="300"/>
+              </a:spcBef>
+              <a:defRPr sz="1100">
+                <a:solidFill>
+                  <a:srgbClr val="334155"/>
+                </a:solidFill>
+              </a:defRPr>
+            </a:pPr>
+            <a:r>
+              <a:t>• Quasi-Judicial Workflow: CALA bench workbench for hearing notices, evidence scrutiny, and disposal orders.</a:t>
+            </a:r>
+          </a:p>
+          <a:p>
+            <a:pPr>
+              <a:spcBef>
+                <a:spcPts val="300"/>
+              </a:spcBef>
+              <a:defRPr sz="1100">
+                <a:solidFill>
+                  <a:srgbClr val="334155"/>
+                </a:solidFill>
+              </a:defRPr>
+            </a:pPr>
+            <a:r>
+              <a:t>• Category Classification: Inadequate Valuation, Measurement Discrepancy, Title Dispute, Public Utility Conflict.</a:t>
+            </a:r>
+          </a:p>
+          <a:p>
+            <a:pPr>
+              <a:spcBef>
+                <a:spcPts val="300"/>
+              </a:spcBef>
+              <a:defRPr sz="1100">
+                <a:solidFill>
+                  <a:srgbClr val="334155"/>
+                </a:solidFill>
+              </a:defRPr>
+            </a:pPr>
+            <a:r>
+              <a:t>• Digital Hearing Notice: One-click hearing scheduling with automated notice dispatch.</a:t>
+            </a:r>
+          </a:p>
+          <a:p>
+            <a:pPr>
+              <a:spcBef>
+                <a:spcPts val="300"/>
+              </a:spcBef>
+              <a:defRPr sz="1100">
+                <a:solidFill>
+                  <a:srgbClr val="334155"/>
+                </a:solidFill>
+              </a:defRPr>
+            </a:pPr>
+            <a:r>
+              <a:t>• Reasoned Disposal Ledger: Legal requirement under Sec 15(2) to record written reasoning for rejecting/upholding objections.</a:t>
             </a:r>
           </a:p>
         </p:txBody>
@@ -7066,17 +10104,17 @@
         <p:spPr>
           <a:xfrm>
             <a:off x="0" y="0"/>
-            <a:ext cx="12188952" cy="6858000"/>
+            <a:ext cx="12188952" cy="1051560"/>
           </a:xfrm>
           <a:prstGeom prst="rect">
             <a:avLst/>
           </a:prstGeom>
           <a:solidFill>
-            <a:srgbClr val="071933"/>
+            <a:srgbClr val="071426"/>
           </a:solidFill>
           <a:ln>
             <a:solidFill>
-              <a:srgbClr val="071933"/>
+              <a:srgbClr val="071426"/>
             </a:solidFill>
           </a:ln>
         </p:spPr>
@@ -7104,14 +10142,149 @@
       </p:sp>
       <p:sp>
         <p:nvSpPr>
-          <p:cNvPr id="3" name="TextBox 2"/>
+          <p:cNvPr id="3" name="Rectangle 2"/>
+          <p:cNvSpPr/>
+          <p:nvPr/>
+        </p:nvSpPr>
+        <p:spPr>
+          <a:xfrm>
+            <a:off x="0" y="1051560"/>
+            <a:ext cx="4059936" cy="54864"/>
+          </a:xfrm>
+          <a:prstGeom prst="rect">
+            <a:avLst/>
+          </a:prstGeom>
+          <a:solidFill>
+            <a:srgbClr val="F97316"/>
+          </a:solidFill>
+          <a:ln>
+            <a:solidFill>
+              <a:srgbClr val="F97316"/>
+            </a:solidFill>
+          </a:ln>
+        </p:spPr>
+        <p:style>
+          <a:lnRef idx="1">
+            <a:schemeClr val="accent1"/>
+          </a:lnRef>
+          <a:fillRef idx="3">
+            <a:schemeClr val="accent1"/>
+          </a:fillRef>
+          <a:effectRef idx="2">
+            <a:schemeClr val="accent1"/>
+          </a:effectRef>
+          <a:fontRef idx="minor">
+            <a:schemeClr val="lt1"/>
+          </a:fontRef>
+        </p:style>
+        <p:txBody>
+          <a:bodyPr rtlCol="0" anchor="ctr"/>
+          <a:lstStyle/>
+          <a:p>
+            <a:pPr algn="ctr"/>
+          </a:p>
+        </p:txBody>
+      </p:sp>
+      <p:sp>
+        <p:nvSpPr>
+          <p:cNvPr id="4" name="Rectangle 3"/>
+          <p:cNvSpPr/>
+          <p:nvPr/>
+        </p:nvSpPr>
+        <p:spPr>
+          <a:xfrm>
+            <a:off x="4059936" y="1051560"/>
+            <a:ext cx="4059936" cy="54864"/>
+          </a:xfrm>
+          <a:prstGeom prst="rect">
+            <a:avLst/>
+          </a:prstGeom>
+          <a:solidFill>
+            <a:srgbClr val="FFFFFF"/>
+          </a:solidFill>
+          <a:ln>
+            <a:solidFill>
+              <a:srgbClr val="FFFFFF"/>
+            </a:solidFill>
+          </a:ln>
+        </p:spPr>
+        <p:style>
+          <a:lnRef idx="1">
+            <a:schemeClr val="accent1"/>
+          </a:lnRef>
+          <a:fillRef idx="3">
+            <a:schemeClr val="accent1"/>
+          </a:fillRef>
+          <a:effectRef idx="2">
+            <a:schemeClr val="accent1"/>
+          </a:effectRef>
+          <a:fontRef idx="minor">
+            <a:schemeClr val="lt1"/>
+          </a:fontRef>
+        </p:style>
+        <p:txBody>
+          <a:bodyPr rtlCol="0" anchor="ctr"/>
+          <a:lstStyle/>
+          <a:p>
+            <a:pPr algn="ctr"/>
+          </a:p>
+        </p:txBody>
+      </p:sp>
+      <p:sp>
+        <p:nvSpPr>
+          <p:cNvPr id="5" name="Rectangle 4"/>
+          <p:cNvSpPr/>
+          <p:nvPr/>
+        </p:nvSpPr>
+        <p:spPr>
+          <a:xfrm>
+            <a:off x="8119872" y="1051560"/>
+            <a:ext cx="4069080" cy="54864"/>
+          </a:xfrm>
+          <a:prstGeom prst="rect">
+            <a:avLst/>
+          </a:prstGeom>
+          <a:solidFill>
+            <a:srgbClr val="059669"/>
+          </a:solidFill>
+          <a:ln>
+            <a:solidFill>
+              <a:srgbClr val="059669"/>
+            </a:solidFill>
+          </a:ln>
+        </p:spPr>
+        <p:style>
+          <a:lnRef idx="1">
+            <a:schemeClr val="accent1"/>
+          </a:lnRef>
+          <a:fillRef idx="3">
+            <a:schemeClr val="accent1"/>
+          </a:fillRef>
+          <a:effectRef idx="2">
+            <a:schemeClr val="accent1"/>
+          </a:effectRef>
+          <a:fontRef idx="minor">
+            <a:schemeClr val="lt1"/>
+          </a:fontRef>
+        </p:style>
+        <p:txBody>
+          <a:bodyPr rtlCol="0" anchor="ctr"/>
+          <a:lstStyle/>
+          <a:p>
+            <a:pPr algn="ctr"/>
+          </a:p>
+        </p:txBody>
+      </p:sp>
+      <p:sp>
+        <p:nvSpPr>
+          <p:cNvPr id="6" name="TextBox 5"/>
           <p:cNvSpPr txBox="1"/>
           <p:nvPr/>
         </p:nvSpPr>
         <p:spPr>
           <a:xfrm>
-            <a:off x="731520" y="1371600"/>
-            <a:ext cx="10725912" cy="4572000"/>
+            <a:off x="731520" y="109728"/>
+            <a:ext cx="10725912" cy="868680"/>
           </a:xfrm>
           <a:prstGeom prst="rect">
             <a:avLst/>
@@ -7125,56 +10298,531 @@
           <a:lstStyle/>
           <a:p>
             <a:pPr>
-              <a:defRPr sz="1300" b="1">
+              <a:defRPr sz="1000" b="1">
                 <a:solidFill>
                   <a:srgbClr val="FDBA74"/>
                 </a:solidFill>
               </a:defRPr>
             </a:pPr>
             <a:r>
-              <a:t>TRANSFORMING INDIA'S INFRASTRUCTURE GOVERNANCE</a:t>
-            </a:r>
-          </a:p>
-          <a:p>
-            <a:pPr>
-              <a:spcBef>
-                <a:spcPts val="1000"/>
-              </a:spcBef>
-              <a:defRPr sz="2800" b="1">
+              <a:t>SIH26016 • TEAM APEX • MINISTRY OF RURAL DEVELOPMENT (DOLR)</a:t>
+            </a:r>
+          </a:p>
+          <a:p>
+            <a:pPr>
+              <a:defRPr sz="2000" b="1">
                 <a:solidFill>
                   <a:srgbClr val="FFFFFF"/>
                 </a:solidFill>
               </a:defRPr>
             </a:pPr>
             <a:r>
-              <a:t>NLAMS: Transparent, Accountable &amp; Conclusive Land Administration</a:t>
-            </a:r>
-          </a:p>
-          <a:p>
-            <a:pPr>
-              <a:spcBef>
-                <a:spcPts val="2000"/>
-              </a:spcBef>
-              <a:defRPr sz="1500">
-                <a:solidFill>
-                  <a:srgbClr val="CBD5E1"/>
-                </a:solidFill>
-              </a:defRPr>
-            </a:pPr>
-            <a:r>
-              <a:t>• Cycle Time Reduction: 36 months down to 4 months for complete statutory clearance</a:t>
-            </a:r>
-            <a:br/>
-            <a:r>
-              <a:t>• Litigation Drop: 80% decrease in land valuation disputes due to mathematical transparency</a:t>
-            </a:r>
-            <a:br/>
-            <a:r>
-              <a:t>• Fiscal Security: Eliminates ₹ thousands of crores in idle CALA deposit floats</a:t>
-            </a:r>
-            <a:br/>
-            <a:r>
-              <a:t>• Conclusive Titling: Accelerates India's transition to state-guaranteed titles under DILRMP</a:t>
+              <a:t>Module 7: Resettlement &amp; Rehabilitation (R&amp;R) Tracking</a:t>
+            </a:r>
+          </a:p>
+        </p:txBody>
+      </p:sp>
+      <p:sp>
+        <p:nvSpPr>
+          <p:cNvPr id="7" name="Rounded Rectangle 6"/>
+          <p:cNvSpPr/>
+          <p:nvPr/>
+        </p:nvSpPr>
+        <p:spPr>
+          <a:xfrm>
+            <a:off x="731520" y="1280160"/>
+            <a:ext cx="5120640" cy="5120640"/>
+          </a:xfrm>
+          <a:prstGeom prst="roundRect">
+            <a:avLst/>
+          </a:prstGeom>
+          <a:solidFill>
+            <a:srgbClr val="FFFFFF"/>
+          </a:solidFill>
+          <a:ln w="19050">
+            <a:solidFill>
+              <a:srgbClr val="E2E8F0"/>
+            </a:solidFill>
+          </a:ln>
+        </p:spPr>
+        <p:style>
+          <a:lnRef idx="1">
+            <a:schemeClr val="accent1"/>
+          </a:lnRef>
+          <a:fillRef idx="3">
+            <a:schemeClr val="accent1"/>
+          </a:fillRef>
+          <a:effectRef idx="2">
+            <a:schemeClr val="accent1"/>
+          </a:effectRef>
+          <a:fontRef idx="minor">
+            <a:schemeClr val="lt1"/>
+          </a:fontRef>
+        </p:style>
+        <p:txBody>
+          <a:bodyPr rtlCol="0" anchor="ctr"/>
+          <a:lstStyle/>
+          <a:p>
+            <a:pPr algn="ctr"/>
+          </a:p>
+        </p:txBody>
+      </p:sp>
+      <p:sp>
+        <p:nvSpPr>
+          <p:cNvPr id="8" name="TextBox 7"/>
+          <p:cNvSpPr txBox="1"/>
+          <p:nvPr/>
+        </p:nvSpPr>
+        <p:spPr>
+          <a:xfrm>
+            <a:off x="868680" y="1417319"/>
+            <a:ext cx="4846320" cy="4846320"/>
+          </a:xfrm>
+          <a:prstGeom prst="rect">
+            <a:avLst/>
+          </a:prstGeom>
+          <a:noFill/>
+        </p:spPr>
+        <p:txBody>
+          <a:bodyPr wrap="square">
+            <a:spAutoFit/>
+          </a:bodyPr>
+          <a:lstStyle/>
+          <a:p>
+            <a:pPr>
+              <a:defRPr sz="1400" b="1">
+                <a:solidFill>
+                  <a:srgbClr val="071426"/>
+                </a:solidFill>
+              </a:defRPr>
+            </a:pPr>
+            <a:r>
+              <a:t>Second Schedule Monetary Entitlements</a:t>
+            </a:r>
+          </a:p>
+          <a:p>
+            <a:pPr>
+              <a:spcAft>
+                <a:spcPts val="400"/>
+              </a:spcAft>
+              <a:defRPr sz="900" b="1">
+                <a:solidFill>
+                  <a:srgbClr val="F97316"/>
+                </a:solidFill>
+              </a:defRPr>
+            </a:pPr>
+            <a:r>
+              <a:t>[SECOND SCHEDULE]</a:t>
+            </a:r>
+          </a:p>
+          <a:p>
+            <a:pPr>
+              <a:spcBef>
+                <a:spcPts val="300"/>
+              </a:spcBef>
+              <a:defRPr sz="1100">
+                <a:solidFill>
+                  <a:srgbClr val="334155"/>
+                </a:solidFill>
+              </a:defRPr>
+            </a:pPr>
+            <a:r>
+              <a:t>• Tracks all Project Affected Families (PAFs) and Displaced Families.</a:t>
+            </a:r>
+          </a:p>
+          <a:p>
+            <a:pPr>
+              <a:spcBef>
+                <a:spcPts val="300"/>
+              </a:spcBef>
+              <a:defRPr sz="1100">
+                <a:solidFill>
+                  <a:srgbClr val="334155"/>
+                </a:solidFill>
+              </a:defRPr>
+            </a:pPr>
+            <a:r>
+              <a:t>• 11 Mandatory Mandatory Entitlements:</a:t>
+            </a:r>
+          </a:p>
+          <a:p>
+            <a:pPr>
+              <a:spcBef>
+                <a:spcPts val="300"/>
+              </a:spcBef>
+              <a:defRPr sz="1100">
+                <a:solidFill>
+                  <a:srgbClr val="334155"/>
+                </a:solidFill>
+              </a:defRPr>
+            </a:pPr>
+            <a:r>
+              <a:t>•   1. Housing unit allotment in rural/urban areas</a:t>
+            </a:r>
+          </a:p>
+          <a:p>
+            <a:pPr>
+              <a:spcBef>
+                <a:spcPts val="300"/>
+              </a:spcBef>
+              <a:defRPr sz="1100">
+                <a:solidFill>
+                  <a:srgbClr val="334155"/>
+                </a:solidFill>
+              </a:defRPr>
+            </a:pPr>
+            <a:r>
+              <a:t>•   2. One-time subsistence allowance (₹3,000/mo for 1 yr)</a:t>
+            </a:r>
+          </a:p>
+          <a:p>
+            <a:pPr>
+              <a:spcBef>
+                <a:spcPts val="300"/>
+              </a:spcBef>
+              <a:defRPr sz="1100">
+                <a:solidFill>
+                  <a:srgbClr val="334155"/>
+                </a:solidFill>
+              </a:defRPr>
+            </a:pPr>
+            <a:r>
+              <a:t>•   3. One-time resettlement grant (₹50,000)</a:t>
+            </a:r>
+          </a:p>
+          <a:p>
+            <a:pPr>
+              <a:spcBef>
+                <a:spcPts val="300"/>
+              </a:spcBef>
+              <a:defRPr sz="1100">
+                <a:solidFill>
+                  <a:srgbClr val="334155"/>
+                </a:solidFill>
+              </a:defRPr>
+            </a:pPr>
+            <a:r>
+              <a:t>•   4. Transportation &amp; shifting allowance (₹50,000)</a:t>
+            </a:r>
+          </a:p>
+          <a:p>
+            <a:pPr>
+              <a:spcBef>
+                <a:spcPts val="300"/>
+              </a:spcBef>
+              <a:defRPr sz="1100">
+                <a:solidFill>
+                  <a:srgbClr val="334155"/>
+                </a:solidFill>
+              </a:defRPr>
+            </a:pPr>
+            <a:r>
+              <a:t>•   5. Stamp duty &amp; registration fee exemption</a:t>
+            </a:r>
+          </a:p>
+          <a:p>
+            <a:pPr>
+              <a:spcBef>
+                <a:spcPts val="300"/>
+              </a:spcBef>
+              <a:defRPr sz="1100">
+                <a:solidFill>
+                  <a:srgbClr val="334155"/>
+                </a:solidFill>
+              </a:defRPr>
+            </a:pPr>
+            <a:r>
+              <a:t>•   6. Mandatory cattle shed / petty shop grant (₹25,000)</a:t>
+            </a:r>
+          </a:p>
+          <a:p>
+            <a:pPr>
+              <a:spcBef>
+                <a:spcPts val="300"/>
+              </a:spcBef>
+              <a:defRPr sz="1100">
+                <a:solidFill>
+                  <a:srgbClr val="334155"/>
+                </a:solidFill>
+              </a:defRPr>
+            </a:pPr>
+            <a:r>
+              <a:t>•   7. One-time artisan / trader grant (₹25,000)</a:t>
+            </a:r>
+          </a:p>
+          <a:p>
+            <a:pPr>
+              <a:spcBef>
+                <a:spcPts val="300"/>
+              </a:spcBef>
+              <a:defRPr sz="1100">
+                <a:solidFill>
+                  <a:srgbClr val="334155"/>
+                </a:solidFill>
+              </a:defRPr>
+            </a:pPr>
+            <a:r>
+              <a:t>•   8. Fishing rights in reservoir / water body</a:t>
+            </a:r>
+          </a:p>
+          <a:p>
+            <a:pPr>
+              <a:spcBef>
+                <a:spcPts val="300"/>
+              </a:spcBef>
+              <a:defRPr sz="1100">
+                <a:solidFill>
+                  <a:srgbClr val="334155"/>
+                </a:solidFill>
+              </a:defRPr>
+            </a:pPr>
+            <a:r>
+              <a:t>•   9. Mandatory employment / annuity (₹2,000/mo for 20 yrs)</a:t>
+            </a:r>
+          </a:p>
+          <a:p>
+            <a:pPr>
+              <a:spcBef>
+                <a:spcPts val="300"/>
+              </a:spcBef>
+              <a:defRPr sz="1100">
+                <a:solidFill>
+                  <a:srgbClr val="334155"/>
+                </a:solidFill>
+              </a:defRPr>
+            </a:pPr>
+            <a:r>
+              <a:t>•  10. Additional 25% lump-sum for SC/ST families</a:t>
+            </a:r>
+          </a:p>
+          <a:p>
+            <a:pPr>
+              <a:spcBef>
+                <a:spcPts val="300"/>
+              </a:spcBef>
+              <a:defRPr sz="1100">
+                <a:solidFill>
+                  <a:srgbClr val="334155"/>
+                </a:solidFill>
+              </a:defRPr>
+            </a:pPr>
+            <a:r>
+              <a:t>•  11. Land-for-land allotment in irrigation projects</a:t>
+            </a:r>
+          </a:p>
+        </p:txBody>
+      </p:sp>
+      <p:sp>
+        <p:nvSpPr>
+          <p:cNvPr id="9" name="Rounded Rectangle 8"/>
+          <p:cNvSpPr/>
+          <p:nvPr/>
+        </p:nvSpPr>
+        <p:spPr>
+          <a:xfrm>
+            <a:off x="6309360" y="1280160"/>
+            <a:ext cx="5120640" cy="5120640"/>
+          </a:xfrm>
+          <a:prstGeom prst="roundRect">
+            <a:avLst/>
+          </a:prstGeom>
+          <a:solidFill>
+            <a:srgbClr val="FFFFFF"/>
+          </a:solidFill>
+          <a:ln w="19050">
+            <a:solidFill>
+              <a:srgbClr val="E2E8F0"/>
+            </a:solidFill>
+          </a:ln>
+        </p:spPr>
+        <p:style>
+          <a:lnRef idx="1">
+            <a:schemeClr val="accent1"/>
+          </a:lnRef>
+          <a:fillRef idx="3">
+            <a:schemeClr val="accent1"/>
+          </a:fillRef>
+          <a:effectRef idx="2">
+            <a:schemeClr val="accent1"/>
+          </a:effectRef>
+          <a:fontRef idx="minor">
+            <a:schemeClr val="lt1"/>
+          </a:fontRef>
+        </p:style>
+        <p:txBody>
+          <a:bodyPr rtlCol="0" anchor="ctr"/>
+          <a:lstStyle/>
+          <a:p>
+            <a:pPr algn="ctr"/>
+          </a:p>
+        </p:txBody>
+      </p:sp>
+      <p:sp>
+        <p:nvSpPr>
+          <p:cNvPr id="10" name="TextBox 9"/>
+          <p:cNvSpPr txBox="1"/>
+          <p:nvPr/>
+        </p:nvSpPr>
+        <p:spPr>
+          <a:xfrm>
+            <a:off x="6446520" y="1417319"/>
+            <a:ext cx="4846320" cy="4846320"/>
+          </a:xfrm>
+          <a:prstGeom prst="rect">
+            <a:avLst/>
+          </a:prstGeom>
+          <a:noFill/>
+        </p:spPr>
+        <p:txBody>
+          <a:bodyPr wrap="square">
+            <a:spAutoFit/>
+          </a:bodyPr>
+          <a:lstStyle/>
+          <a:p>
+            <a:pPr>
+              <a:defRPr sz="1400" b="1">
+                <a:solidFill>
+                  <a:srgbClr val="071426"/>
+                </a:solidFill>
+              </a:defRPr>
+            </a:pPr>
+            <a:r>
+              <a:t>Third Schedule Civic Amenities &amp; Monitoring</a:t>
+            </a:r>
+          </a:p>
+          <a:p>
+            <a:pPr>
+              <a:spcAft>
+                <a:spcPts val="400"/>
+              </a:spcAft>
+              <a:defRPr sz="900" b="1">
+                <a:solidFill>
+                  <a:srgbClr val="F97316"/>
+                </a:solidFill>
+              </a:defRPr>
+            </a:pPr>
+            <a:r>
+              <a:t>[THIRD SCHEDULE]</a:t>
+            </a:r>
+          </a:p>
+          <a:p>
+            <a:pPr>
+              <a:spcBef>
+                <a:spcPts val="300"/>
+              </a:spcBef>
+              <a:defRPr sz="1100">
+                <a:solidFill>
+                  <a:srgbClr val="334155"/>
+                </a:solidFill>
+              </a:defRPr>
+            </a:pPr>
+            <a:r>
+              <a:t>• 25 Mandatory Resettlement Colony Amenities:</a:t>
+            </a:r>
+          </a:p>
+          <a:p>
+            <a:pPr>
+              <a:spcBef>
+                <a:spcPts val="300"/>
+              </a:spcBef>
+              <a:defRPr sz="1100">
+                <a:solidFill>
+                  <a:srgbClr val="334155"/>
+                </a:solidFill>
+              </a:defRPr>
+            </a:pPr>
+            <a:r>
+              <a:t>•   - All-weather paved approach roads &amp; drainage</a:t>
+            </a:r>
+          </a:p>
+          <a:p>
+            <a:pPr>
+              <a:spcBef>
+                <a:spcPts val="300"/>
+              </a:spcBef>
+              <a:defRPr sz="1100">
+                <a:solidFill>
+                  <a:srgbClr val="334155"/>
+                </a:solidFill>
+              </a:defRPr>
+            </a:pPr>
+            <a:r>
+              <a:t>•   - Safe drinking water supply &amp; overhead tanks</a:t>
+            </a:r>
+          </a:p>
+          <a:p>
+            <a:pPr>
+              <a:spcBef>
+                <a:spcPts val="300"/>
+              </a:spcBef>
+              <a:defRPr sz="1100">
+                <a:solidFill>
+                  <a:srgbClr val="334155"/>
+                </a:solidFill>
+              </a:defRPr>
+            </a:pPr>
+            <a:r>
+              <a:t>•   - Electricity connection &amp; solar street lighting</a:t>
+            </a:r>
+          </a:p>
+          <a:p>
+            <a:pPr>
+              <a:spcBef>
+                <a:spcPts val="300"/>
+              </a:spcBef>
+              <a:defRPr sz="1100">
+                <a:solidFill>
+                  <a:srgbClr val="334155"/>
+                </a:solidFill>
+              </a:defRPr>
+            </a:pPr>
+            <a:r>
+              <a:t>•   - Primary health centre (PHC) &amp; Anganwadi centre</a:t>
+            </a:r>
+          </a:p>
+          <a:p>
+            <a:pPr>
+              <a:spcBef>
+                <a:spcPts val="300"/>
+              </a:spcBef>
+              <a:defRPr sz="1100">
+                <a:solidFill>
+                  <a:srgbClr val="334155"/>
+                </a:solidFill>
+              </a:defRPr>
+            </a:pPr>
+            <a:r>
+              <a:t>•   - Panchayat ghar &amp; community recreation hall</a:t>
+            </a:r>
+          </a:p>
+          <a:p>
+            <a:pPr>
+              <a:spcBef>
+                <a:spcPts val="300"/>
+              </a:spcBef>
+              <a:defRPr sz="1100">
+                <a:solidFill>
+                  <a:srgbClr val="334155"/>
+                </a:solidFill>
+              </a:defRPr>
+            </a:pPr>
+            <a:r>
+              <a:t>•   - Children's playground &amp; cremation/burial ground</a:t>
+            </a:r>
+          </a:p>
+          <a:p>
+            <a:pPr>
+              <a:spcBef>
+                <a:spcPts val="300"/>
+              </a:spcBef>
+              <a:defRPr sz="1100">
+                <a:solidFill>
+                  <a:srgbClr val="334155"/>
+                </a:solidFill>
+              </a:defRPr>
+            </a:pPr>
+            <a:r>
+              <a:t>• Real-Time Progress Bar: Visual percentage tracking of settled vs pending family entitlement packages.</a:t>
             </a:r>
           </a:p>
         </p:txBody>
